--- a/docs/final_presentation.pptx
+++ b/docs/final_presentation.pptx
@@ -4,28 +4,31 @@
   <p:sldMasterIdLst>
     <p:sldMasterId id="2147483648" r:id="rId1"/>
   </p:sldMasterIdLst>
+  <p:notesMasterIdLst>
+    <p:notesMasterId r:id="rId21"/>
+  </p:notesMasterIdLst>
   <p:sldIdLst>
-    <p:sldId id="256" r:id="rId7"/>
-    <p:sldId id="257" r:id="rId9"/>
-    <p:sldId id="258" r:id="rId10"/>
-    <p:sldId id="259" r:id="rId11"/>
-    <p:sldId id="260" r:id="rId12"/>
-    <p:sldId id="261" r:id="rId13"/>
-    <p:sldId id="262" r:id="rId14"/>
-    <p:sldId id="263" r:id="rId15"/>
-    <p:sldId id="264" r:id="rId16"/>
-    <p:sldId id="265" r:id="rId17"/>
-    <p:sldId id="266" r:id="rId18"/>
-    <p:sldId id="267" r:id="rId19"/>
-    <p:sldId id="268" r:id="rId20"/>
-    <p:sldId id="269" r:id="rId21"/>
-    <p:sldId id="270" r:id="rId22"/>
-    <p:sldId id="271" r:id="rId23"/>
-    <p:sldId id="272" r:id="rId24"/>
-    <p:sldId id="273" r:id="rId25"/>
-    <p:sldId id="274" r:id="rId26"/>
+    <p:sldId id="256" r:id="rId2"/>
+    <p:sldId id="257" r:id="rId3"/>
+    <p:sldId id="258" r:id="rId4"/>
+    <p:sldId id="259" r:id="rId5"/>
+    <p:sldId id="260" r:id="rId6"/>
+    <p:sldId id="261" r:id="rId7"/>
+    <p:sldId id="262" r:id="rId8"/>
+    <p:sldId id="263" r:id="rId9"/>
+    <p:sldId id="264" r:id="rId10"/>
+    <p:sldId id="265" r:id="rId11"/>
+    <p:sldId id="266" r:id="rId12"/>
+    <p:sldId id="267" r:id="rId13"/>
+    <p:sldId id="268" r:id="rId14"/>
+    <p:sldId id="269" r:id="rId15"/>
+    <p:sldId id="270" r:id="rId16"/>
+    <p:sldId id="271" r:id="rId17"/>
+    <p:sldId id="272" r:id="rId18"/>
+    <p:sldId id="273" r:id="rId19"/>
+    <p:sldId id="274" r:id="rId20"/>
   </p:sldIdLst>
-  <p:sldSz cx="12191695" cy="6858000" type="screen4x3"/>
+  <p:sldSz cx="12192000" cy="6858000"/>
   <p:notesSz cx="6858000" cy="9144000"/>
   <p:defaultTextStyle>
     <a:defPPr>
@@ -122,11 +125,27 @@
       </a:defRPr>
     </a:lvl9pPr>
   </p:defaultTextStyle>
+  <p:extLst>
+    <p:ext uri="{EFAFB233-063F-42B5-8137-9DF3F51BA10A}">
+      <p15:sldGuideLst xmlns:p15="http://schemas.microsoft.com/office/powerpoint/2012/main">
+        <p15:guide id="1" orient="horz" pos="2160">
+          <p15:clr>
+            <a:srgbClr val="A4A3A4"/>
+          </p15:clr>
+        </p15:guide>
+        <p15:guide id="2" pos="2880">
+          <p15:clr>
+            <a:srgbClr val="A4A3A4"/>
+          </p15:clr>
+        </p15:guide>
+      </p15:sldGuideLst>
+    </p:ext>
+  </p:extLst>
 </p:presentation>
 </file>
 
 <file path=ppt/notesMasters/notesMaster1.xml><?xml version="1.0" encoding="utf-8"?>
-<p:notesMaster xmlns:a="http://schemas.openxmlformats.org/drawingml/2006/main" xmlns:p="http://schemas.openxmlformats.org/presentationml/2006/main" xmlns:r="http://schemas.openxmlformats.org/officeDocument/2006/relationships">
+<p:notesMaster xmlns:a="http://schemas.openxmlformats.org/drawingml/2006/main" xmlns:r="http://schemas.openxmlformats.org/officeDocument/2006/relationships" xmlns:p="http://schemas.openxmlformats.org/presentationml/2006/main">
   <p:cSld>
     <p:bg>
       <p:bgRef idx="1001">
@@ -147,241 +166,16 @@
           <a:chExt cx="0" cy="0"/>
         </a:xfrm>
       </p:grpSpPr>
-      <p:sp>
-        <p:nvSpPr>
-          <p:cNvPr id="2" name="Header Placeholder 1"/>
-          <p:cNvSpPr>
-            <a:spLocks noGrp="1"/>
-          </p:cNvSpPr>
-          <p:nvPr>
-            <p:ph type="hdr" sz="quarter"/>
-          </p:nvPr>
-        </p:nvSpPr>
-        <p:spPr>
-          <a:xfrm>
-            <a:off x="0" y="0"/>
-            <a:ext cx="2971800" cy="457200"/>
-          </a:xfrm>
-          <a:prstGeom prst="rect">
-            <a:avLst/>
-          </a:prstGeom>
-        </p:spPr>
-        <p:txBody>
-          <a:bodyPr vert="horz" lIns="91440" tIns="45720" rIns="91440" bIns="45720" rtlCol="0"/>
-          <a:lstStyle>
-            <a:lvl1pPr algn="l">
-              <a:defRPr sz="1200"/>
-            </a:lvl1pPr>
-          </a:lstStyle>
-          <a:p>
-            <a:endParaRPr lang="en-US"/>
-          </a:p>
-        </p:txBody>
-      </p:sp>
-      <p:sp>
-        <p:nvSpPr>
-          <p:cNvPr id="3" name="Date Placeholder 2"/>
-          <p:cNvSpPr>
-            <a:spLocks noGrp="1"/>
-          </p:cNvSpPr>
-          <p:nvPr>
-            <p:ph type="dt" idx="1"/>
-          </p:nvPr>
-        </p:nvSpPr>
-        <p:spPr>
-          <a:xfrm>
-            <a:off x="3884613" y="0"/>
-            <a:ext cx="2971800" cy="457200"/>
-          </a:xfrm>
-          <a:prstGeom prst="rect">
-            <a:avLst/>
-          </a:prstGeom>
-        </p:spPr>
-        <p:txBody>
-          <a:bodyPr vert="horz" lIns="91440" tIns="45720" rIns="91440" bIns="45720" rtlCol="0"/>
-          <a:lstStyle>
-            <a:lvl1pPr algn="r">
-              <a:defRPr sz="1200"/>
-            </a:lvl1pPr>
-          </a:lstStyle>
-          <a:p>
-            <a:fld id="{0F89C1C7-3DCD-1040-A9CF-14679D8B5DDD}" type="datetimeFigureOut">
-              <a:rPr lang="en-US" smtClean="0"/>
-              <a:t>10/17/16</a:t>
-            </a:fld>
-            <a:endParaRPr lang="en-US"/>
-          </a:p>
-        </p:txBody>
-      </p:sp>
-      <p:sp>
-        <p:nvSpPr>
-          <p:cNvPr id="4" name="Slide Image Placeholder 3"/>
-          <p:cNvSpPr>
-            <a:spLocks noGrp="1" noRot="1" noChangeAspect="1"/>
-          </p:cNvSpPr>
-          <p:nvPr>
-            <p:ph type="sldImg" idx="2"/>
-          </p:nvPr>
-        </p:nvSpPr>
-        <p:spPr>
-          <a:xfrm>
-            <a:off x="1143000" y="685800"/>
-            <a:ext cx="4572000" cy="3429000"/>
-          </a:xfrm>
-          <a:prstGeom prst="rect">
-            <a:avLst/>
-          </a:prstGeom>
-          <a:noFill/>
-          <a:ln w="12700">
-            <a:solidFill>
-              <a:prstClr val="black"/>
-            </a:solidFill>
-          </a:ln>
-        </p:spPr>
-        <p:txBody>
-          <a:bodyPr vert="horz" lIns="91440" tIns="45720" rIns="91440" bIns="45720" rtlCol="0" anchor="ctr"/>
-          <a:lstStyle/>
-          <a:p>
-            <a:endParaRPr lang="en-US"/>
-          </a:p>
-        </p:txBody>
-      </p:sp>
-      <p:sp>
-        <p:nvSpPr>
-          <p:cNvPr id="5" name="Notes Placeholder 4"/>
-          <p:cNvSpPr>
-            <a:spLocks noGrp="1"/>
-          </p:cNvSpPr>
-          <p:nvPr>
-            <p:ph type="body" sz="quarter" idx="3"/>
-          </p:nvPr>
-        </p:nvSpPr>
-        <p:spPr>
-          <a:xfrm>
-            <a:off x="685800" y="4343400"/>
-            <a:ext cx="5486400" cy="4114800"/>
-          </a:xfrm>
-          <a:prstGeom prst="rect">
-            <a:avLst/>
-          </a:prstGeom>
-        </p:spPr>
-        <p:txBody>
-          <a:bodyPr vert="horz" lIns="91440" tIns="45720" rIns="91440" bIns="45720" rtlCol="0"/>
-          <a:lstStyle/>
-          <a:p>
-            <a:pPr lvl="0"/>
-            <a:r>
-              <a:rPr lang="en-US" smtClean="0"/>
-              <a:t>Click to edit Master text styles</a:t>
-            </a:r>
-          </a:p>
-          <a:p>
-            <a:pPr lvl="1"/>
-            <a:r>
-              <a:rPr lang="en-US" smtClean="0"/>
-              <a:t>Second level</a:t>
-            </a:r>
-          </a:p>
-          <a:p>
-            <a:pPr lvl="2"/>
-            <a:r>
-              <a:rPr lang="en-US" smtClean="0"/>
-              <a:t>Third level</a:t>
-            </a:r>
-          </a:p>
-          <a:p>
-            <a:pPr lvl="3"/>
-            <a:r>
-              <a:rPr lang="en-US" smtClean="0"/>
-              <a:t>Fourth level</a:t>
-            </a:r>
-          </a:p>
-          <a:p>
-            <a:pPr lvl="4"/>
-            <a:r>
-              <a:rPr lang="en-US" smtClean="0"/>
-              <a:t>Fifth level</a:t>
-            </a:r>
-            <a:endParaRPr lang="en-US"/>
-          </a:p>
-        </p:txBody>
-      </p:sp>
-      <p:sp>
-        <p:nvSpPr>
-          <p:cNvPr id="6" name="Footer Placeholder 5"/>
-          <p:cNvSpPr>
-            <a:spLocks noGrp="1"/>
-          </p:cNvSpPr>
-          <p:nvPr>
-            <p:ph type="ftr" sz="quarter" idx="4"/>
-          </p:nvPr>
-        </p:nvSpPr>
-        <p:spPr>
-          <a:xfrm>
-            <a:off x="0" y="8685213"/>
-            <a:ext cx="2971800" cy="457200"/>
-          </a:xfrm>
-          <a:prstGeom prst="rect">
-            <a:avLst/>
-          </a:prstGeom>
-        </p:spPr>
-        <p:txBody>
-          <a:bodyPr vert="horz" lIns="91440" tIns="45720" rIns="91440" bIns="45720" rtlCol="0" anchor="b"/>
-          <a:lstStyle>
-            <a:lvl1pPr algn="l">
-              <a:defRPr sz="1200"/>
-            </a:lvl1pPr>
-          </a:lstStyle>
-          <a:p>
-            <a:endParaRPr lang="en-US"/>
-          </a:p>
-        </p:txBody>
-      </p:sp>
-      <p:sp>
-        <p:nvSpPr>
-          <p:cNvPr id="7" name="Slide Number Placeholder 6"/>
-          <p:cNvSpPr>
-            <a:spLocks noGrp="1"/>
-          </p:cNvSpPr>
-          <p:nvPr>
-            <p:ph type="sldNum" sz="quarter" idx="5"/>
-          </p:nvPr>
-        </p:nvSpPr>
-        <p:spPr>
-          <a:xfrm>
-            <a:off x="3884613" y="8685213"/>
-            <a:ext cx="2971800" cy="457200"/>
-          </a:xfrm>
-          <a:prstGeom prst="rect">
-            <a:avLst/>
-          </a:prstGeom>
-        </p:spPr>
-        <p:txBody>
-          <a:bodyPr vert="horz" lIns="91440" tIns="45720" rIns="91440" bIns="45720" rtlCol="0" anchor="b"/>
-          <a:lstStyle>
-            <a:lvl1pPr algn="r">
-              <a:defRPr sz="1200"/>
-            </a:lvl1pPr>
-          </a:lstStyle>
-          <a:p>
-            <a:fld id="{BB5E49A5-4136-284D-997B-48E1D791AD67}" type="slidenum">
-              <a:rPr lang="en-US" smtClean="0"/>
-              <a:t>‹#›</a:t>
-            </a:fld>
-            <a:endParaRPr lang="en-US"/>
-          </a:p>
-        </p:txBody>
-      </p:sp>
     </p:spTree>
     <p:extLst>
       <p:ext uri="{BB962C8B-B14F-4D97-AF65-F5344CB8AC3E}">
-        <p14:creationId xmlns:p14="http://schemas.microsoft.com/office/powerpoint/2010/main" val="2623252185"/>
+        <p14:creationId xmlns:p14="http://schemas.microsoft.com/office/powerpoint/2010/main" val="302068786"/>
       </p:ext>
     </p:extLst>
   </p:cSld>
   <p:clrMap bg1="lt1" tx1="dk1" bg2="lt2" tx2="dk2" accent1="accent1" accent2="accent2" accent3="accent3" accent4="accent4" accent5="accent5" accent6="accent6" hlink="hlink" folHlink="folHlink"/>
   <p:notesStyle>
-    <a:lvl1pPr marL="0" algn="l" defTabSz="457200" rtl="0" eaLnBrk="1" latinLnBrk="0" hangingPunct="1">
+    <a:lvl1pPr marL="0" algn="l" defTabSz="914400" rtl="0" eaLnBrk="1" latinLnBrk="0" hangingPunct="1">
       <a:defRPr sz="1200" kern="1200">
         <a:solidFill>
           <a:schemeClr val="tx1"/>
@@ -391,7 +185,7 @@
         <a:cs typeface="+mn-cs"/>
       </a:defRPr>
     </a:lvl1pPr>
-    <a:lvl2pPr marL="457200" algn="l" defTabSz="457200" rtl="0" eaLnBrk="1" latinLnBrk="0" hangingPunct="1">
+    <a:lvl2pPr marL="457200" algn="l" defTabSz="914400" rtl="0" eaLnBrk="1" latinLnBrk="0" hangingPunct="1">
       <a:defRPr sz="1200" kern="1200">
         <a:solidFill>
           <a:schemeClr val="tx1"/>
@@ -401,7 +195,7 @@
         <a:cs typeface="+mn-cs"/>
       </a:defRPr>
     </a:lvl2pPr>
-    <a:lvl3pPr marL="914400" algn="l" defTabSz="457200" rtl="0" eaLnBrk="1" latinLnBrk="0" hangingPunct="1">
+    <a:lvl3pPr marL="914400" algn="l" defTabSz="914400" rtl="0" eaLnBrk="1" latinLnBrk="0" hangingPunct="1">
       <a:defRPr sz="1200" kern="1200">
         <a:solidFill>
           <a:schemeClr val="tx1"/>
@@ -411,7 +205,7 @@
         <a:cs typeface="+mn-cs"/>
       </a:defRPr>
     </a:lvl3pPr>
-    <a:lvl4pPr marL="1371600" algn="l" defTabSz="457200" rtl="0" eaLnBrk="1" latinLnBrk="0" hangingPunct="1">
+    <a:lvl4pPr marL="1371600" algn="l" defTabSz="914400" rtl="0" eaLnBrk="1" latinLnBrk="0" hangingPunct="1">
       <a:defRPr sz="1200" kern="1200">
         <a:solidFill>
           <a:schemeClr val="tx1"/>
@@ -421,7 +215,7 @@
         <a:cs typeface="+mn-cs"/>
       </a:defRPr>
     </a:lvl4pPr>
-    <a:lvl5pPr marL="1828800" algn="l" defTabSz="457200" rtl="0" eaLnBrk="1" latinLnBrk="0" hangingPunct="1">
+    <a:lvl5pPr marL="1828800" algn="l" defTabSz="914400" rtl="0" eaLnBrk="1" latinLnBrk="0" hangingPunct="1">
       <a:defRPr sz="1200" kern="1200">
         <a:solidFill>
           <a:schemeClr val="tx1"/>
@@ -431,7 +225,7 @@
         <a:cs typeface="+mn-cs"/>
       </a:defRPr>
     </a:lvl5pPr>
-    <a:lvl6pPr marL="2286000" algn="l" defTabSz="457200" rtl="0" eaLnBrk="1" latinLnBrk="0" hangingPunct="1">
+    <a:lvl6pPr marL="2286000" algn="l" defTabSz="914400" rtl="0" eaLnBrk="1" latinLnBrk="0" hangingPunct="1">
       <a:defRPr sz="1200" kern="1200">
         <a:solidFill>
           <a:schemeClr val="tx1"/>
@@ -441,7 +235,7 @@
         <a:cs typeface="+mn-cs"/>
       </a:defRPr>
     </a:lvl6pPr>
-    <a:lvl7pPr marL="2743200" algn="l" defTabSz="457200" rtl="0" eaLnBrk="1" latinLnBrk="0" hangingPunct="1">
+    <a:lvl7pPr marL="2743200" algn="l" defTabSz="914400" rtl="0" eaLnBrk="1" latinLnBrk="0" hangingPunct="1">
       <a:defRPr sz="1200" kern="1200">
         <a:solidFill>
           <a:schemeClr val="tx1"/>
@@ -451,7 +245,7 @@
         <a:cs typeface="+mn-cs"/>
       </a:defRPr>
     </a:lvl7pPr>
-    <a:lvl8pPr marL="3200400" algn="l" defTabSz="457200" rtl="0" eaLnBrk="1" latinLnBrk="0" hangingPunct="1">
+    <a:lvl8pPr marL="3200400" algn="l" defTabSz="914400" rtl="0" eaLnBrk="1" latinLnBrk="0" hangingPunct="1">
       <a:defRPr sz="1200" kern="1200">
         <a:solidFill>
           <a:schemeClr val="tx1"/>
@@ -461,7 +255,7 @@
         <a:cs typeface="+mn-cs"/>
       </a:defRPr>
     </a:lvl8pPr>
-    <a:lvl9pPr marL="3657600" algn="l" defTabSz="457200" rtl="0" eaLnBrk="1" latinLnBrk="0" hangingPunct="1">
+    <a:lvl9pPr marL="3657600" algn="l" defTabSz="914400" rtl="0" eaLnBrk="1" latinLnBrk="0" hangingPunct="1">
       <a:defRPr sz="1200" kern="1200">
         <a:solidFill>
           <a:schemeClr val="tx1"/>
@@ -476,7 +270,7 @@
 </file>
 
 <file path=ppt/notesSlides/notesSlide1.xml><?xml version="1.0" encoding="utf-8"?>
-<p:notes xmlns:a="http://schemas.openxmlformats.org/drawingml/2006/main" xmlns:p="http://schemas.openxmlformats.org/presentationml/2006/main" xmlns:r="http://schemas.openxmlformats.org/officeDocument/2006/relationships">
+<p:notes xmlns:a="http://schemas.openxmlformats.org/drawingml/2006/main" xmlns:r="http://schemas.openxmlformats.org/officeDocument/2006/relationships" xmlns:p="http://schemas.openxmlformats.org/presentationml/2006/main">
   <p:cSld>
     <p:spTree>
       <p:nvGrpSpPr>
@@ -496,7 +290,7 @@
         <p:nvSpPr>
           <p:cNvPr id="2" name="Slide Image Placeholder 1"/>
           <p:cNvSpPr>
-            <a:spLocks noGrp="1"/>
+            <a:spLocks noGrp="1" noRot="1" noChangeAspect="1"/>
           </p:cNvSpPr>
           <p:nvPr>
             <p:ph type="sldImg" idx="2"/>
@@ -511,7 +305,7 @@
             <a:spLocks noGrp="1"/>
           </p:cNvSpPr>
           <p:nvPr>
-            <p:ph type="body" idx="3" sz="quarter"/>
+            <p:ph type="body" sz="quarter" idx="3"/>
           </p:nvPr>
         </p:nvSpPr>
         <p:spPr/>
@@ -547,7 +341,7 @@
             <a:spLocks noGrp="1"/>
           </p:cNvSpPr>
           <p:nvPr>
-            <p:ph type="sldNum" idx="5" sz="quarter"/>
+            <p:ph type="sldNum" sz="quarter" idx="5"/>
           </p:nvPr>
         </p:nvSpPr>
         <p:spPr/>
@@ -561,7 +355,7 @@
 </file>
 
 <file path=ppt/notesSlides/notesSlide10.xml><?xml version="1.0" encoding="utf-8"?>
-<p:notes xmlns:a="http://schemas.openxmlformats.org/drawingml/2006/main" xmlns:p="http://schemas.openxmlformats.org/presentationml/2006/main" xmlns:r="http://schemas.openxmlformats.org/officeDocument/2006/relationships">
+<p:notes xmlns:a="http://schemas.openxmlformats.org/drawingml/2006/main" xmlns:r="http://schemas.openxmlformats.org/officeDocument/2006/relationships" xmlns:p="http://schemas.openxmlformats.org/presentationml/2006/main">
   <p:cSld>
     <p:spTree>
       <p:nvGrpSpPr>
@@ -581,7 +375,7 @@
         <p:nvSpPr>
           <p:cNvPr id="2" name="Slide Image Placeholder 1"/>
           <p:cNvSpPr>
-            <a:spLocks noGrp="1"/>
+            <a:spLocks noGrp="1" noRot="1" noChangeAspect="1"/>
           </p:cNvSpPr>
           <p:nvPr>
             <p:ph type="sldImg" idx="2"/>
@@ -596,7 +390,7 @@
             <a:spLocks noGrp="1"/>
           </p:cNvSpPr>
           <p:nvPr>
-            <p:ph type="body" idx="3" sz="quarter"/>
+            <p:ph type="body" sz="quarter" idx="3"/>
           </p:nvPr>
         </p:nvSpPr>
         <p:spPr/>
@@ -642,7 +436,7 @@
             <a:spLocks noGrp="1"/>
           </p:cNvSpPr>
           <p:nvPr>
-            <p:ph type="sldNum" idx="5" sz="quarter"/>
+            <p:ph type="sldNum" sz="quarter" idx="5"/>
           </p:nvPr>
         </p:nvSpPr>
         <p:spPr/>
@@ -656,7 +450,7 @@
 </file>
 
 <file path=ppt/notesSlides/notesSlide11.xml><?xml version="1.0" encoding="utf-8"?>
-<p:notes xmlns:a="http://schemas.openxmlformats.org/drawingml/2006/main" xmlns:p="http://schemas.openxmlformats.org/presentationml/2006/main" xmlns:r="http://schemas.openxmlformats.org/officeDocument/2006/relationships">
+<p:notes xmlns:a="http://schemas.openxmlformats.org/drawingml/2006/main" xmlns:r="http://schemas.openxmlformats.org/officeDocument/2006/relationships" xmlns:p="http://schemas.openxmlformats.org/presentationml/2006/main">
   <p:cSld>
     <p:spTree>
       <p:nvGrpSpPr>
@@ -676,7 +470,7 @@
         <p:nvSpPr>
           <p:cNvPr id="2" name="Slide Image Placeholder 1"/>
           <p:cNvSpPr>
-            <a:spLocks noGrp="1"/>
+            <a:spLocks noGrp="1" noRot="1" noChangeAspect="1"/>
           </p:cNvSpPr>
           <p:nvPr>
             <p:ph type="sldImg" idx="2"/>
@@ -691,7 +485,7 @@
             <a:spLocks noGrp="1"/>
           </p:cNvSpPr>
           <p:nvPr>
-            <p:ph type="body" idx="3" sz="quarter"/>
+            <p:ph type="body" sz="quarter" idx="3"/>
           </p:nvPr>
         </p:nvSpPr>
         <p:spPr/>
@@ -742,7 +536,7 @@
             <a:spLocks noGrp="1"/>
           </p:cNvSpPr>
           <p:nvPr>
-            <p:ph type="sldNum" idx="5" sz="quarter"/>
+            <p:ph type="sldNum" sz="quarter" idx="5"/>
           </p:nvPr>
         </p:nvSpPr>
         <p:spPr/>
@@ -756,7 +550,7 @@
 </file>
 
 <file path=ppt/notesSlides/notesSlide12.xml><?xml version="1.0" encoding="utf-8"?>
-<p:notes xmlns:a="http://schemas.openxmlformats.org/drawingml/2006/main" xmlns:p="http://schemas.openxmlformats.org/presentationml/2006/main" xmlns:r="http://schemas.openxmlformats.org/officeDocument/2006/relationships">
+<p:notes xmlns:a="http://schemas.openxmlformats.org/drawingml/2006/main" xmlns:r="http://schemas.openxmlformats.org/officeDocument/2006/relationships" xmlns:p="http://schemas.openxmlformats.org/presentationml/2006/main">
   <p:cSld>
     <p:spTree>
       <p:nvGrpSpPr>
@@ -776,7 +570,7 @@
         <p:nvSpPr>
           <p:cNvPr id="2" name="Slide Image Placeholder 1"/>
           <p:cNvSpPr>
-            <a:spLocks noGrp="1"/>
+            <a:spLocks noGrp="1" noRot="1" noChangeAspect="1"/>
           </p:cNvSpPr>
           <p:nvPr>
             <p:ph type="sldImg" idx="2"/>
@@ -791,7 +585,7 @@
             <a:spLocks noGrp="1"/>
           </p:cNvSpPr>
           <p:nvPr>
-            <p:ph type="body" idx="3" sz="quarter"/>
+            <p:ph type="body" sz="quarter" idx="3"/>
           </p:nvPr>
         </p:nvSpPr>
         <p:spPr/>
@@ -837,7 +631,7 @@
             <a:spLocks noGrp="1"/>
           </p:cNvSpPr>
           <p:nvPr>
-            <p:ph type="sldNum" idx="5" sz="quarter"/>
+            <p:ph type="sldNum" sz="quarter" idx="5"/>
           </p:nvPr>
         </p:nvSpPr>
         <p:spPr/>
@@ -851,7 +645,7 @@
 </file>
 
 <file path=ppt/notesSlides/notesSlide13.xml><?xml version="1.0" encoding="utf-8"?>
-<p:notes xmlns:a="http://schemas.openxmlformats.org/drawingml/2006/main" xmlns:p="http://schemas.openxmlformats.org/presentationml/2006/main" xmlns:r="http://schemas.openxmlformats.org/officeDocument/2006/relationships">
+<p:notes xmlns:a="http://schemas.openxmlformats.org/drawingml/2006/main" xmlns:r="http://schemas.openxmlformats.org/officeDocument/2006/relationships" xmlns:p="http://schemas.openxmlformats.org/presentationml/2006/main">
   <p:cSld>
     <p:spTree>
       <p:nvGrpSpPr>
@@ -871,7 +665,7 @@
         <p:nvSpPr>
           <p:cNvPr id="2" name="Slide Image Placeholder 1"/>
           <p:cNvSpPr>
-            <a:spLocks noGrp="1"/>
+            <a:spLocks noGrp="1" noRot="1" noChangeAspect="1"/>
           </p:cNvSpPr>
           <p:nvPr>
             <p:ph type="sldImg" idx="2"/>
@@ -886,7 +680,7 @@
             <a:spLocks noGrp="1"/>
           </p:cNvSpPr>
           <p:nvPr>
-            <p:ph type="body" idx="3" sz="quarter"/>
+            <p:ph type="body" sz="quarter" idx="3"/>
           </p:nvPr>
         </p:nvSpPr>
         <p:spPr/>
@@ -932,7 +726,7 @@
             <a:spLocks noGrp="1"/>
           </p:cNvSpPr>
           <p:nvPr>
-            <p:ph type="sldNum" idx="5" sz="quarter"/>
+            <p:ph type="sldNum" sz="quarter" idx="5"/>
           </p:nvPr>
         </p:nvSpPr>
         <p:spPr/>
@@ -946,7 +740,7 @@
 </file>
 
 <file path=ppt/notesSlides/notesSlide14.xml><?xml version="1.0" encoding="utf-8"?>
-<p:notes xmlns:a="http://schemas.openxmlformats.org/drawingml/2006/main" xmlns:p="http://schemas.openxmlformats.org/presentationml/2006/main" xmlns:r="http://schemas.openxmlformats.org/officeDocument/2006/relationships">
+<p:notes xmlns:a="http://schemas.openxmlformats.org/drawingml/2006/main" xmlns:r="http://schemas.openxmlformats.org/officeDocument/2006/relationships" xmlns:p="http://schemas.openxmlformats.org/presentationml/2006/main">
   <p:cSld>
     <p:spTree>
       <p:nvGrpSpPr>
@@ -966,7 +760,7 @@
         <p:nvSpPr>
           <p:cNvPr id="2" name="Slide Image Placeholder 1"/>
           <p:cNvSpPr>
-            <a:spLocks noGrp="1"/>
+            <a:spLocks noGrp="1" noRot="1" noChangeAspect="1"/>
           </p:cNvSpPr>
           <p:nvPr>
             <p:ph type="sldImg" idx="2"/>
@@ -981,7 +775,7 @@
             <a:spLocks noGrp="1"/>
           </p:cNvSpPr>
           <p:nvPr>
-            <p:ph type="body" idx="3" sz="quarter"/>
+            <p:ph type="body" sz="quarter" idx="3"/>
           </p:nvPr>
         </p:nvSpPr>
         <p:spPr/>
@@ -1022,7 +816,7 @@
             <a:spLocks noGrp="1"/>
           </p:cNvSpPr>
           <p:nvPr>
-            <p:ph type="sldNum" idx="5" sz="quarter"/>
+            <p:ph type="sldNum" sz="quarter" idx="5"/>
           </p:nvPr>
         </p:nvSpPr>
         <p:spPr/>
@@ -1036,7 +830,7 @@
 </file>
 
 <file path=ppt/notesSlides/notesSlide15.xml><?xml version="1.0" encoding="utf-8"?>
-<p:notes xmlns:a="http://schemas.openxmlformats.org/drawingml/2006/main" xmlns:p="http://schemas.openxmlformats.org/presentationml/2006/main" xmlns:r="http://schemas.openxmlformats.org/officeDocument/2006/relationships">
+<p:notes xmlns:a="http://schemas.openxmlformats.org/drawingml/2006/main" xmlns:r="http://schemas.openxmlformats.org/officeDocument/2006/relationships" xmlns:p="http://schemas.openxmlformats.org/presentationml/2006/main">
   <p:cSld>
     <p:spTree>
       <p:nvGrpSpPr>
@@ -1056,7 +850,7 @@
         <p:nvSpPr>
           <p:cNvPr id="2" name="Slide Image Placeholder 1"/>
           <p:cNvSpPr>
-            <a:spLocks noGrp="1"/>
+            <a:spLocks noGrp="1" noRot="1" noChangeAspect="1"/>
           </p:cNvSpPr>
           <p:nvPr>
             <p:ph type="sldImg" idx="2"/>
@@ -1071,7 +865,7 @@
             <a:spLocks noGrp="1"/>
           </p:cNvSpPr>
           <p:nvPr>
-            <p:ph type="body" idx="3" sz="quarter"/>
+            <p:ph type="body" sz="quarter" idx="3"/>
           </p:nvPr>
         </p:nvSpPr>
         <p:spPr/>
@@ -1117,7 +911,7 @@
             <a:spLocks noGrp="1"/>
           </p:cNvSpPr>
           <p:nvPr>
-            <p:ph type="sldNum" idx="5" sz="quarter"/>
+            <p:ph type="sldNum" sz="quarter" idx="5"/>
           </p:nvPr>
         </p:nvSpPr>
         <p:spPr/>
@@ -1131,7 +925,7 @@
 </file>
 
 <file path=ppt/notesSlides/notesSlide16.xml><?xml version="1.0" encoding="utf-8"?>
-<p:notes xmlns:a="http://schemas.openxmlformats.org/drawingml/2006/main" xmlns:p="http://schemas.openxmlformats.org/presentationml/2006/main" xmlns:r="http://schemas.openxmlformats.org/officeDocument/2006/relationships">
+<p:notes xmlns:a="http://schemas.openxmlformats.org/drawingml/2006/main" xmlns:r="http://schemas.openxmlformats.org/officeDocument/2006/relationships" xmlns:p="http://schemas.openxmlformats.org/presentationml/2006/main">
   <p:cSld>
     <p:spTree>
       <p:nvGrpSpPr>
@@ -1151,7 +945,7 @@
         <p:nvSpPr>
           <p:cNvPr id="2" name="Slide Image Placeholder 1"/>
           <p:cNvSpPr>
-            <a:spLocks noGrp="1"/>
+            <a:spLocks noGrp="1" noRot="1" noChangeAspect="1"/>
           </p:cNvSpPr>
           <p:nvPr>
             <p:ph type="sldImg" idx="2"/>
@@ -1166,7 +960,7 @@
             <a:spLocks noGrp="1"/>
           </p:cNvSpPr>
           <p:nvPr>
-            <p:ph type="body" idx="3" sz="quarter"/>
+            <p:ph type="body" sz="quarter" idx="3"/>
           </p:nvPr>
         </p:nvSpPr>
         <p:spPr/>
@@ -1187,7 +981,7 @@
             <a:spLocks noGrp="1"/>
           </p:cNvSpPr>
           <p:nvPr>
-            <p:ph type="sldNum" idx="5" sz="quarter"/>
+            <p:ph type="sldNum" sz="quarter" idx="5"/>
           </p:nvPr>
         </p:nvSpPr>
         <p:spPr/>
@@ -1201,7 +995,7 @@
 </file>
 
 <file path=ppt/notesSlides/notesSlide17.xml><?xml version="1.0" encoding="utf-8"?>
-<p:notes xmlns:a="http://schemas.openxmlformats.org/drawingml/2006/main" xmlns:p="http://schemas.openxmlformats.org/presentationml/2006/main" xmlns:r="http://schemas.openxmlformats.org/officeDocument/2006/relationships">
+<p:notes xmlns:a="http://schemas.openxmlformats.org/drawingml/2006/main" xmlns:r="http://schemas.openxmlformats.org/officeDocument/2006/relationships" xmlns:p="http://schemas.openxmlformats.org/presentationml/2006/main">
   <p:cSld>
     <p:spTree>
       <p:nvGrpSpPr>
@@ -1221,7 +1015,7 @@
         <p:nvSpPr>
           <p:cNvPr id="2" name="Slide Image Placeholder 1"/>
           <p:cNvSpPr>
-            <a:spLocks noGrp="1"/>
+            <a:spLocks noGrp="1" noRot="1" noChangeAspect="1"/>
           </p:cNvSpPr>
           <p:nvPr>
             <p:ph type="sldImg" idx="2"/>
@@ -1236,7 +1030,7 @@
             <a:spLocks noGrp="1"/>
           </p:cNvSpPr>
           <p:nvPr>
-            <p:ph type="body" idx="3" sz="quarter"/>
+            <p:ph type="body" sz="quarter" idx="3"/>
           </p:nvPr>
         </p:nvSpPr>
         <p:spPr/>
@@ -1257,7 +1051,7 @@
             <a:spLocks noGrp="1"/>
           </p:cNvSpPr>
           <p:nvPr>
-            <p:ph type="sldNum" idx="5" sz="quarter"/>
+            <p:ph type="sldNum" sz="quarter" idx="5"/>
           </p:nvPr>
         </p:nvSpPr>
         <p:spPr/>
@@ -1271,7 +1065,7 @@
 </file>
 
 <file path=ppt/notesSlides/notesSlide18.xml><?xml version="1.0" encoding="utf-8"?>
-<p:notes xmlns:a="http://schemas.openxmlformats.org/drawingml/2006/main" xmlns:p="http://schemas.openxmlformats.org/presentationml/2006/main" xmlns:r="http://schemas.openxmlformats.org/officeDocument/2006/relationships">
+<p:notes xmlns:a="http://schemas.openxmlformats.org/drawingml/2006/main" xmlns:r="http://schemas.openxmlformats.org/officeDocument/2006/relationships" xmlns:p="http://schemas.openxmlformats.org/presentationml/2006/main">
   <p:cSld>
     <p:spTree>
       <p:nvGrpSpPr>
@@ -1291,7 +1085,7 @@
         <p:nvSpPr>
           <p:cNvPr id="2" name="Slide Image Placeholder 1"/>
           <p:cNvSpPr>
-            <a:spLocks noGrp="1"/>
+            <a:spLocks noGrp="1" noRot="1" noChangeAspect="1"/>
           </p:cNvSpPr>
           <p:nvPr>
             <p:ph type="sldImg" idx="2"/>
@@ -1306,7 +1100,7 @@
             <a:spLocks noGrp="1"/>
           </p:cNvSpPr>
           <p:nvPr>
-            <p:ph type="body" idx="3" sz="quarter"/>
+            <p:ph type="body" sz="quarter" idx="3"/>
           </p:nvPr>
         </p:nvSpPr>
         <p:spPr/>
@@ -1327,7 +1121,7 @@
             <a:spLocks noGrp="1"/>
           </p:cNvSpPr>
           <p:nvPr>
-            <p:ph type="sldNum" idx="5" sz="quarter"/>
+            <p:ph type="sldNum" sz="quarter" idx="5"/>
           </p:nvPr>
         </p:nvSpPr>
         <p:spPr/>
@@ -1341,7 +1135,7 @@
 </file>
 
 <file path=ppt/notesSlides/notesSlide19.xml><?xml version="1.0" encoding="utf-8"?>
-<p:notes xmlns:a="http://schemas.openxmlformats.org/drawingml/2006/main" xmlns:p="http://schemas.openxmlformats.org/presentationml/2006/main" xmlns:r="http://schemas.openxmlformats.org/officeDocument/2006/relationships">
+<p:notes xmlns:a="http://schemas.openxmlformats.org/drawingml/2006/main" xmlns:r="http://schemas.openxmlformats.org/officeDocument/2006/relationships" xmlns:p="http://schemas.openxmlformats.org/presentationml/2006/main">
   <p:cSld>
     <p:spTree>
       <p:nvGrpSpPr>
@@ -1361,7 +1155,7 @@
         <p:nvSpPr>
           <p:cNvPr id="2" name="Slide Image Placeholder 1"/>
           <p:cNvSpPr>
-            <a:spLocks noGrp="1"/>
+            <a:spLocks noGrp="1" noRot="1" noChangeAspect="1"/>
           </p:cNvSpPr>
           <p:nvPr>
             <p:ph type="sldImg" idx="2"/>
@@ -1376,7 +1170,7 @@
             <a:spLocks noGrp="1"/>
           </p:cNvSpPr>
           <p:nvPr>
-            <p:ph type="body" idx="3" sz="quarter"/>
+            <p:ph type="body" sz="quarter" idx="3"/>
           </p:nvPr>
         </p:nvSpPr>
         <p:spPr/>
@@ -1397,7 +1191,7 @@
             <a:spLocks noGrp="1"/>
           </p:cNvSpPr>
           <p:nvPr>
-            <p:ph type="sldNum" idx="5" sz="quarter"/>
+            <p:ph type="sldNum" sz="quarter" idx="5"/>
           </p:nvPr>
         </p:nvSpPr>
         <p:spPr/>
@@ -1411,7 +1205,7 @@
 </file>
 
 <file path=ppt/notesSlides/notesSlide2.xml><?xml version="1.0" encoding="utf-8"?>
-<p:notes xmlns:a="http://schemas.openxmlformats.org/drawingml/2006/main" xmlns:p="http://schemas.openxmlformats.org/presentationml/2006/main" xmlns:r="http://schemas.openxmlformats.org/officeDocument/2006/relationships">
+<p:notes xmlns:a="http://schemas.openxmlformats.org/drawingml/2006/main" xmlns:r="http://schemas.openxmlformats.org/officeDocument/2006/relationships" xmlns:p="http://schemas.openxmlformats.org/presentationml/2006/main">
   <p:cSld>
     <p:spTree>
       <p:nvGrpSpPr>
@@ -1431,7 +1225,7 @@
         <p:nvSpPr>
           <p:cNvPr id="2" name="Slide Image Placeholder 1"/>
           <p:cNvSpPr>
-            <a:spLocks noGrp="1"/>
+            <a:spLocks noGrp="1" noRot="1" noChangeAspect="1"/>
           </p:cNvSpPr>
           <p:nvPr>
             <p:ph type="sldImg" idx="2"/>
@@ -1446,7 +1240,7 @@
             <a:spLocks noGrp="1"/>
           </p:cNvSpPr>
           <p:nvPr>
-            <p:ph type="body" idx="3" sz="quarter"/>
+            <p:ph type="body" sz="quarter" idx="3"/>
           </p:nvPr>
         </p:nvSpPr>
         <p:spPr/>
@@ -1487,7 +1281,7 @@
             <a:spLocks noGrp="1"/>
           </p:cNvSpPr>
           <p:nvPr>
-            <p:ph type="sldNum" idx="5" sz="quarter"/>
+            <p:ph type="sldNum" sz="quarter" idx="5"/>
           </p:nvPr>
         </p:nvSpPr>
         <p:spPr/>
@@ -1501,7 +1295,7 @@
 </file>
 
 <file path=ppt/notesSlides/notesSlide3.xml><?xml version="1.0" encoding="utf-8"?>
-<p:notes xmlns:a="http://schemas.openxmlformats.org/drawingml/2006/main" xmlns:p="http://schemas.openxmlformats.org/presentationml/2006/main" xmlns:r="http://schemas.openxmlformats.org/officeDocument/2006/relationships">
+<p:notes xmlns:a="http://schemas.openxmlformats.org/drawingml/2006/main" xmlns:r="http://schemas.openxmlformats.org/officeDocument/2006/relationships" xmlns:p="http://schemas.openxmlformats.org/presentationml/2006/main">
   <p:cSld>
     <p:spTree>
       <p:nvGrpSpPr>
@@ -1521,7 +1315,7 @@
         <p:nvSpPr>
           <p:cNvPr id="2" name="Slide Image Placeholder 1"/>
           <p:cNvSpPr>
-            <a:spLocks noGrp="1"/>
+            <a:spLocks noGrp="1" noRot="1" noChangeAspect="1"/>
           </p:cNvSpPr>
           <p:nvPr>
             <p:ph type="sldImg" idx="2"/>
@@ -1536,7 +1330,7 @@
             <a:spLocks noGrp="1"/>
           </p:cNvSpPr>
           <p:nvPr>
-            <p:ph type="body" idx="3" sz="quarter"/>
+            <p:ph type="body" sz="quarter" idx="3"/>
           </p:nvPr>
         </p:nvSpPr>
         <p:spPr/>
@@ -1577,7 +1371,7 @@
             <a:spLocks noGrp="1"/>
           </p:cNvSpPr>
           <p:nvPr>
-            <p:ph type="sldNum" idx="5" sz="quarter"/>
+            <p:ph type="sldNum" sz="quarter" idx="5"/>
           </p:nvPr>
         </p:nvSpPr>
         <p:spPr/>
@@ -1591,7 +1385,7 @@
 </file>
 
 <file path=ppt/notesSlides/notesSlide4.xml><?xml version="1.0" encoding="utf-8"?>
-<p:notes xmlns:a="http://schemas.openxmlformats.org/drawingml/2006/main" xmlns:p="http://schemas.openxmlformats.org/presentationml/2006/main" xmlns:r="http://schemas.openxmlformats.org/officeDocument/2006/relationships">
+<p:notes xmlns:a="http://schemas.openxmlformats.org/drawingml/2006/main" xmlns:r="http://schemas.openxmlformats.org/officeDocument/2006/relationships" xmlns:p="http://schemas.openxmlformats.org/presentationml/2006/main">
   <p:cSld>
     <p:spTree>
       <p:nvGrpSpPr>
@@ -1611,7 +1405,7 @@
         <p:nvSpPr>
           <p:cNvPr id="2" name="Slide Image Placeholder 1"/>
           <p:cNvSpPr>
-            <a:spLocks noGrp="1"/>
+            <a:spLocks noGrp="1" noRot="1" noChangeAspect="1"/>
           </p:cNvSpPr>
           <p:nvPr>
             <p:ph type="sldImg" idx="2"/>
@@ -1626,7 +1420,7 @@
             <a:spLocks noGrp="1"/>
           </p:cNvSpPr>
           <p:nvPr>
-            <p:ph type="body" idx="3" sz="quarter"/>
+            <p:ph type="body" sz="quarter" idx="3"/>
           </p:nvPr>
         </p:nvSpPr>
         <p:spPr/>
@@ -1662,7 +1456,7 @@
             <a:spLocks noGrp="1"/>
           </p:cNvSpPr>
           <p:nvPr>
-            <p:ph type="sldNum" idx="5" sz="quarter"/>
+            <p:ph type="sldNum" sz="quarter" idx="5"/>
           </p:nvPr>
         </p:nvSpPr>
         <p:spPr/>
@@ -1676,7 +1470,7 @@
 </file>
 
 <file path=ppt/notesSlides/notesSlide5.xml><?xml version="1.0" encoding="utf-8"?>
-<p:notes xmlns:a="http://schemas.openxmlformats.org/drawingml/2006/main" xmlns:p="http://schemas.openxmlformats.org/presentationml/2006/main" xmlns:r="http://schemas.openxmlformats.org/officeDocument/2006/relationships">
+<p:notes xmlns:a="http://schemas.openxmlformats.org/drawingml/2006/main" xmlns:r="http://schemas.openxmlformats.org/officeDocument/2006/relationships" xmlns:p="http://schemas.openxmlformats.org/presentationml/2006/main">
   <p:cSld>
     <p:spTree>
       <p:nvGrpSpPr>
@@ -1696,7 +1490,7 @@
         <p:nvSpPr>
           <p:cNvPr id="2" name="Slide Image Placeholder 1"/>
           <p:cNvSpPr>
-            <a:spLocks noGrp="1"/>
+            <a:spLocks noGrp="1" noRot="1" noChangeAspect="1"/>
           </p:cNvSpPr>
           <p:nvPr>
             <p:ph type="sldImg" idx="2"/>
@@ -1711,7 +1505,7 @@
             <a:spLocks noGrp="1"/>
           </p:cNvSpPr>
           <p:nvPr>
-            <p:ph type="body" idx="3" sz="quarter"/>
+            <p:ph type="body" sz="quarter" idx="3"/>
           </p:nvPr>
         </p:nvSpPr>
         <p:spPr/>
@@ -1747,7 +1541,7 @@
             <a:spLocks noGrp="1"/>
           </p:cNvSpPr>
           <p:nvPr>
-            <p:ph type="sldNum" idx="5" sz="quarter"/>
+            <p:ph type="sldNum" sz="quarter" idx="5"/>
           </p:nvPr>
         </p:nvSpPr>
         <p:spPr/>
@@ -1761,7 +1555,7 @@
 </file>
 
 <file path=ppt/notesSlides/notesSlide6.xml><?xml version="1.0" encoding="utf-8"?>
-<p:notes xmlns:a="http://schemas.openxmlformats.org/drawingml/2006/main" xmlns:p="http://schemas.openxmlformats.org/presentationml/2006/main" xmlns:r="http://schemas.openxmlformats.org/officeDocument/2006/relationships">
+<p:notes xmlns:a="http://schemas.openxmlformats.org/drawingml/2006/main" xmlns:r="http://schemas.openxmlformats.org/officeDocument/2006/relationships" xmlns:p="http://schemas.openxmlformats.org/presentationml/2006/main">
   <p:cSld>
     <p:spTree>
       <p:nvGrpSpPr>
@@ -1781,7 +1575,7 @@
         <p:nvSpPr>
           <p:cNvPr id="2" name="Slide Image Placeholder 1"/>
           <p:cNvSpPr>
-            <a:spLocks noGrp="1"/>
+            <a:spLocks noGrp="1" noRot="1" noChangeAspect="1"/>
           </p:cNvSpPr>
           <p:nvPr>
             <p:ph type="sldImg" idx="2"/>
@@ -1796,7 +1590,7 @@
             <a:spLocks noGrp="1"/>
           </p:cNvSpPr>
           <p:nvPr>
-            <p:ph type="body" idx="3" sz="quarter"/>
+            <p:ph type="body" sz="quarter" idx="3"/>
           </p:nvPr>
         </p:nvSpPr>
         <p:spPr/>
@@ -1837,7 +1631,7 @@
             <a:spLocks noGrp="1"/>
           </p:cNvSpPr>
           <p:nvPr>
-            <p:ph type="sldNum" idx="5" sz="quarter"/>
+            <p:ph type="sldNum" sz="quarter" idx="5"/>
           </p:nvPr>
         </p:nvSpPr>
         <p:spPr/>
@@ -1851,7 +1645,7 @@
 </file>
 
 <file path=ppt/notesSlides/notesSlide7.xml><?xml version="1.0" encoding="utf-8"?>
-<p:notes xmlns:a="http://schemas.openxmlformats.org/drawingml/2006/main" xmlns:p="http://schemas.openxmlformats.org/presentationml/2006/main" xmlns:r="http://schemas.openxmlformats.org/officeDocument/2006/relationships">
+<p:notes xmlns:a="http://schemas.openxmlformats.org/drawingml/2006/main" xmlns:r="http://schemas.openxmlformats.org/officeDocument/2006/relationships" xmlns:p="http://schemas.openxmlformats.org/presentationml/2006/main">
   <p:cSld>
     <p:spTree>
       <p:nvGrpSpPr>
@@ -1871,7 +1665,7 @@
         <p:nvSpPr>
           <p:cNvPr id="2" name="Slide Image Placeholder 1"/>
           <p:cNvSpPr>
-            <a:spLocks noGrp="1"/>
+            <a:spLocks noGrp="1" noRot="1" noChangeAspect="1"/>
           </p:cNvSpPr>
           <p:nvPr>
             <p:ph type="sldImg" idx="2"/>
@@ -1886,7 +1680,7 @@
             <a:spLocks noGrp="1"/>
           </p:cNvSpPr>
           <p:nvPr>
-            <p:ph type="body" idx="3" sz="quarter"/>
+            <p:ph type="body" sz="quarter" idx="3"/>
           </p:nvPr>
         </p:nvSpPr>
         <p:spPr/>
@@ -1927,7 +1721,7 @@
             <a:spLocks noGrp="1"/>
           </p:cNvSpPr>
           <p:nvPr>
-            <p:ph type="sldNum" idx="5" sz="quarter"/>
+            <p:ph type="sldNum" sz="quarter" idx="5"/>
           </p:nvPr>
         </p:nvSpPr>
         <p:spPr/>
@@ -1941,7 +1735,7 @@
 </file>
 
 <file path=ppt/notesSlides/notesSlide8.xml><?xml version="1.0" encoding="utf-8"?>
-<p:notes xmlns:a="http://schemas.openxmlformats.org/drawingml/2006/main" xmlns:p="http://schemas.openxmlformats.org/presentationml/2006/main" xmlns:r="http://schemas.openxmlformats.org/officeDocument/2006/relationships">
+<p:notes xmlns:a="http://schemas.openxmlformats.org/drawingml/2006/main" xmlns:r="http://schemas.openxmlformats.org/officeDocument/2006/relationships" xmlns:p="http://schemas.openxmlformats.org/presentationml/2006/main">
   <p:cSld>
     <p:spTree>
       <p:nvGrpSpPr>
@@ -1961,7 +1755,7 @@
         <p:nvSpPr>
           <p:cNvPr id="2" name="Slide Image Placeholder 1"/>
           <p:cNvSpPr>
-            <a:spLocks noGrp="1"/>
+            <a:spLocks noGrp="1" noRot="1" noChangeAspect="1"/>
           </p:cNvSpPr>
           <p:nvPr>
             <p:ph type="sldImg" idx="2"/>
@@ -1976,7 +1770,7 @@
             <a:spLocks noGrp="1"/>
           </p:cNvSpPr>
           <p:nvPr>
-            <p:ph type="body" idx="3" sz="quarter"/>
+            <p:ph type="body" sz="quarter" idx="3"/>
           </p:nvPr>
         </p:nvSpPr>
         <p:spPr/>
@@ -2017,7 +1811,7 @@
             <a:spLocks noGrp="1"/>
           </p:cNvSpPr>
           <p:nvPr>
-            <p:ph type="sldNum" idx="5" sz="quarter"/>
+            <p:ph type="sldNum" sz="quarter" idx="5"/>
           </p:nvPr>
         </p:nvSpPr>
         <p:spPr/>
@@ -2031,7 +1825,7 @@
 </file>
 
 <file path=ppt/notesSlides/notesSlide9.xml><?xml version="1.0" encoding="utf-8"?>
-<p:notes xmlns:a="http://schemas.openxmlformats.org/drawingml/2006/main" xmlns:p="http://schemas.openxmlformats.org/presentationml/2006/main" xmlns:r="http://schemas.openxmlformats.org/officeDocument/2006/relationships">
+<p:notes xmlns:a="http://schemas.openxmlformats.org/drawingml/2006/main" xmlns:r="http://schemas.openxmlformats.org/officeDocument/2006/relationships" xmlns:p="http://schemas.openxmlformats.org/presentationml/2006/main">
   <p:cSld>
     <p:spTree>
       <p:nvGrpSpPr>
@@ -2051,7 +1845,7 @@
         <p:nvSpPr>
           <p:cNvPr id="2" name="Slide Image Placeholder 1"/>
           <p:cNvSpPr>
-            <a:spLocks noGrp="1"/>
+            <a:spLocks noGrp="1" noRot="1" noChangeAspect="1"/>
           </p:cNvSpPr>
           <p:nvPr>
             <p:ph type="sldImg" idx="2"/>
@@ -2066,7 +1860,7 @@
             <a:spLocks noGrp="1"/>
           </p:cNvSpPr>
           <p:nvPr>
-            <p:ph type="body" idx="3" sz="quarter"/>
+            <p:ph type="body" sz="quarter" idx="3"/>
           </p:nvPr>
         </p:nvSpPr>
         <p:spPr/>
@@ -2107,7 +1901,7 @@
             <a:spLocks noGrp="1"/>
           </p:cNvSpPr>
           <p:nvPr>
-            <p:ph type="sldNum" idx="5" sz="quarter"/>
+            <p:ph type="sldNum" sz="quarter" idx="5"/>
           </p:nvPr>
         </p:nvSpPr>
         <p:spPr/>
@@ -2158,10 +1952,9 @@
           <a:lstStyle/>
           <a:p>
             <a:r>
-              <a:rPr lang="en-US" smtClean="0"/>
+              <a:rPr lang="en-US"/>
               <a:t>Click to edit Master title style</a:t>
             </a:r>
-            <a:endParaRPr lang="en-US"/>
           </a:p>
         </p:txBody>
       </p:sp>
@@ -2277,10 +2070,9 @@
           </a:lstStyle>
           <a:p>
             <a:r>
-              <a:rPr lang="en-US" smtClean="0"/>
+              <a:rPr lang="en-US"/>
               <a:t>Click to edit Master subtitle style</a:t>
             </a:r>
-            <a:endParaRPr lang="en-US"/>
           </a:p>
         </p:txBody>
       </p:sp>
@@ -2301,7 +2093,7 @@
           <a:p>
             <a:fld id="{5BCAD085-E8A6-8845-BD4E-CB4CCA059FC4}" type="datetimeFigureOut">
               <a:rPr lang="en-US" smtClean="0"/>
-              <a:t>1/27/13</a:t>
+              <a:t>8/20/2026</a:t>
             </a:fld>
             <a:endParaRPr lang="en-US"/>
           </a:p>
@@ -2395,10 +2187,9 @@
           <a:lstStyle/>
           <a:p>
             <a:r>
-              <a:rPr lang="en-US" smtClean="0"/>
+              <a:rPr lang="en-US"/>
               <a:t>Click to edit Master title style</a:t>
             </a:r>
-            <a:endParaRPr lang="en-US"/>
           </a:p>
         </p:txBody>
       </p:sp>
@@ -2419,38 +2210,37 @@
           <a:p>
             <a:pPr lvl="0"/>
             <a:r>
-              <a:rPr lang="en-US" smtClean="0"/>
+              <a:rPr lang="en-US"/>
               <a:t>Click to edit Master text styles</a:t>
             </a:r>
           </a:p>
           <a:p>
             <a:pPr lvl="1"/>
             <a:r>
-              <a:rPr lang="en-US" smtClean="0"/>
+              <a:rPr lang="en-US"/>
               <a:t>Second level</a:t>
             </a:r>
           </a:p>
           <a:p>
             <a:pPr lvl="2"/>
             <a:r>
-              <a:rPr lang="en-US" smtClean="0"/>
+              <a:rPr lang="en-US"/>
               <a:t>Third level</a:t>
             </a:r>
           </a:p>
           <a:p>
             <a:pPr lvl="3"/>
             <a:r>
-              <a:rPr lang="en-US" smtClean="0"/>
+              <a:rPr lang="en-US"/>
               <a:t>Fourth level</a:t>
             </a:r>
           </a:p>
           <a:p>
             <a:pPr lvl="4"/>
             <a:r>
-              <a:rPr lang="en-US" smtClean="0"/>
+              <a:rPr lang="en-US"/>
               <a:t>Fifth level</a:t>
             </a:r>
-            <a:endParaRPr lang="en-US"/>
           </a:p>
         </p:txBody>
       </p:sp>
@@ -2471,7 +2261,7 @@
           <a:p>
             <a:fld id="{5BCAD085-E8A6-8845-BD4E-CB4CCA059FC4}" type="datetimeFigureOut">
               <a:rPr lang="en-US" smtClean="0"/>
-              <a:t>1/27/13</a:t>
+              <a:t>8/20/2026</a:t>
             </a:fld>
             <a:endParaRPr lang="en-US"/>
           </a:p>
@@ -2570,10 +2360,9 @@
           <a:lstStyle/>
           <a:p>
             <a:r>
-              <a:rPr lang="en-US" smtClean="0"/>
+              <a:rPr lang="en-US"/>
               <a:t>Click to edit Master title style</a:t>
             </a:r>
-            <a:endParaRPr lang="en-US"/>
           </a:p>
         </p:txBody>
       </p:sp>
@@ -2599,38 +2388,37 @@
           <a:p>
             <a:pPr lvl="0"/>
             <a:r>
-              <a:rPr lang="en-US" smtClean="0"/>
+              <a:rPr lang="en-US"/>
               <a:t>Click to edit Master text styles</a:t>
             </a:r>
           </a:p>
           <a:p>
             <a:pPr lvl="1"/>
             <a:r>
-              <a:rPr lang="en-US" smtClean="0"/>
+              <a:rPr lang="en-US"/>
               <a:t>Second level</a:t>
             </a:r>
           </a:p>
           <a:p>
             <a:pPr lvl="2"/>
             <a:r>
-              <a:rPr lang="en-US" smtClean="0"/>
+              <a:rPr lang="en-US"/>
               <a:t>Third level</a:t>
             </a:r>
           </a:p>
           <a:p>
             <a:pPr lvl="3"/>
             <a:r>
-              <a:rPr lang="en-US" smtClean="0"/>
+              <a:rPr lang="en-US"/>
               <a:t>Fourth level</a:t>
             </a:r>
           </a:p>
           <a:p>
             <a:pPr lvl="4"/>
             <a:r>
-              <a:rPr lang="en-US" smtClean="0"/>
+              <a:rPr lang="en-US"/>
               <a:t>Fifth level</a:t>
             </a:r>
-            <a:endParaRPr lang="en-US"/>
           </a:p>
         </p:txBody>
       </p:sp>
@@ -2651,7 +2439,7 @@
           <a:p>
             <a:fld id="{5BCAD085-E8A6-8845-BD4E-CB4CCA059FC4}" type="datetimeFigureOut">
               <a:rPr lang="en-US" smtClean="0"/>
-              <a:t>1/27/13</a:t>
+              <a:t>8/20/2026</a:t>
             </a:fld>
             <a:endParaRPr lang="en-US"/>
           </a:p>
@@ -2745,10 +2533,9 @@
           <a:lstStyle/>
           <a:p>
             <a:r>
-              <a:rPr lang="en-US" smtClean="0"/>
+              <a:rPr lang="en-US"/>
               <a:t>Click to edit Master title style</a:t>
             </a:r>
-            <a:endParaRPr lang="en-US"/>
           </a:p>
         </p:txBody>
       </p:sp>
@@ -2769,38 +2556,37 @@
           <a:p>
             <a:pPr lvl="0"/>
             <a:r>
-              <a:rPr lang="en-US" smtClean="0"/>
+              <a:rPr lang="en-US"/>
               <a:t>Click to edit Master text styles</a:t>
             </a:r>
           </a:p>
           <a:p>
             <a:pPr lvl="1"/>
             <a:r>
-              <a:rPr lang="en-US" smtClean="0"/>
+              <a:rPr lang="en-US"/>
               <a:t>Second level</a:t>
             </a:r>
           </a:p>
           <a:p>
             <a:pPr lvl="2"/>
             <a:r>
-              <a:rPr lang="en-US" smtClean="0"/>
+              <a:rPr lang="en-US"/>
               <a:t>Third level</a:t>
             </a:r>
           </a:p>
           <a:p>
             <a:pPr lvl="3"/>
             <a:r>
-              <a:rPr lang="en-US" smtClean="0"/>
+              <a:rPr lang="en-US"/>
               <a:t>Fourth level</a:t>
             </a:r>
           </a:p>
           <a:p>
             <a:pPr lvl="4"/>
             <a:r>
-              <a:rPr lang="en-US" smtClean="0"/>
+              <a:rPr lang="en-US"/>
               <a:t>Fifth level</a:t>
             </a:r>
-            <a:endParaRPr lang="en-US"/>
           </a:p>
         </p:txBody>
       </p:sp>
@@ -2821,7 +2607,7 @@
           <a:p>
             <a:fld id="{5BCAD085-E8A6-8845-BD4E-CB4CCA059FC4}" type="datetimeFigureOut">
               <a:rPr lang="en-US" smtClean="0"/>
-              <a:t>1/27/13</a:t>
+              <a:t>8/20/2026</a:t>
             </a:fld>
             <a:endParaRPr lang="en-US"/>
           </a:p>
@@ -2924,10 +2710,9 @@
           </a:lstStyle>
           <a:p>
             <a:r>
-              <a:rPr lang="en-US" smtClean="0"/>
+              <a:rPr lang="en-US"/>
               <a:t>Click to edit Master title style</a:t>
             </a:r>
-            <a:endParaRPr lang="en-US"/>
           </a:p>
         </p:txBody>
       </p:sp>
@@ -3044,7 +2829,7 @@
           <a:p>
             <a:pPr lvl="0"/>
             <a:r>
-              <a:rPr lang="en-US" smtClean="0"/>
+              <a:rPr lang="en-US"/>
               <a:t>Click to edit Master text styles</a:t>
             </a:r>
           </a:p>
@@ -3067,7 +2852,7 @@
           <a:p>
             <a:fld id="{5BCAD085-E8A6-8845-BD4E-CB4CCA059FC4}" type="datetimeFigureOut">
               <a:rPr lang="en-US" smtClean="0"/>
-              <a:t>1/27/13</a:t>
+              <a:t>8/20/2026</a:t>
             </a:fld>
             <a:endParaRPr lang="en-US"/>
           </a:p>
@@ -3161,10 +2946,9 @@
           <a:lstStyle/>
           <a:p>
             <a:r>
-              <a:rPr lang="en-US" smtClean="0"/>
+              <a:rPr lang="en-US"/>
               <a:t>Click to edit Master title style</a:t>
             </a:r>
-            <a:endParaRPr lang="en-US"/>
           </a:p>
         </p:txBody>
       </p:sp>
@@ -3218,38 +3002,37 @@
           <a:p>
             <a:pPr lvl="0"/>
             <a:r>
-              <a:rPr lang="en-US" smtClean="0"/>
+              <a:rPr lang="en-US"/>
               <a:t>Click to edit Master text styles</a:t>
             </a:r>
           </a:p>
           <a:p>
             <a:pPr lvl="1"/>
             <a:r>
-              <a:rPr lang="en-US" smtClean="0"/>
+              <a:rPr lang="en-US"/>
               <a:t>Second level</a:t>
             </a:r>
           </a:p>
           <a:p>
             <a:pPr lvl="2"/>
             <a:r>
-              <a:rPr lang="en-US" smtClean="0"/>
+              <a:rPr lang="en-US"/>
               <a:t>Third level</a:t>
             </a:r>
           </a:p>
           <a:p>
             <a:pPr lvl="3"/>
             <a:r>
-              <a:rPr lang="en-US" smtClean="0"/>
+              <a:rPr lang="en-US"/>
               <a:t>Fourth level</a:t>
             </a:r>
           </a:p>
           <a:p>
             <a:pPr lvl="4"/>
             <a:r>
-              <a:rPr lang="en-US" smtClean="0"/>
+              <a:rPr lang="en-US"/>
               <a:t>Fifth level</a:t>
             </a:r>
-            <a:endParaRPr lang="en-US"/>
           </a:p>
         </p:txBody>
       </p:sp>
@@ -3303,38 +3086,37 @@
           <a:p>
             <a:pPr lvl="0"/>
             <a:r>
-              <a:rPr lang="en-US" smtClean="0"/>
+              <a:rPr lang="en-US"/>
               <a:t>Click to edit Master text styles</a:t>
             </a:r>
           </a:p>
           <a:p>
             <a:pPr lvl="1"/>
             <a:r>
-              <a:rPr lang="en-US" smtClean="0"/>
+              <a:rPr lang="en-US"/>
               <a:t>Second level</a:t>
             </a:r>
           </a:p>
           <a:p>
             <a:pPr lvl="2"/>
             <a:r>
-              <a:rPr lang="en-US" smtClean="0"/>
+              <a:rPr lang="en-US"/>
               <a:t>Third level</a:t>
             </a:r>
           </a:p>
           <a:p>
             <a:pPr lvl="3"/>
             <a:r>
-              <a:rPr lang="en-US" smtClean="0"/>
+              <a:rPr lang="en-US"/>
               <a:t>Fourth level</a:t>
             </a:r>
           </a:p>
           <a:p>
             <a:pPr lvl="4"/>
             <a:r>
-              <a:rPr lang="en-US" smtClean="0"/>
+              <a:rPr lang="en-US"/>
               <a:t>Fifth level</a:t>
             </a:r>
-            <a:endParaRPr lang="en-US"/>
           </a:p>
         </p:txBody>
       </p:sp>
@@ -3355,7 +3137,7 @@
           <a:p>
             <a:fld id="{5BCAD085-E8A6-8845-BD4E-CB4CCA059FC4}" type="datetimeFigureOut">
               <a:rPr lang="en-US" smtClean="0"/>
-              <a:t>1/27/13</a:t>
+              <a:t>8/20/2026</a:t>
             </a:fld>
             <a:endParaRPr lang="en-US"/>
           </a:p>
@@ -3453,10 +3235,9 @@
           </a:lstStyle>
           <a:p>
             <a:r>
-              <a:rPr lang="en-US" smtClean="0"/>
+              <a:rPr lang="en-US"/>
               <a:t>Click to edit Master title style</a:t>
             </a:r>
-            <a:endParaRPr lang="en-US"/>
           </a:p>
         </p:txBody>
       </p:sp>
@@ -3519,7 +3300,7 @@
           <a:p>
             <a:pPr lvl="0"/>
             <a:r>
-              <a:rPr lang="en-US" smtClean="0"/>
+              <a:rPr lang="en-US"/>
               <a:t>Click to edit Master text styles</a:t>
             </a:r>
           </a:p>
@@ -3575,38 +3356,37 @@
           <a:p>
             <a:pPr lvl="0"/>
             <a:r>
-              <a:rPr lang="en-US" smtClean="0"/>
+              <a:rPr lang="en-US"/>
               <a:t>Click to edit Master text styles</a:t>
             </a:r>
           </a:p>
           <a:p>
             <a:pPr lvl="1"/>
             <a:r>
-              <a:rPr lang="en-US" smtClean="0"/>
+              <a:rPr lang="en-US"/>
               <a:t>Second level</a:t>
             </a:r>
           </a:p>
           <a:p>
             <a:pPr lvl="2"/>
             <a:r>
-              <a:rPr lang="en-US" smtClean="0"/>
+              <a:rPr lang="en-US"/>
               <a:t>Third level</a:t>
             </a:r>
           </a:p>
           <a:p>
             <a:pPr lvl="3"/>
             <a:r>
-              <a:rPr lang="en-US" smtClean="0"/>
+              <a:rPr lang="en-US"/>
               <a:t>Fourth level</a:t>
             </a:r>
           </a:p>
           <a:p>
             <a:pPr lvl="4"/>
             <a:r>
-              <a:rPr lang="en-US" smtClean="0"/>
+              <a:rPr lang="en-US"/>
               <a:t>Fifth level</a:t>
             </a:r>
-            <a:endParaRPr lang="en-US"/>
           </a:p>
         </p:txBody>
       </p:sp>
@@ -3669,7 +3449,7 @@
           <a:p>
             <a:pPr lvl="0"/>
             <a:r>
-              <a:rPr lang="en-US" smtClean="0"/>
+              <a:rPr lang="en-US"/>
               <a:t>Click to edit Master text styles</a:t>
             </a:r>
           </a:p>
@@ -3725,38 +3505,37 @@
           <a:p>
             <a:pPr lvl="0"/>
             <a:r>
-              <a:rPr lang="en-US" smtClean="0"/>
+              <a:rPr lang="en-US"/>
               <a:t>Click to edit Master text styles</a:t>
             </a:r>
           </a:p>
           <a:p>
             <a:pPr lvl="1"/>
             <a:r>
-              <a:rPr lang="en-US" smtClean="0"/>
+              <a:rPr lang="en-US"/>
               <a:t>Second level</a:t>
             </a:r>
           </a:p>
           <a:p>
             <a:pPr lvl="2"/>
             <a:r>
-              <a:rPr lang="en-US" smtClean="0"/>
+              <a:rPr lang="en-US"/>
               <a:t>Third level</a:t>
             </a:r>
           </a:p>
           <a:p>
             <a:pPr lvl="3"/>
             <a:r>
-              <a:rPr lang="en-US" smtClean="0"/>
+              <a:rPr lang="en-US"/>
               <a:t>Fourth level</a:t>
             </a:r>
           </a:p>
           <a:p>
             <a:pPr lvl="4"/>
             <a:r>
-              <a:rPr lang="en-US" smtClean="0"/>
+              <a:rPr lang="en-US"/>
               <a:t>Fifth level</a:t>
             </a:r>
-            <a:endParaRPr lang="en-US"/>
           </a:p>
         </p:txBody>
       </p:sp>
@@ -3777,7 +3556,7 @@
           <a:p>
             <a:fld id="{5BCAD085-E8A6-8845-BD4E-CB4CCA059FC4}" type="datetimeFigureOut">
               <a:rPr lang="en-US" smtClean="0"/>
-              <a:t>1/27/13</a:t>
+              <a:t>8/20/2026</a:t>
             </a:fld>
             <a:endParaRPr lang="en-US"/>
           </a:p>
@@ -3871,10 +3650,9 @@
           <a:lstStyle/>
           <a:p>
             <a:r>
-              <a:rPr lang="en-US" smtClean="0"/>
+              <a:rPr lang="en-US"/>
               <a:t>Click to edit Master title style</a:t>
             </a:r>
-            <a:endParaRPr lang="en-US"/>
           </a:p>
         </p:txBody>
       </p:sp>
@@ -3895,7 +3673,7 @@
           <a:p>
             <a:fld id="{5BCAD085-E8A6-8845-BD4E-CB4CCA059FC4}" type="datetimeFigureOut">
               <a:rPr lang="en-US" smtClean="0"/>
-              <a:t>1/27/13</a:t>
+              <a:t>8/20/2026</a:t>
             </a:fld>
             <a:endParaRPr lang="en-US"/>
           </a:p>
@@ -3990,7 +3768,7 @@
           <a:p>
             <a:fld id="{5BCAD085-E8A6-8845-BD4E-CB4CCA059FC4}" type="datetimeFigureOut">
               <a:rPr lang="en-US" smtClean="0"/>
-              <a:t>1/27/13</a:t>
+              <a:t>8/20/2026</a:t>
             </a:fld>
             <a:endParaRPr lang="en-US"/>
           </a:p>
@@ -4093,10 +3871,9 @@
           </a:lstStyle>
           <a:p>
             <a:r>
-              <a:rPr lang="en-US" smtClean="0"/>
+              <a:rPr lang="en-US"/>
               <a:t>Click to edit Master title style</a:t>
             </a:r>
-            <a:endParaRPr lang="en-US"/>
           </a:p>
         </p:txBody>
       </p:sp>
@@ -4150,38 +3927,37 @@
           <a:p>
             <a:pPr lvl="0"/>
             <a:r>
-              <a:rPr lang="en-US" smtClean="0"/>
+              <a:rPr lang="en-US"/>
               <a:t>Click to edit Master text styles</a:t>
             </a:r>
           </a:p>
           <a:p>
             <a:pPr lvl="1"/>
             <a:r>
-              <a:rPr lang="en-US" smtClean="0"/>
+              <a:rPr lang="en-US"/>
               <a:t>Second level</a:t>
             </a:r>
           </a:p>
           <a:p>
             <a:pPr lvl="2"/>
             <a:r>
-              <a:rPr lang="en-US" smtClean="0"/>
+              <a:rPr lang="en-US"/>
               <a:t>Third level</a:t>
             </a:r>
           </a:p>
           <a:p>
             <a:pPr lvl="3"/>
             <a:r>
-              <a:rPr lang="en-US" smtClean="0"/>
+              <a:rPr lang="en-US"/>
               <a:t>Fourth level</a:t>
             </a:r>
           </a:p>
           <a:p>
             <a:pPr lvl="4"/>
             <a:r>
-              <a:rPr lang="en-US" smtClean="0"/>
+              <a:rPr lang="en-US"/>
               <a:t>Fifth level</a:t>
             </a:r>
-            <a:endParaRPr lang="en-US"/>
           </a:p>
         </p:txBody>
       </p:sp>
@@ -4244,7 +4020,7 @@
           <a:p>
             <a:pPr lvl="0"/>
             <a:r>
-              <a:rPr lang="en-US" smtClean="0"/>
+              <a:rPr lang="en-US"/>
               <a:t>Click to edit Master text styles</a:t>
             </a:r>
           </a:p>
@@ -4267,7 +4043,7 @@
           <a:p>
             <a:fld id="{5BCAD085-E8A6-8845-BD4E-CB4CCA059FC4}" type="datetimeFigureOut">
               <a:rPr lang="en-US" smtClean="0"/>
-              <a:t>1/27/13</a:t>
+              <a:t>8/20/2026</a:t>
             </a:fld>
             <a:endParaRPr lang="en-US"/>
           </a:p>
@@ -4370,10 +4146,9 @@
           </a:lstStyle>
           <a:p>
             <a:r>
-              <a:rPr lang="en-US" smtClean="0"/>
+              <a:rPr lang="en-US"/>
               <a:t>Click to edit Master title style</a:t>
             </a:r>
-            <a:endParaRPr lang="en-US"/>
           </a:p>
         </p:txBody>
       </p:sp>
@@ -4497,7 +4272,7 @@
           <a:p>
             <a:pPr lvl="0"/>
             <a:r>
-              <a:rPr lang="en-US" smtClean="0"/>
+              <a:rPr lang="en-US"/>
               <a:t>Click to edit Master text styles</a:t>
             </a:r>
           </a:p>
@@ -4520,7 +4295,7 @@
           <a:p>
             <a:fld id="{5BCAD085-E8A6-8845-BD4E-CB4CCA059FC4}" type="datetimeFigureOut">
               <a:rPr lang="en-US" smtClean="0"/>
-              <a:t>1/27/13</a:t>
+              <a:t>8/20/2026</a:t>
             </a:fld>
             <a:endParaRPr lang="en-US"/>
           </a:p>
@@ -4629,10 +4404,9 @@
           <a:lstStyle/>
           <a:p>
             <a:r>
-              <a:rPr lang="en-US" smtClean="0"/>
+              <a:rPr lang="en-US"/>
               <a:t>Click to edit Master title style</a:t>
             </a:r>
-            <a:endParaRPr lang="en-US"/>
           </a:p>
         </p:txBody>
       </p:sp>
@@ -4663,38 +4437,37 @@
           <a:p>
             <a:pPr lvl="0"/>
             <a:r>
-              <a:rPr lang="en-US" smtClean="0"/>
+              <a:rPr lang="en-US"/>
               <a:t>Click to edit Master text styles</a:t>
             </a:r>
           </a:p>
           <a:p>
             <a:pPr lvl="1"/>
             <a:r>
-              <a:rPr lang="en-US" smtClean="0"/>
+              <a:rPr lang="en-US"/>
               <a:t>Second level</a:t>
             </a:r>
           </a:p>
           <a:p>
             <a:pPr lvl="2"/>
             <a:r>
-              <a:rPr lang="en-US" smtClean="0"/>
+              <a:rPr lang="en-US"/>
               <a:t>Third level</a:t>
             </a:r>
           </a:p>
           <a:p>
             <a:pPr lvl="3"/>
             <a:r>
-              <a:rPr lang="en-US" smtClean="0"/>
+              <a:rPr lang="en-US"/>
               <a:t>Fourth level</a:t>
             </a:r>
           </a:p>
           <a:p>
             <a:pPr lvl="4"/>
             <a:r>
-              <a:rPr lang="en-US" smtClean="0"/>
+              <a:rPr lang="en-US"/>
               <a:t>Fifth level</a:t>
             </a:r>
-            <a:endParaRPr lang="en-US"/>
           </a:p>
         </p:txBody>
       </p:sp>
@@ -4733,7 +4506,7 @@
           <a:p>
             <a:fld id="{5BCAD085-E8A6-8845-BD4E-CB4CCA059FC4}" type="datetimeFigureOut">
               <a:rPr lang="en-US" smtClean="0"/>
-              <a:t>1/27/13</a:t>
+              <a:t>8/20/2026</a:t>
             </a:fld>
             <a:endParaRPr lang="en-US"/>
           </a:p>
@@ -5092,7 +4865,7 @@
 </file>
 
 <file path=ppt/slides/slide1.xml><?xml version="1.0" encoding="utf-8"?>
-<p:sld xmlns:a="http://schemas.openxmlformats.org/drawingml/2006/main" xmlns:p="http://schemas.openxmlformats.org/presentationml/2006/main" xmlns:r="http://schemas.openxmlformats.org/officeDocument/2006/relationships">
+<p:sld xmlns:a="http://schemas.openxmlformats.org/drawingml/2006/main" xmlns:r="http://schemas.openxmlformats.org/officeDocument/2006/relationships" xmlns:p="http://schemas.openxmlformats.org/presentationml/2006/main">
   <p:cSld>
     <p:bg>
       <p:bgPr>
@@ -5108,7 +4881,14 @@
         <p:cNvGrpSpPr/>
         <p:nvPr/>
       </p:nvGrpSpPr>
-      <p:grpSpPr/>
+      <p:grpSpPr>
+        <a:xfrm>
+          <a:off x="0" y="0"/>
+          <a:ext cx="0" cy="0"/>
+          <a:chOff x="0" y="0"/>
+          <a:chExt cx="0" cy="0"/>
+        </a:xfrm>
+      </p:grpSpPr>
       <p:sp>
         <p:nvSpPr>
           <p:cNvPr id="2" name="TextBox 1"/>
@@ -5126,7 +4906,7 @@
           <a:noFill/>
         </p:spPr>
         <p:txBody>
-          <a:bodyPr wrap="square" anchor="t" lIns="0" rIns="0" tIns="0" bIns="0">
+          <a:bodyPr wrap="square" lIns="0" tIns="0" rIns="0" bIns="0" anchor="t">
             <a:spAutoFit/>
           </a:bodyPr>
           <a:lstStyle/>
@@ -5165,7 +4945,7 @@
           <a:noFill/>
         </p:spPr>
         <p:txBody>
-          <a:bodyPr wrap="square" anchor="t" lIns="0" rIns="0" tIns="0" bIns="0">
+          <a:bodyPr wrap="square" lIns="0" tIns="0" rIns="0" bIns="0" anchor="t">
             <a:spAutoFit/>
           </a:bodyPr>
           <a:lstStyle/>
@@ -5236,7 +5016,7 @@
           <a:noFill/>
         </p:spPr>
         <p:txBody>
-          <a:bodyPr wrap="square" anchor="t" lIns="0" rIns="0" tIns="0" bIns="0">
+          <a:bodyPr wrap="square" lIns="0" tIns="0" rIns="0" bIns="0" anchor="t">
             <a:spAutoFit/>
           </a:bodyPr>
           <a:lstStyle/>
@@ -5275,7 +5055,7 @@
           <a:noFill/>
         </p:spPr>
         <p:txBody>
-          <a:bodyPr wrap="square" anchor="t" lIns="0" rIns="0" tIns="0" bIns="0">
+          <a:bodyPr wrap="square" lIns="0" tIns="0" rIns="0" bIns="0" anchor="t">
             <a:spAutoFit/>
           </a:bodyPr>
           <a:lstStyle/>
@@ -5314,7 +5094,7 @@
           <a:noFill/>
         </p:spPr>
         <p:txBody>
-          <a:bodyPr wrap="square" anchor="t" lIns="0" rIns="0" tIns="0" bIns="0">
+          <a:bodyPr wrap="square" lIns="0" tIns="0" rIns="0" bIns="0" anchor="t">
             <a:spAutoFit/>
           </a:bodyPr>
           <a:lstStyle/>
@@ -5377,7 +5157,9 @@
         <p:txBody>
           <a:bodyPr rtlCol="0" anchor="ctr"/>
           <a:lstStyle/>
-          <a:p/>
+          <a:p>
+            <a:endParaRPr/>
+          </a:p>
         </p:txBody>
       </p:sp>
       <p:sp>
@@ -5397,7 +5179,7 @@
           <a:noFill/>
         </p:spPr>
         <p:txBody>
-          <a:bodyPr wrap="square" anchor="ctr" lIns="0" rIns="0" tIns="0" bIns="0">
+          <a:bodyPr wrap="square" lIns="0" tIns="0" rIns="0" bIns="0" anchor="ctr">
             <a:spAutoFit/>
           </a:bodyPr>
           <a:lstStyle/>
@@ -5436,7 +5218,7 @@
           <a:noFill/>
         </p:spPr>
         <p:txBody>
-          <a:bodyPr wrap="square" anchor="t" lIns="0" rIns="0" tIns="0" bIns="0">
+          <a:bodyPr wrap="square" lIns="0" tIns="0" rIns="0" bIns="0" anchor="t">
             <a:spAutoFit/>
           </a:bodyPr>
           <a:lstStyle/>
@@ -5483,7 +5265,7 @@
 </file>
 
 <file path=ppt/slides/slide10.xml><?xml version="1.0" encoding="utf-8"?>
-<p:sld xmlns:a="http://schemas.openxmlformats.org/drawingml/2006/main" xmlns:p="http://schemas.openxmlformats.org/presentationml/2006/main" xmlns:r="http://schemas.openxmlformats.org/officeDocument/2006/relationships">
+<p:sld xmlns:a="http://schemas.openxmlformats.org/drawingml/2006/main" xmlns:r="http://schemas.openxmlformats.org/officeDocument/2006/relationships" xmlns:p="http://schemas.openxmlformats.org/presentationml/2006/main">
   <p:cSld>
     <p:bg>
       <p:bgPr>
@@ -5499,7 +5281,14 @@
         <p:cNvGrpSpPr/>
         <p:nvPr/>
       </p:nvGrpSpPr>
-      <p:grpSpPr/>
+      <p:grpSpPr>
+        <a:xfrm>
+          <a:off x="0" y="0"/>
+          <a:ext cx="0" cy="0"/>
+          <a:chOff x="0" y="0"/>
+          <a:chExt cx="0" cy="0"/>
+        </a:xfrm>
+      </p:grpSpPr>
       <p:sp>
         <p:nvSpPr>
           <p:cNvPr id="2" name="TextBox 1"/>
@@ -5509,15 +5298,15 @@
         <p:spPr>
           <a:xfrm>
             <a:off x="566928" y="365760"/>
-            <a:ext cx="11057839" cy="274320"/>
-          </a:xfrm>
-          <a:prstGeom prst="rect">
-            <a:avLst/>
-          </a:prstGeom>
-          <a:noFill/>
-        </p:spPr>
-        <p:txBody>
-          <a:bodyPr wrap="square" anchor="t" lIns="0" rIns="0" tIns="0" bIns="0">
+            <a:ext cx="11057839" cy="209673"/>
+          </a:xfrm>
+          <a:prstGeom prst="rect">
+            <a:avLst/>
+          </a:prstGeom>
+          <a:noFill/>
+        </p:spPr>
+        <p:txBody>
+          <a:bodyPr wrap="square" lIns="0" tIns="0" rIns="0" bIns="0" anchor="t">
             <a:spAutoFit/>
           </a:bodyPr>
           <a:lstStyle/>
@@ -5528,13 +5317,13 @@
               </a:lnSpc>
             </a:pPr>
             <a:r>
-              <a:rPr sz="1200" b="1" i="0" spc="180">
+              <a:rPr sz="1200" b="1" i="0" spc="180" dirty="0">
                 <a:solidFill>
                   <a:srgbClr val="D9484E"/>
                 </a:solidFill>
                 <a:latin typeface="Calibri"/>
               </a:rPr>
-              <a:t>RESULTS  ·  2 OF 4</a:t>
+              <a:t>RESULTS</a:t>
             </a:r>
           </a:p>
         </p:txBody>
@@ -5556,7 +5345,7 @@
           <a:noFill/>
         </p:spPr>
         <p:txBody>
-          <a:bodyPr wrap="square" anchor="t" lIns="0" rIns="0" tIns="0" bIns="0">
+          <a:bodyPr wrap="square" lIns="0" tIns="0" rIns="0" bIns="0" anchor="t">
             <a:spAutoFit/>
           </a:bodyPr>
           <a:lstStyle/>
@@ -5595,7 +5384,7 @@
           <a:noFill/>
         </p:spPr>
         <p:txBody>
-          <a:bodyPr wrap="square" anchor="t" lIns="0" rIns="0" tIns="0" bIns="0">
+          <a:bodyPr wrap="square" lIns="0" tIns="0" rIns="0" bIns="0" anchor="t">
             <a:spAutoFit/>
           </a:bodyPr>
           <a:lstStyle/>
@@ -5626,7 +5415,7 @@
           <p:nvPr/>
         </p:nvPicPr>
         <p:blipFill>
-          <a:blip r:embed="rId2"/>
+          <a:blip r:embed="rId3"/>
           <a:stretch>
             <a:fillRect/>
           </a:stretch>
@@ -5682,7 +5471,9 @@
         <p:txBody>
           <a:bodyPr rtlCol="0" anchor="ctr"/>
           <a:lstStyle/>
-          <a:p/>
+          <a:p>
+            <a:endParaRPr/>
+          </a:p>
         </p:txBody>
       </p:sp>
       <p:sp>
@@ -5702,7 +5493,7 @@
           <a:noFill/>
         </p:spPr>
         <p:txBody>
-          <a:bodyPr wrap="square" anchor="t" lIns="0" rIns="0" tIns="0" bIns="0">
+          <a:bodyPr wrap="square" lIns="0" tIns="0" rIns="0" bIns="0" anchor="t">
             <a:spAutoFit/>
           </a:bodyPr>
           <a:lstStyle/>
@@ -5733,7 +5524,7 @@
 </file>
 
 <file path=ppt/slides/slide11.xml><?xml version="1.0" encoding="utf-8"?>
-<p:sld xmlns:a="http://schemas.openxmlformats.org/drawingml/2006/main" xmlns:p="http://schemas.openxmlformats.org/presentationml/2006/main" xmlns:r="http://schemas.openxmlformats.org/officeDocument/2006/relationships">
+<p:sld xmlns:a="http://schemas.openxmlformats.org/drawingml/2006/main" xmlns:r="http://schemas.openxmlformats.org/officeDocument/2006/relationships" xmlns:p="http://schemas.openxmlformats.org/presentationml/2006/main">
   <p:cSld>
     <p:bg>
       <p:bgPr>
@@ -5749,7 +5540,14 @@
         <p:cNvGrpSpPr/>
         <p:nvPr/>
       </p:nvGrpSpPr>
-      <p:grpSpPr/>
+      <p:grpSpPr>
+        <a:xfrm>
+          <a:off x="0" y="0"/>
+          <a:ext cx="0" cy="0"/>
+          <a:chOff x="0" y="0"/>
+          <a:chExt cx="0" cy="0"/>
+        </a:xfrm>
+      </p:grpSpPr>
       <p:sp>
         <p:nvSpPr>
           <p:cNvPr id="2" name="TextBox 1"/>
@@ -5759,15 +5557,15 @@
         <p:spPr>
           <a:xfrm>
             <a:off x="566928" y="365760"/>
-            <a:ext cx="11057839" cy="274320"/>
-          </a:xfrm>
-          <a:prstGeom prst="rect">
-            <a:avLst/>
-          </a:prstGeom>
-          <a:noFill/>
-        </p:spPr>
-        <p:txBody>
-          <a:bodyPr wrap="square" anchor="t" lIns="0" rIns="0" tIns="0" bIns="0">
+            <a:ext cx="11057839" cy="209673"/>
+          </a:xfrm>
+          <a:prstGeom prst="rect">
+            <a:avLst/>
+          </a:prstGeom>
+          <a:noFill/>
+        </p:spPr>
+        <p:txBody>
+          <a:bodyPr wrap="square" lIns="0" tIns="0" rIns="0" bIns="0" anchor="t">
             <a:spAutoFit/>
           </a:bodyPr>
           <a:lstStyle/>
@@ -5778,13 +5576,13 @@
               </a:lnSpc>
             </a:pPr>
             <a:r>
-              <a:rPr sz="1200" b="1" i="0" spc="180">
+              <a:rPr sz="1200" b="1" i="0" spc="180" dirty="0">
                 <a:solidFill>
                   <a:srgbClr val="D9484E"/>
                 </a:solidFill>
                 <a:latin typeface="Calibri"/>
               </a:rPr>
-              <a:t>RESULTS  ·  3 OF 4  ·  THE MAIN RESULT</a:t>
+              <a:t>RESULTS  ·  THE MAIN RESULT</a:t>
             </a:r>
           </a:p>
         </p:txBody>
@@ -5806,7 +5604,7 @@
           <a:noFill/>
         </p:spPr>
         <p:txBody>
-          <a:bodyPr wrap="square" anchor="t" lIns="0" rIns="0" tIns="0" bIns="0">
+          <a:bodyPr wrap="square" lIns="0" tIns="0" rIns="0" bIns="0" anchor="t">
             <a:spAutoFit/>
           </a:bodyPr>
           <a:lstStyle/>
@@ -5837,7 +5635,7 @@
           <p:nvPr/>
         </p:nvPicPr>
         <p:blipFill>
-          <a:blip r:embed="rId2"/>
+          <a:blip r:embed="rId3"/>
           <a:stretch>
             <a:fillRect/>
           </a:stretch>
@@ -5893,7 +5691,9 @@
         <p:txBody>
           <a:bodyPr rtlCol="0" anchor="ctr"/>
           <a:lstStyle/>
-          <a:p/>
+          <a:p>
+            <a:endParaRPr/>
+          </a:p>
         </p:txBody>
       </p:sp>
       <p:sp>
@@ -5913,7 +5713,7 @@
           <a:noFill/>
         </p:spPr>
         <p:txBody>
-          <a:bodyPr wrap="square" anchor="ctr" lIns="0" rIns="0" tIns="0" bIns="0">
+          <a:bodyPr wrap="square" lIns="0" tIns="0" rIns="0" bIns="0" anchor="ctr">
             <a:spAutoFit/>
           </a:bodyPr>
           <a:lstStyle/>
@@ -5952,7 +5752,7 @@
           <a:noFill/>
         </p:spPr>
         <p:txBody>
-          <a:bodyPr wrap="square" anchor="t" lIns="0" rIns="0" tIns="0" bIns="0">
+          <a:bodyPr wrap="square" lIns="0" tIns="0" rIns="0" bIns="0" anchor="t">
             <a:spAutoFit/>
           </a:bodyPr>
           <a:lstStyle/>
@@ -6031,7 +5831,9 @@
         <p:txBody>
           <a:bodyPr rtlCol="0" anchor="ctr"/>
           <a:lstStyle/>
-          <a:p/>
+          <a:p>
+            <a:endParaRPr/>
+          </a:p>
         </p:txBody>
       </p:sp>
       <p:sp>
@@ -6051,7 +5853,7 @@
           <a:noFill/>
         </p:spPr>
         <p:txBody>
-          <a:bodyPr wrap="square" anchor="ctr" lIns="0" rIns="0" tIns="0" bIns="0">
+          <a:bodyPr wrap="square" lIns="0" tIns="0" rIns="0" bIns="0" anchor="ctr">
             <a:spAutoFit/>
           </a:bodyPr>
           <a:lstStyle/>
@@ -6090,7 +5892,7 @@
           <a:noFill/>
         </p:spPr>
         <p:txBody>
-          <a:bodyPr wrap="square" anchor="t" lIns="0" rIns="0" tIns="0" bIns="0">
+          <a:bodyPr wrap="square" lIns="0" tIns="0" rIns="0" bIns="0" anchor="t">
             <a:spAutoFit/>
           </a:bodyPr>
           <a:lstStyle/>
@@ -6169,7 +5971,9 @@
         <p:txBody>
           <a:bodyPr rtlCol="0" anchor="ctr"/>
           <a:lstStyle/>
-          <a:p/>
+          <a:p>
+            <a:endParaRPr/>
+          </a:p>
         </p:txBody>
       </p:sp>
       <p:sp>
@@ -6189,7 +5993,7 @@
           <a:noFill/>
         </p:spPr>
         <p:txBody>
-          <a:bodyPr wrap="square" anchor="t" lIns="0" rIns="0" tIns="0" bIns="0">
+          <a:bodyPr wrap="square" lIns="0" tIns="0" rIns="0" bIns="0" anchor="t">
             <a:spAutoFit/>
           </a:bodyPr>
           <a:lstStyle/>
@@ -6228,7 +6032,7 @@
           <a:noFill/>
         </p:spPr>
         <p:txBody>
-          <a:bodyPr wrap="square" anchor="t" lIns="0" rIns="0" tIns="0" bIns="0">
+          <a:bodyPr wrap="square" lIns="0" tIns="0" rIns="0" bIns="0" anchor="t">
             <a:spAutoFit/>
           </a:bodyPr>
           <a:lstStyle/>
@@ -6267,7 +6071,7 @@
           <a:noFill/>
         </p:spPr>
         <p:txBody>
-          <a:bodyPr wrap="square" anchor="t" lIns="0" rIns="0" tIns="0" bIns="0">
+          <a:bodyPr wrap="square" lIns="0" tIns="0" rIns="0" bIns="0" anchor="t">
             <a:spAutoFit/>
           </a:bodyPr>
           <a:lstStyle/>
@@ -6322,7 +6126,7 @@
           <a:noFill/>
         </p:spPr>
         <p:txBody>
-          <a:bodyPr wrap="square" anchor="t" lIns="0" rIns="0" tIns="0" bIns="0">
+          <a:bodyPr wrap="square" lIns="0" tIns="0" rIns="0" bIns="0" anchor="t">
             <a:spAutoFit/>
           </a:bodyPr>
           <a:lstStyle/>
@@ -6353,7 +6157,7 @@
 </file>
 
 <file path=ppt/slides/slide12.xml><?xml version="1.0" encoding="utf-8"?>
-<p:sld xmlns:a="http://schemas.openxmlformats.org/drawingml/2006/main" xmlns:p="http://schemas.openxmlformats.org/presentationml/2006/main" xmlns:r="http://schemas.openxmlformats.org/officeDocument/2006/relationships">
+<p:sld xmlns:a="http://schemas.openxmlformats.org/drawingml/2006/main" xmlns:r="http://schemas.openxmlformats.org/officeDocument/2006/relationships" xmlns:p="http://schemas.openxmlformats.org/presentationml/2006/main">
   <p:cSld>
     <p:bg>
       <p:bgPr>
@@ -6369,7 +6173,14 @@
         <p:cNvGrpSpPr/>
         <p:nvPr/>
       </p:nvGrpSpPr>
-      <p:grpSpPr/>
+      <p:grpSpPr>
+        <a:xfrm>
+          <a:off x="0" y="0"/>
+          <a:ext cx="0" cy="0"/>
+          <a:chOff x="0" y="0"/>
+          <a:chExt cx="0" cy="0"/>
+        </a:xfrm>
+      </p:grpSpPr>
       <p:sp>
         <p:nvSpPr>
           <p:cNvPr id="2" name="TextBox 1"/>
@@ -6379,15 +6190,15 @@
         <p:spPr>
           <a:xfrm>
             <a:off x="566928" y="365760"/>
-            <a:ext cx="11057839" cy="274320"/>
-          </a:xfrm>
-          <a:prstGeom prst="rect">
-            <a:avLst/>
-          </a:prstGeom>
-          <a:noFill/>
-        </p:spPr>
-        <p:txBody>
-          <a:bodyPr wrap="square" anchor="t" lIns="0" rIns="0" tIns="0" bIns="0">
+            <a:ext cx="11057839" cy="209673"/>
+          </a:xfrm>
+          <a:prstGeom prst="rect">
+            <a:avLst/>
+          </a:prstGeom>
+          <a:noFill/>
+        </p:spPr>
+        <p:txBody>
+          <a:bodyPr wrap="square" lIns="0" tIns="0" rIns="0" bIns="0" anchor="t">
             <a:spAutoFit/>
           </a:bodyPr>
           <a:lstStyle/>
@@ -6398,13 +6209,13 @@
               </a:lnSpc>
             </a:pPr>
             <a:r>
-              <a:rPr sz="1200" b="1" i="0" spc="180">
+              <a:rPr sz="1200" b="1" i="0" spc="180" dirty="0">
                 <a:solidFill>
                   <a:srgbClr val="D9484E"/>
                 </a:solidFill>
                 <a:latin typeface="Calibri"/>
               </a:rPr>
-              <a:t>RESULTS  ·  4 OF 4</a:t>
+              <a:t>RESULTS</a:t>
             </a:r>
           </a:p>
         </p:txBody>
@@ -6426,7 +6237,7 @@
           <a:noFill/>
         </p:spPr>
         <p:txBody>
-          <a:bodyPr wrap="square" anchor="t" lIns="0" rIns="0" tIns="0" bIns="0">
+          <a:bodyPr wrap="square" lIns="0" tIns="0" rIns="0" bIns="0" anchor="t">
             <a:spAutoFit/>
           </a:bodyPr>
           <a:lstStyle/>
@@ -6489,7 +6300,9 @@
         <p:txBody>
           <a:bodyPr rtlCol="0" anchor="ctr"/>
           <a:lstStyle/>
-          <a:p/>
+          <a:p>
+            <a:endParaRPr/>
+          </a:p>
         </p:txBody>
       </p:sp>
       <p:sp>
@@ -6509,7 +6322,7 @@
           <a:noFill/>
         </p:spPr>
         <p:txBody>
-          <a:bodyPr wrap="square" anchor="t" lIns="0" rIns="0" tIns="0" bIns="0">
+          <a:bodyPr wrap="square" lIns="0" tIns="0" rIns="0" bIns="0" anchor="t">
             <a:spAutoFit/>
           </a:bodyPr>
           <a:lstStyle/>
@@ -6548,7 +6361,7 @@
           <a:noFill/>
         </p:spPr>
         <p:txBody>
-          <a:bodyPr wrap="square" anchor="t" lIns="0" rIns="0" tIns="0" bIns="0">
+          <a:bodyPr wrap="square" lIns="0" tIns="0" rIns="0" bIns="0" anchor="t">
             <a:spAutoFit/>
           </a:bodyPr>
           <a:lstStyle/>
@@ -6587,7 +6400,7 @@
           <a:noFill/>
         </p:spPr>
         <p:txBody>
-          <a:bodyPr wrap="square" anchor="ctr" lIns="0" rIns="0" tIns="0" bIns="0">
+          <a:bodyPr wrap="square" lIns="0" tIns="0" rIns="0" bIns="0" anchor="ctr">
             <a:spAutoFit/>
           </a:bodyPr>
           <a:lstStyle/>
@@ -6650,7 +6463,9 @@
         <p:txBody>
           <a:bodyPr rtlCol="0" anchor="ctr"/>
           <a:lstStyle/>
-          <a:p/>
+          <a:p>
+            <a:endParaRPr/>
+          </a:p>
         </p:txBody>
       </p:sp>
       <p:sp>
@@ -6670,7 +6485,7 @@
           <a:noFill/>
         </p:spPr>
         <p:txBody>
-          <a:bodyPr wrap="square" anchor="t" lIns="0" rIns="0" tIns="0" bIns="0">
+          <a:bodyPr wrap="square" lIns="0" tIns="0" rIns="0" bIns="0" anchor="t">
             <a:spAutoFit/>
           </a:bodyPr>
           <a:lstStyle/>
@@ -6709,7 +6524,7 @@
           <a:noFill/>
         </p:spPr>
         <p:txBody>
-          <a:bodyPr wrap="square" anchor="t" lIns="0" rIns="0" tIns="0" bIns="0">
+          <a:bodyPr wrap="square" lIns="0" tIns="0" rIns="0" bIns="0" anchor="t">
             <a:spAutoFit/>
           </a:bodyPr>
           <a:lstStyle/>
@@ -6748,7 +6563,7 @@
           <a:noFill/>
         </p:spPr>
         <p:txBody>
-          <a:bodyPr wrap="square" anchor="ctr" lIns="0" rIns="0" tIns="0" bIns="0">
+          <a:bodyPr wrap="square" lIns="0" tIns="0" rIns="0" bIns="0" anchor="ctr">
             <a:spAutoFit/>
           </a:bodyPr>
           <a:lstStyle/>
@@ -6811,7 +6626,9 @@
         <p:txBody>
           <a:bodyPr rtlCol="0" anchor="ctr"/>
           <a:lstStyle/>
-          <a:p/>
+          <a:p>
+            <a:endParaRPr/>
+          </a:p>
         </p:txBody>
       </p:sp>
       <p:sp>
@@ -6831,7 +6648,7 @@
           <a:noFill/>
         </p:spPr>
         <p:txBody>
-          <a:bodyPr wrap="square" anchor="t" lIns="0" rIns="0" tIns="0" bIns="0">
+          <a:bodyPr wrap="square" lIns="0" tIns="0" rIns="0" bIns="0" anchor="t">
             <a:spAutoFit/>
           </a:bodyPr>
           <a:lstStyle/>
@@ -6870,7 +6687,7 @@
           <a:noFill/>
         </p:spPr>
         <p:txBody>
-          <a:bodyPr wrap="square" anchor="t" lIns="0" rIns="0" tIns="0" bIns="0">
+          <a:bodyPr wrap="square" lIns="0" tIns="0" rIns="0" bIns="0" anchor="t">
             <a:spAutoFit/>
           </a:bodyPr>
           <a:lstStyle/>
@@ -6933,7 +6750,9 @@
         <p:txBody>
           <a:bodyPr rtlCol="0" anchor="ctr"/>
           <a:lstStyle/>
-          <a:p/>
+          <a:p>
+            <a:endParaRPr/>
+          </a:p>
         </p:txBody>
       </p:sp>
       <p:sp>
@@ -6953,7 +6772,7 @@
           <a:noFill/>
         </p:spPr>
         <p:txBody>
-          <a:bodyPr wrap="square" anchor="ctr" lIns="0" rIns="0" tIns="0" bIns="0">
+          <a:bodyPr wrap="square" lIns="0" tIns="0" rIns="0" bIns="0" anchor="ctr">
             <a:spAutoFit/>
           </a:bodyPr>
           <a:lstStyle/>
@@ -6992,7 +6811,7 @@
           <a:noFill/>
         </p:spPr>
         <p:txBody>
-          <a:bodyPr wrap="square" anchor="t" lIns="0" rIns="0" tIns="0" bIns="0">
+          <a:bodyPr wrap="square" lIns="0" tIns="0" rIns="0" bIns="0" anchor="t">
             <a:spAutoFit/>
           </a:bodyPr>
           <a:lstStyle/>
@@ -7071,7 +6890,9 @@
         <p:txBody>
           <a:bodyPr rtlCol="0" anchor="ctr"/>
           <a:lstStyle/>
-          <a:p/>
+          <a:p>
+            <a:endParaRPr/>
+          </a:p>
         </p:txBody>
       </p:sp>
       <p:sp>
@@ -7091,7 +6912,7 @@
           <a:noFill/>
         </p:spPr>
         <p:txBody>
-          <a:bodyPr wrap="square" anchor="ctr" lIns="0" rIns="0" tIns="0" bIns="0">
+          <a:bodyPr wrap="square" lIns="0" tIns="0" rIns="0" bIns="0" anchor="ctr">
             <a:spAutoFit/>
           </a:bodyPr>
           <a:lstStyle/>
@@ -7130,7 +6951,7 @@
           <a:noFill/>
         </p:spPr>
         <p:txBody>
-          <a:bodyPr wrap="square" anchor="t" lIns="0" rIns="0" tIns="0" bIns="0">
+          <a:bodyPr wrap="square" lIns="0" tIns="0" rIns="0" bIns="0" anchor="t">
             <a:spAutoFit/>
           </a:bodyPr>
           <a:lstStyle/>
@@ -7193,7 +7014,9 @@
         <p:txBody>
           <a:bodyPr rtlCol="0" anchor="ctr"/>
           <a:lstStyle/>
-          <a:p/>
+          <a:p>
+            <a:endParaRPr/>
+          </a:p>
         </p:txBody>
       </p:sp>
       <p:sp>
@@ -7213,7 +7036,7 @@
           <a:noFill/>
         </p:spPr>
         <p:txBody>
-          <a:bodyPr wrap="square" anchor="t" lIns="0" rIns="0" tIns="0" bIns="0">
+          <a:bodyPr wrap="square" lIns="0" tIns="0" rIns="0" bIns="0" anchor="t">
             <a:spAutoFit/>
           </a:bodyPr>
           <a:lstStyle/>
@@ -7252,7 +7075,7 @@
           <a:noFill/>
         </p:spPr>
         <p:txBody>
-          <a:bodyPr wrap="square" anchor="t" lIns="0" rIns="0" tIns="0" bIns="0">
+          <a:bodyPr wrap="square" lIns="0" tIns="0" rIns="0" bIns="0" anchor="t">
             <a:spAutoFit/>
           </a:bodyPr>
           <a:lstStyle/>
@@ -7323,7 +7146,7 @@
           <a:noFill/>
         </p:spPr>
         <p:txBody>
-          <a:bodyPr wrap="square" anchor="t" lIns="0" rIns="0" tIns="0" bIns="0">
+          <a:bodyPr wrap="square" lIns="0" tIns="0" rIns="0" bIns="0" anchor="t">
             <a:spAutoFit/>
           </a:bodyPr>
           <a:lstStyle/>
@@ -7354,7 +7177,7 @@
 </file>
 
 <file path=ppt/slides/slide13.xml><?xml version="1.0" encoding="utf-8"?>
-<p:sld xmlns:a="http://schemas.openxmlformats.org/drawingml/2006/main" xmlns:p="http://schemas.openxmlformats.org/presentationml/2006/main" xmlns:r="http://schemas.openxmlformats.org/officeDocument/2006/relationships">
+<p:sld xmlns:a="http://schemas.openxmlformats.org/drawingml/2006/main" xmlns:r="http://schemas.openxmlformats.org/officeDocument/2006/relationships" xmlns:p="http://schemas.openxmlformats.org/presentationml/2006/main">
   <p:cSld>
     <p:bg>
       <p:bgPr>
@@ -7370,7 +7193,14 @@
         <p:cNvGrpSpPr/>
         <p:nvPr/>
       </p:nvGrpSpPr>
-      <p:grpSpPr/>
+      <p:grpSpPr>
+        <a:xfrm>
+          <a:off x="0" y="0"/>
+          <a:ext cx="0" cy="0"/>
+          <a:chOff x="0" y="0"/>
+          <a:chExt cx="0" cy="0"/>
+        </a:xfrm>
+      </p:grpSpPr>
       <p:sp>
         <p:nvSpPr>
           <p:cNvPr id="2" name="TextBox 1"/>
@@ -7380,15 +7210,15 @@
         <p:spPr>
           <a:xfrm>
             <a:off x="566928" y="365760"/>
-            <a:ext cx="11057839" cy="274320"/>
-          </a:xfrm>
-          <a:prstGeom prst="rect">
-            <a:avLst/>
-          </a:prstGeom>
-          <a:noFill/>
-        </p:spPr>
-        <p:txBody>
-          <a:bodyPr wrap="square" anchor="t" lIns="0" rIns="0" tIns="0" bIns="0">
+            <a:ext cx="11057839" cy="209673"/>
+          </a:xfrm>
+          <a:prstGeom prst="rect">
+            <a:avLst/>
+          </a:prstGeom>
+          <a:noFill/>
+        </p:spPr>
+        <p:txBody>
+          <a:bodyPr wrap="square" lIns="0" tIns="0" rIns="0" bIns="0" anchor="t">
             <a:spAutoFit/>
           </a:bodyPr>
           <a:lstStyle/>
@@ -7399,13 +7229,13 @@
               </a:lnSpc>
             </a:pPr>
             <a:r>
-              <a:rPr sz="1200" b="1" i="0" spc="180">
+              <a:rPr sz="1200" b="1" i="0" spc="180" dirty="0">
                 <a:solidFill>
                   <a:srgbClr val="D9484E"/>
                 </a:solidFill>
                 <a:latin typeface="Calibri"/>
               </a:rPr>
-              <a:t>ANALYSIS  ·  1 OF 2</a:t>
+              <a:t>ANALYSIS</a:t>
             </a:r>
           </a:p>
         </p:txBody>
@@ -7427,7 +7257,7 @@
           <a:noFill/>
         </p:spPr>
         <p:txBody>
-          <a:bodyPr wrap="square" anchor="t" lIns="0" rIns="0" tIns="0" bIns="0">
+          <a:bodyPr wrap="square" lIns="0" tIns="0" rIns="0" bIns="0" anchor="t">
             <a:spAutoFit/>
           </a:bodyPr>
           <a:lstStyle/>
@@ -7466,7 +7296,7 @@
           <a:noFill/>
         </p:spPr>
         <p:txBody>
-          <a:bodyPr wrap="square" anchor="t" lIns="0" rIns="0" tIns="0" bIns="0">
+          <a:bodyPr wrap="square" lIns="0" tIns="0" rIns="0" bIns="0" anchor="t">
             <a:spAutoFit/>
           </a:bodyPr>
           <a:lstStyle/>
@@ -7497,7 +7327,7 @@
           <p:nvPr/>
         </p:nvPicPr>
         <p:blipFill>
-          <a:blip r:embed="rId2"/>
+          <a:blip r:embed="rId3"/>
           <a:stretch>
             <a:fillRect/>
           </a:stretch>
@@ -7529,7 +7359,7 @@
           <a:noFill/>
         </p:spPr>
         <p:txBody>
-          <a:bodyPr wrap="square" anchor="t" lIns="0" rIns="0" tIns="0" bIns="0">
+          <a:bodyPr wrap="square" lIns="0" tIns="0" rIns="0" bIns="0" anchor="t">
             <a:spAutoFit/>
           </a:bodyPr>
           <a:lstStyle/>
@@ -7568,7 +7398,7 @@
           <a:noFill/>
         </p:spPr>
         <p:txBody>
-          <a:bodyPr wrap="square" anchor="t" lIns="0" rIns="0" tIns="0" bIns="0">
+          <a:bodyPr wrap="square" lIns="0" tIns="0" rIns="0" bIns="0" anchor="t">
             <a:spAutoFit/>
           </a:bodyPr>
           <a:lstStyle/>
@@ -7607,7 +7437,7 @@
           <a:noFill/>
         </p:spPr>
         <p:txBody>
-          <a:bodyPr wrap="square" anchor="t" lIns="0" rIns="0" tIns="0" bIns="0">
+          <a:bodyPr wrap="square" lIns="0" tIns="0" rIns="0" bIns="0" anchor="t">
             <a:spAutoFit/>
           </a:bodyPr>
           <a:lstStyle/>
@@ -7646,7 +7476,7 @@
           <a:noFill/>
         </p:spPr>
         <p:txBody>
-          <a:bodyPr wrap="square" anchor="t" lIns="0" rIns="0" tIns="0" bIns="0">
+          <a:bodyPr wrap="square" lIns="0" tIns="0" rIns="0" bIns="0" anchor="t">
             <a:spAutoFit/>
           </a:bodyPr>
           <a:lstStyle/>
@@ -7709,7 +7539,9 @@
         <p:txBody>
           <a:bodyPr rtlCol="0" anchor="ctr"/>
           <a:lstStyle/>
-          <a:p/>
+          <a:p>
+            <a:endParaRPr/>
+          </a:p>
         </p:txBody>
       </p:sp>
       <p:sp>
@@ -7729,7 +7561,7 @@
           <a:noFill/>
         </p:spPr>
         <p:txBody>
-          <a:bodyPr wrap="square" anchor="ctr" lIns="0" rIns="0" tIns="0" bIns="0">
+          <a:bodyPr wrap="square" lIns="0" tIns="0" rIns="0" bIns="0" anchor="ctr">
             <a:spAutoFit/>
           </a:bodyPr>
           <a:lstStyle/>
@@ -7768,7 +7600,7 @@
           <a:noFill/>
         </p:spPr>
         <p:txBody>
-          <a:bodyPr wrap="square" anchor="ctr" lIns="0" rIns="0" tIns="0" bIns="0">
+          <a:bodyPr wrap="square" lIns="0" tIns="0" rIns="0" bIns="0" anchor="ctr">
             <a:spAutoFit/>
           </a:bodyPr>
           <a:lstStyle/>
@@ -7807,7 +7639,7 @@
           <a:noFill/>
         </p:spPr>
         <p:txBody>
-          <a:bodyPr wrap="square" anchor="ctr" lIns="0" rIns="0" tIns="0" bIns="0">
+          <a:bodyPr wrap="square" lIns="0" tIns="0" rIns="0" bIns="0" anchor="ctr">
             <a:spAutoFit/>
           </a:bodyPr>
           <a:lstStyle/>
@@ -7846,7 +7678,7 @@
           <a:noFill/>
         </p:spPr>
         <p:txBody>
-          <a:bodyPr wrap="square" anchor="ctr" lIns="0" rIns="0" tIns="0" bIns="0">
+          <a:bodyPr wrap="square" lIns="0" tIns="0" rIns="0" bIns="0" anchor="ctr">
             <a:spAutoFit/>
           </a:bodyPr>
           <a:lstStyle/>
@@ -7885,7 +7717,7 @@
           <a:noFill/>
         </p:spPr>
         <p:txBody>
-          <a:bodyPr wrap="square" anchor="ctr" lIns="0" rIns="0" tIns="0" bIns="0">
+          <a:bodyPr wrap="square" lIns="0" tIns="0" rIns="0" bIns="0" anchor="ctr">
             <a:spAutoFit/>
           </a:bodyPr>
           <a:lstStyle/>
@@ -7924,7 +7756,7 @@
           <a:noFill/>
         </p:spPr>
         <p:txBody>
-          <a:bodyPr wrap="square" anchor="ctr" lIns="0" rIns="0" tIns="0" bIns="0">
+          <a:bodyPr wrap="square" lIns="0" tIns="0" rIns="0" bIns="0" anchor="ctr">
             <a:spAutoFit/>
           </a:bodyPr>
           <a:lstStyle/>
@@ -7963,7 +7795,7 @@
           <a:noFill/>
         </p:spPr>
         <p:txBody>
-          <a:bodyPr wrap="square" anchor="ctr" lIns="0" rIns="0" tIns="0" bIns="0">
+          <a:bodyPr wrap="square" lIns="0" tIns="0" rIns="0" bIns="0" anchor="ctr">
             <a:spAutoFit/>
           </a:bodyPr>
           <a:lstStyle/>
@@ -8002,7 +7834,7 @@
           <a:noFill/>
         </p:spPr>
         <p:txBody>
-          <a:bodyPr wrap="square" anchor="ctr" lIns="0" rIns="0" tIns="0" bIns="0">
+          <a:bodyPr wrap="square" lIns="0" tIns="0" rIns="0" bIns="0" anchor="ctr">
             <a:spAutoFit/>
           </a:bodyPr>
           <a:lstStyle/>
@@ -8065,7 +7897,9 @@
         <p:txBody>
           <a:bodyPr rtlCol="0" anchor="ctr"/>
           <a:lstStyle/>
-          <a:p/>
+          <a:p>
+            <a:endParaRPr/>
+          </a:p>
         </p:txBody>
       </p:sp>
       <p:sp>
@@ -8085,7 +7919,7 @@
           <a:noFill/>
         </p:spPr>
         <p:txBody>
-          <a:bodyPr wrap="square" anchor="ctr" lIns="0" rIns="0" tIns="0" bIns="0">
+          <a:bodyPr wrap="square" lIns="0" tIns="0" rIns="0" bIns="0" anchor="ctr">
             <a:spAutoFit/>
           </a:bodyPr>
           <a:lstStyle/>
@@ -8124,7 +7958,7 @@
           <a:noFill/>
         </p:spPr>
         <p:txBody>
-          <a:bodyPr wrap="square" anchor="ctr" lIns="0" rIns="0" tIns="0" bIns="0">
+          <a:bodyPr wrap="square" lIns="0" tIns="0" rIns="0" bIns="0" anchor="ctr">
             <a:spAutoFit/>
           </a:bodyPr>
           <a:lstStyle/>
@@ -8163,7 +7997,7 @@
           <a:noFill/>
         </p:spPr>
         <p:txBody>
-          <a:bodyPr wrap="square" anchor="ctr" lIns="0" rIns="0" tIns="0" bIns="0">
+          <a:bodyPr wrap="square" lIns="0" tIns="0" rIns="0" bIns="0" anchor="ctr">
             <a:spAutoFit/>
           </a:bodyPr>
           <a:lstStyle/>
@@ -8202,7 +8036,7 @@
           <a:noFill/>
         </p:spPr>
         <p:txBody>
-          <a:bodyPr wrap="square" anchor="ctr" lIns="0" rIns="0" tIns="0" bIns="0">
+          <a:bodyPr wrap="square" lIns="0" tIns="0" rIns="0" bIns="0" anchor="ctr">
             <a:spAutoFit/>
           </a:bodyPr>
           <a:lstStyle/>
@@ -8241,7 +8075,7 @@
           <a:noFill/>
         </p:spPr>
         <p:txBody>
-          <a:bodyPr wrap="square" anchor="ctr" lIns="0" rIns="0" tIns="0" bIns="0">
+          <a:bodyPr wrap="square" lIns="0" tIns="0" rIns="0" bIns="0" anchor="ctr">
             <a:spAutoFit/>
           </a:bodyPr>
           <a:lstStyle/>
@@ -8280,7 +8114,7 @@
           <a:noFill/>
         </p:spPr>
         <p:txBody>
-          <a:bodyPr wrap="square" anchor="ctr" lIns="0" rIns="0" tIns="0" bIns="0">
+          <a:bodyPr wrap="square" lIns="0" tIns="0" rIns="0" bIns="0" anchor="ctr">
             <a:spAutoFit/>
           </a:bodyPr>
           <a:lstStyle/>
@@ -8319,7 +8153,7 @@
           <a:noFill/>
         </p:spPr>
         <p:txBody>
-          <a:bodyPr wrap="square" anchor="ctr" lIns="0" rIns="0" tIns="0" bIns="0">
+          <a:bodyPr wrap="square" lIns="0" tIns="0" rIns="0" bIns="0" anchor="ctr">
             <a:spAutoFit/>
           </a:bodyPr>
           <a:lstStyle/>
@@ -8358,7 +8192,7 @@
           <a:noFill/>
         </p:spPr>
         <p:txBody>
-          <a:bodyPr wrap="square" anchor="ctr" lIns="0" rIns="0" tIns="0" bIns="0">
+          <a:bodyPr wrap="square" lIns="0" tIns="0" rIns="0" bIns="0" anchor="ctr">
             <a:spAutoFit/>
           </a:bodyPr>
           <a:lstStyle/>
@@ -8421,7 +8255,9 @@
         <p:txBody>
           <a:bodyPr rtlCol="0" anchor="ctr"/>
           <a:lstStyle/>
-          <a:p/>
+          <a:p>
+            <a:endParaRPr/>
+          </a:p>
         </p:txBody>
       </p:sp>
       <p:sp>
@@ -8441,7 +8277,7 @@
           <a:noFill/>
         </p:spPr>
         <p:txBody>
-          <a:bodyPr wrap="square" anchor="t" lIns="0" rIns="0" tIns="0" bIns="0">
+          <a:bodyPr wrap="square" lIns="0" tIns="0" rIns="0" bIns="0" anchor="t">
             <a:spAutoFit/>
           </a:bodyPr>
           <a:lstStyle/>
@@ -8480,7 +8316,7 @@
           <a:noFill/>
         </p:spPr>
         <p:txBody>
-          <a:bodyPr wrap="square" anchor="t" lIns="0" rIns="0" tIns="0" bIns="0">
+          <a:bodyPr wrap="square" lIns="0" tIns="0" rIns="0" bIns="0" anchor="t">
             <a:spAutoFit/>
           </a:bodyPr>
           <a:lstStyle/>
@@ -8506,15 +8342,12 @@
                 <a:spcPct val="120000"/>
               </a:lnSpc>
             </a:pPr>
-            <a:r>
-              <a:rPr sz="1150" b="0" i="0">
-                <a:solidFill>
-                  <a:srgbClr val="C4CBDC"/>
-                </a:solidFill>
-                <a:latin typeface="Calibri"/>
-              </a:rPr>
-              <a:t/>
-            </a:r>
+            <a:endParaRPr sz="1150" b="0" i="0">
+              <a:solidFill>
+                <a:srgbClr val="C4CBDC"/>
+              </a:solidFill>
+              <a:latin typeface="Calibri"/>
+            </a:endParaRPr>
           </a:p>
           <a:p>
             <a:pPr algn="l">
@@ -8551,7 +8384,7 @@
           <a:noFill/>
         </p:spPr>
         <p:txBody>
-          <a:bodyPr wrap="square" anchor="t" lIns="0" rIns="0" tIns="0" bIns="0">
+          <a:bodyPr wrap="square" lIns="0" tIns="0" rIns="0" bIns="0" anchor="t">
             <a:spAutoFit/>
           </a:bodyPr>
           <a:lstStyle/>
@@ -8590,7 +8423,7 @@
           <a:noFill/>
         </p:spPr>
         <p:txBody>
-          <a:bodyPr wrap="square" anchor="t" lIns="0" rIns="0" tIns="0" bIns="0">
+          <a:bodyPr wrap="square" lIns="0" tIns="0" rIns="0" bIns="0" anchor="t">
             <a:spAutoFit/>
           </a:bodyPr>
           <a:lstStyle/>
@@ -8621,7 +8454,7 @@
 </file>
 
 <file path=ppt/slides/slide14.xml><?xml version="1.0" encoding="utf-8"?>
-<p:sld xmlns:a="http://schemas.openxmlformats.org/drawingml/2006/main" xmlns:p="http://schemas.openxmlformats.org/presentationml/2006/main" xmlns:r="http://schemas.openxmlformats.org/officeDocument/2006/relationships">
+<p:sld xmlns:a="http://schemas.openxmlformats.org/drawingml/2006/main" xmlns:r="http://schemas.openxmlformats.org/officeDocument/2006/relationships" xmlns:p="http://schemas.openxmlformats.org/presentationml/2006/main">
   <p:cSld>
     <p:bg>
       <p:bgPr>
@@ -8637,7 +8470,14 @@
         <p:cNvGrpSpPr/>
         <p:nvPr/>
       </p:nvGrpSpPr>
-      <p:grpSpPr/>
+      <p:grpSpPr>
+        <a:xfrm>
+          <a:off x="0" y="0"/>
+          <a:ext cx="0" cy="0"/>
+          <a:chOff x="0" y="0"/>
+          <a:chExt cx="0" cy="0"/>
+        </a:xfrm>
+      </p:grpSpPr>
       <p:sp>
         <p:nvSpPr>
           <p:cNvPr id="2" name="TextBox 1"/>
@@ -8647,15 +8487,15 @@
         <p:spPr>
           <a:xfrm>
             <a:off x="566928" y="365760"/>
-            <a:ext cx="11057839" cy="274320"/>
-          </a:xfrm>
-          <a:prstGeom prst="rect">
-            <a:avLst/>
-          </a:prstGeom>
-          <a:noFill/>
-        </p:spPr>
-        <p:txBody>
-          <a:bodyPr wrap="square" anchor="t" lIns="0" rIns="0" tIns="0" bIns="0">
+            <a:ext cx="11057839" cy="209673"/>
+          </a:xfrm>
+          <a:prstGeom prst="rect">
+            <a:avLst/>
+          </a:prstGeom>
+          <a:noFill/>
+        </p:spPr>
+        <p:txBody>
+          <a:bodyPr wrap="square" lIns="0" tIns="0" rIns="0" bIns="0" anchor="t">
             <a:spAutoFit/>
           </a:bodyPr>
           <a:lstStyle/>
@@ -8666,13 +8506,13 @@
               </a:lnSpc>
             </a:pPr>
             <a:r>
-              <a:rPr sz="1200" b="1" i="0" spc="180">
+              <a:rPr sz="1200" b="1" i="0" spc="180" dirty="0">
                 <a:solidFill>
                   <a:srgbClr val="D9484E"/>
                 </a:solidFill>
                 <a:latin typeface="Calibri"/>
               </a:rPr>
-              <a:t>ANALYSIS  ·  2 OF 2</a:t>
+              <a:t>ANALYSIS</a:t>
             </a:r>
           </a:p>
         </p:txBody>
@@ -8694,7 +8534,7 @@
           <a:noFill/>
         </p:spPr>
         <p:txBody>
-          <a:bodyPr wrap="square" anchor="t" lIns="0" rIns="0" tIns="0" bIns="0">
+          <a:bodyPr wrap="square" lIns="0" tIns="0" rIns="0" bIns="0" anchor="t">
             <a:spAutoFit/>
           </a:bodyPr>
           <a:lstStyle/>
@@ -8733,7 +8573,7 @@
           <a:noFill/>
         </p:spPr>
         <p:txBody>
-          <a:bodyPr wrap="square" anchor="t" lIns="0" rIns="0" tIns="0" bIns="0">
+          <a:bodyPr wrap="square" lIns="0" tIns="0" rIns="0" bIns="0" anchor="t">
             <a:spAutoFit/>
           </a:bodyPr>
           <a:lstStyle/>
@@ -8772,7 +8612,7 @@
           <a:noFill/>
         </p:spPr>
         <p:txBody>
-          <a:bodyPr wrap="square" anchor="t" lIns="0" rIns="0" tIns="0" bIns="0">
+          <a:bodyPr wrap="square" lIns="0" tIns="0" rIns="0" bIns="0" anchor="t">
             <a:spAutoFit/>
           </a:bodyPr>
           <a:lstStyle/>
@@ -8782,15 +8622,7 @@
                 <a:spcPct val="122000"/>
               </a:lnSpc>
             </a:pPr>
-            <a:r>
-              <a:rPr sz="1250" b="1" i="0" spc="60">
-                <a:solidFill>
-                  <a:srgbClr val="6B7691"/>
-                </a:solidFill>
-                <a:latin typeface="Calibri"/>
-              </a:rPr>
-              <a:t/>
-            </a:r>
+            <a:endParaRPr/>
           </a:p>
         </p:txBody>
       </p:sp>
@@ -8811,7 +8643,7 @@
           <a:noFill/>
         </p:spPr>
         <p:txBody>
-          <a:bodyPr wrap="square" anchor="t" lIns="0" rIns="0" tIns="0" bIns="0">
+          <a:bodyPr wrap="square" lIns="0" tIns="0" rIns="0" bIns="0" anchor="t">
             <a:spAutoFit/>
           </a:bodyPr>
           <a:lstStyle/>
@@ -8850,7 +8682,7 @@
           <a:noFill/>
         </p:spPr>
         <p:txBody>
-          <a:bodyPr wrap="square" anchor="t" lIns="0" rIns="0" tIns="0" bIns="0">
+          <a:bodyPr wrap="square" lIns="0" tIns="0" rIns="0" bIns="0" anchor="t">
             <a:spAutoFit/>
           </a:bodyPr>
           <a:lstStyle/>
@@ -8889,7 +8721,7 @@
           <a:noFill/>
         </p:spPr>
         <p:txBody>
-          <a:bodyPr wrap="square" anchor="t" lIns="0" rIns="0" tIns="0" bIns="0">
+          <a:bodyPr wrap="square" lIns="0" tIns="0" rIns="0" bIns="0" anchor="t">
             <a:spAutoFit/>
           </a:bodyPr>
           <a:lstStyle/>
@@ -8952,7 +8784,9 @@
         <p:txBody>
           <a:bodyPr rtlCol="0" anchor="ctr"/>
           <a:lstStyle/>
-          <a:p/>
+          <a:p>
+            <a:endParaRPr/>
+          </a:p>
         </p:txBody>
       </p:sp>
       <p:sp>
@@ -8972,7 +8806,7 @@
           <a:noFill/>
         </p:spPr>
         <p:txBody>
-          <a:bodyPr wrap="square" anchor="ctr" lIns="0" rIns="0" tIns="0" bIns="0">
+          <a:bodyPr wrap="square" lIns="0" tIns="0" rIns="0" bIns="0" anchor="ctr">
             <a:spAutoFit/>
           </a:bodyPr>
           <a:lstStyle/>
@@ -9011,7 +8845,7 @@
           <a:noFill/>
         </p:spPr>
         <p:txBody>
-          <a:bodyPr wrap="square" anchor="ctr" lIns="0" rIns="0" tIns="0" bIns="0">
+          <a:bodyPr wrap="square" lIns="0" tIns="0" rIns="0" bIns="0" anchor="ctr">
             <a:spAutoFit/>
           </a:bodyPr>
           <a:lstStyle/>
@@ -9050,7 +8884,7 @@
           <a:noFill/>
         </p:spPr>
         <p:txBody>
-          <a:bodyPr wrap="square" anchor="ctr" lIns="0" rIns="0" tIns="0" bIns="0">
+          <a:bodyPr wrap="square" lIns="0" tIns="0" rIns="0" bIns="0" anchor="ctr">
             <a:spAutoFit/>
           </a:bodyPr>
           <a:lstStyle/>
@@ -9089,7 +8923,7 @@
           <a:noFill/>
         </p:spPr>
         <p:txBody>
-          <a:bodyPr wrap="square" anchor="ctr" lIns="0" rIns="0" tIns="0" bIns="0">
+          <a:bodyPr wrap="square" lIns="0" tIns="0" rIns="0" bIns="0" anchor="ctr">
             <a:spAutoFit/>
           </a:bodyPr>
           <a:lstStyle/>
@@ -9128,7 +8962,7 @@
           <a:noFill/>
         </p:spPr>
         <p:txBody>
-          <a:bodyPr wrap="square" anchor="ctr" lIns="0" rIns="0" tIns="0" bIns="0">
+          <a:bodyPr wrap="square" lIns="0" tIns="0" rIns="0" bIns="0" anchor="ctr">
             <a:spAutoFit/>
           </a:bodyPr>
           <a:lstStyle/>
@@ -9167,7 +9001,7 @@
           <a:noFill/>
         </p:spPr>
         <p:txBody>
-          <a:bodyPr wrap="square" anchor="ctr" lIns="0" rIns="0" tIns="0" bIns="0">
+          <a:bodyPr wrap="square" lIns="0" tIns="0" rIns="0" bIns="0" anchor="ctr">
             <a:spAutoFit/>
           </a:bodyPr>
           <a:lstStyle/>
@@ -9206,7 +9040,7 @@
           <a:noFill/>
         </p:spPr>
         <p:txBody>
-          <a:bodyPr wrap="square" anchor="ctr" lIns="0" rIns="0" tIns="0" bIns="0">
+          <a:bodyPr wrap="square" lIns="0" tIns="0" rIns="0" bIns="0" anchor="ctr">
             <a:spAutoFit/>
           </a:bodyPr>
           <a:lstStyle/>
@@ -9245,7 +9079,7 @@
           <a:noFill/>
         </p:spPr>
         <p:txBody>
-          <a:bodyPr wrap="square" anchor="ctr" lIns="0" rIns="0" tIns="0" bIns="0">
+          <a:bodyPr wrap="square" lIns="0" tIns="0" rIns="0" bIns="0" anchor="ctr">
             <a:spAutoFit/>
           </a:bodyPr>
           <a:lstStyle/>
@@ -9284,7 +9118,7 @@
           <a:noFill/>
         </p:spPr>
         <p:txBody>
-          <a:bodyPr wrap="square" anchor="t" lIns="0" rIns="0" tIns="0" bIns="0">
+          <a:bodyPr wrap="square" lIns="0" tIns="0" rIns="0" bIns="0" anchor="t">
             <a:spAutoFit/>
           </a:bodyPr>
           <a:lstStyle/>
@@ -9347,7 +9181,9 @@
         <p:txBody>
           <a:bodyPr rtlCol="0" anchor="ctr"/>
           <a:lstStyle/>
-          <a:p/>
+          <a:p>
+            <a:endParaRPr/>
+          </a:p>
         </p:txBody>
       </p:sp>
       <p:sp>
@@ -9367,7 +9203,7 @@
           <a:noFill/>
         </p:spPr>
         <p:txBody>
-          <a:bodyPr wrap="square" anchor="t" lIns="0" rIns="0" tIns="0" bIns="0">
+          <a:bodyPr wrap="square" lIns="0" tIns="0" rIns="0" bIns="0" anchor="t">
             <a:spAutoFit/>
           </a:bodyPr>
           <a:lstStyle/>
@@ -9406,7 +9242,7 @@
           <a:noFill/>
         </p:spPr>
         <p:txBody>
-          <a:bodyPr wrap="square" anchor="t" lIns="0" rIns="0" tIns="0" bIns="0">
+          <a:bodyPr wrap="square" lIns="0" tIns="0" rIns="0" bIns="0" anchor="t">
             <a:spAutoFit/>
           </a:bodyPr>
           <a:lstStyle/>
@@ -9445,7 +9281,7 @@
           <a:noFill/>
         </p:spPr>
         <p:txBody>
-          <a:bodyPr wrap="square" anchor="t" lIns="0" rIns="0" tIns="0" bIns="0">
+          <a:bodyPr wrap="square" lIns="0" tIns="0" rIns="0" bIns="0" anchor="t">
             <a:spAutoFit/>
           </a:bodyPr>
           <a:lstStyle/>
@@ -9476,7 +9312,7 @@
           <p:nvPr/>
         </p:nvPicPr>
         <p:blipFill>
-          <a:blip r:embed="rId2"/>
+          <a:blip r:embed="rId3"/>
           <a:stretch>
             <a:fillRect/>
           </a:stretch>
@@ -9508,7 +9344,7 @@
           <a:noFill/>
         </p:spPr>
         <p:txBody>
-          <a:bodyPr wrap="square" anchor="t" lIns="0" rIns="0" tIns="0" bIns="0">
+          <a:bodyPr wrap="square" lIns="0" tIns="0" rIns="0" bIns="0" anchor="t">
             <a:spAutoFit/>
           </a:bodyPr>
           <a:lstStyle/>
@@ -9571,7 +9407,9 @@
         <p:txBody>
           <a:bodyPr rtlCol="0" anchor="ctr"/>
           <a:lstStyle/>
-          <a:p/>
+          <a:p>
+            <a:endParaRPr/>
+          </a:p>
         </p:txBody>
       </p:sp>
       <p:sp>
@@ -9591,7 +9429,7 @@
           <a:noFill/>
         </p:spPr>
         <p:txBody>
-          <a:bodyPr wrap="square" anchor="t" lIns="0" rIns="0" tIns="0" bIns="0">
+          <a:bodyPr wrap="square" lIns="0" tIns="0" rIns="0" bIns="0" anchor="t">
             <a:spAutoFit/>
           </a:bodyPr>
           <a:lstStyle/>
@@ -9630,7 +9468,7 @@
           <a:noFill/>
         </p:spPr>
         <p:txBody>
-          <a:bodyPr wrap="square" anchor="t" lIns="0" rIns="0" tIns="0" bIns="0">
+          <a:bodyPr wrap="square" lIns="0" tIns="0" rIns="0" bIns="0" anchor="t">
             <a:spAutoFit/>
           </a:bodyPr>
           <a:lstStyle/>
@@ -9693,7 +9531,9 @@
         <p:txBody>
           <a:bodyPr rtlCol="0" anchor="ctr"/>
           <a:lstStyle/>
-          <a:p/>
+          <a:p>
+            <a:endParaRPr/>
+          </a:p>
         </p:txBody>
       </p:sp>
       <p:sp>
@@ -9713,7 +9553,7 @@
           <a:noFill/>
         </p:spPr>
         <p:txBody>
-          <a:bodyPr wrap="square" anchor="t" lIns="0" rIns="0" tIns="0" bIns="0">
+          <a:bodyPr wrap="square" lIns="0" tIns="0" rIns="0" bIns="0" anchor="t">
             <a:spAutoFit/>
           </a:bodyPr>
           <a:lstStyle/>
@@ -9752,7 +9592,7 @@
           <a:noFill/>
         </p:spPr>
         <p:txBody>
-          <a:bodyPr wrap="square" anchor="t" lIns="0" rIns="0" tIns="0" bIns="0">
+          <a:bodyPr wrap="square" lIns="0" tIns="0" rIns="0" bIns="0" anchor="t">
             <a:spAutoFit/>
           </a:bodyPr>
           <a:lstStyle/>
@@ -9815,7 +9655,9 @@
         <p:txBody>
           <a:bodyPr rtlCol="0" anchor="ctr"/>
           <a:lstStyle/>
-          <a:p/>
+          <a:p>
+            <a:endParaRPr/>
+          </a:p>
         </p:txBody>
       </p:sp>
       <p:sp>
@@ -9835,7 +9677,7 @@
           <a:noFill/>
         </p:spPr>
         <p:txBody>
-          <a:bodyPr wrap="square" anchor="t" lIns="0" rIns="0" tIns="0" bIns="0">
+          <a:bodyPr wrap="square" lIns="0" tIns="0" rIns="0" bIns="0" anchor="t">
             <a:spAutoFit/>
           </a:bodyPr>
           <a:lstStyle/>
@@ -9874,7 +9716,7 @@
           <a:noFill/>
         </p:spPr>
         <p:txBody>
-          <a:bodyPr wrap="square" anchor="t" lIns="0" rIns="0" tIns="0" bIns="0">
+          <a:bodyPr wrap="square" lIns="0" tIns="0" rIns="0" bIns="0" anchor="t">
             <a:spAutoFit/>
           </a:bodyPr>
           <a:lstStyle/>
@@ -9937,7 +9779,9 @@
         <p:txBody>
           <a:bodyPr rtlCol="0" anchor="ctr"/>
           <a:lstStyle/>
-          <a:p/>
+          <a:p>
+            <a:endParaRPr/>
+          </a:p>
         </p:txBody>
       </p:sp>
       <p:sp>
@@ -9957,7 +9801,7 @@
           <a:noFill/>
         </p:spPr>
         <p:txBody>
-          <a:bodyPr wrap="square" anchor="t" lIns="0" rIns="0" tIns="0" bIns="0">
+          <a:bodyPr wrap="square" lIns="0" tIns="0" rIns="0" bIns="0" anchor="t">
             <a:spAutoFit/>
           </a:bodyPr>
           <a:lstStyle/>
@@ -9996,7 +9840,7 @@
           <a:noFill/>
         </p:spPr>
         <p:txBody>
-          <a:bodyPr wrap="square" anchor="t" lIns="0" rIns="0" tIns="0" bIns="0">
+          <a:bodyPr wrap="square" lIns="0" tIns="0" rIns="0" bIns="0" anchor="t">
             <a:spAutoFit/>
           </a:bodyPr>
           <a:lstStyle/>
@@ -10035,7 +9879,7 @@
           <a:noFill/>
         </p:spPr>
         <p:txBody>
-          <a:bodyPr wrap="square" anchor="t" lIns="0" rIns="0" tIns="0" bIns="0">
+          <a:bodyPr wrap="square" lIns="0" tIns="0" rIns="0" bIns="0" anchor="t">
             <a:spAutoFit/>
           </a:bodyPr>
           <a:lstStyle/>
@@ -10066,7 +9910,7 @@
 </file>
 
 <file path=ppt/slides/slide15.xml><?xml version="1.0" encoding="utf-8"?>
-<p:sld xmlns:a="http://schemas.openxmlformats.org/drawingml/2006/main" xmlns:p="http://schemas.openxmlformats.org/presentationml/2006/main" xmlns:r="http://schemas.openxmlformats.org/officeDocument/2006/relationships">
+<p:sld xmlns:a="http://schemas.openxmlformats.org/drawingml/2006/main" xmlns:r="http://schemas.openxmlformats.org/officeDocument/2006/relationships" xmlns:p="http://schemas.openxmlformats.org/presentationml/2006/main">
   <p:cSld>
     <p:bg>
       <p:bgPr>
@@ -10082,7 +9926,14 @@
         <p:cNvGrpSpPr/>
         <p:nvPr/>
       </p:nvGrpSpPr>
-      <p:grpSpPr/>
+      <p:grpSpPr>
+        <a:xfrm>
+          <a:off x="0" y="0"/>
+          <a:ext cx="0" cy="0"/>
+          <a:chOff x="0" y="0"/>
+          <a:chExt cx="0" cy="0"/>
+        </a:xfrm>
+      </p:grpSpPr>
       <p:sp>
         <p:nvSpPr>
           <p:cNvPr id="2" name="TextBox 1"/>
@@ -10100,7 +9951,7 @@
           <a:noFill/>
         </p:spPr>
         <p:txBody>
-          <a:bodyPr wrap="square" anchor="t" lIns="0" rIns="0" tIns="0" bIns="0">
+          <a:bodyPr wrap="square" lIns="0" tIns="0" rIns="0" bIns="0" anchor="t">
             <a:spAutoFit/>
           </a:bodyPr>
           <a:lstStyle/>
@@ -10139,7 +9990,7 @@
           <a:noFill/>
         </p:spPr>
         <p:txBody>
-          <a:bodyPr wrap="square" anchor="t" lIns="0" rIns="0" tIns="0" bIns="0">
+          <a:bodyPr wrap="square" lIns="0" tIns="0" rIns="0" bIns="0" anchor="t">
             <a:spAutoFit/>
           </a:bodyPr>
           <a:lstStyle/>
@@ -10204,6 +10055,7 @@
           <a:lstStyle/>
           <a:p>
             <a:pPr algn="ctr"/>
+            <a:endParaRPr/>
           </a:p>
         </p:txBody>
       </p:sp>
@@ -10224,7 +10076,7 @@
           <a:noFill/>
         </p:spPr>
         <p:txBody>
-          <a:bodyPr wrap="square" anchor="t" lIns="0" rIns="0" tIns="0" bIns="0">
+          <a:bodyPr wrap="square" lIns="0" tIns="0" rIns="0" bIns="0" anchor="t">
             <a:spAutoFit/>
           </a:bodyPr>
           <a:lstStyle/>
@@ -10263,7 +10115,7 @@
           <a:noFill/>
         </p:spPr>
         <p:txBody>
-          <a:bodyPr wrap="square" anchor="t" lIns="0" rIns="0" tIns="0" bIns="0">
+          <a:bodyPr wrap="square" lIns="0" tIns="0" rIns="0" bIns="0" anchor="t">
             <a:spAutoFit/>
           </a:bodyPr>
           <a:lstStyle/>
@@ -10328,6 +10180,7 @@
           <a:lstStyle/>
           <a:p>
             <a:pPr algn="ctr"/>
+            <a:endParaRPr/>
           </a:p>
         </p:txBody>
       </p:sp>
@@ -10348,7 +10201,7 @@
           <a:noFill/>
         </p:spPr>
         <p:txBody>
-          <a:bodyPr wrap="square" anchor="t" lIns="0" rIns="0" tIns="0" bIns="0">
+          <a:bodyPr wrap="square" lIns="0" tIns="0" rIns="0" bIns="0" anchor="t">
             <a:spAutoFit/>
           </a:bodyPr>
           <a:lstStyle/>
@@ -10387,7 +10240,7 @@
           <a:noFill/>
         </p:spPr>
         <p:txBody>
-          <a:bodyPr wrap="square" anchor="t" lIns="0" rIns="0" tIns="0" bIns="0">
+          <a:bodyPr wrap="square" lIns="0" tIns="0" rIns="0" bIns="0" anchor="t">
             <a:spAutoFit/>
           </a:bodyPr>
           <a:lstStyle/>
@@ -10452,6 +10305,7 @@
           <a:lstStyle/>
           <a:p>
             <a:pPr algn="ctr"/>
+            <a:endParaRPr/>
           </a:p>
         </p:txBody>
       </p:sp>
@@ -10472,7 +10326,7 @@
           <a:noFill/>
         </p:spPr>
         <p:txBody>
-          <a:bodyPr wrap="square" anchor="t" lIns="0" rIns="0" tIns="0" bIns="0">
+          <a:bodyPr wrap="square" lIns="0" tIns="0" rIns="0" bIns="0" anchor="t">
             <a:spAutoFit/>
           </a:bodyPr>
           <a:lstStyle/>
@@ -10511,7 +10365,7 @@
           <a:noFill/>
         </p:spPr>
         <p:txBody>
-          <a:bodyPr wrap="square" anchor="t" lIns="0" rIns="0" tIns="0" bIns="0">
+          <a:bodyPr wrap="square" lIns="0" tIns="0" rIns="0" bIns="0" anchor="t">
             <a:spAutoFit/>
           </a:bodyPr>
           <a:lstStyle/>
@@ -10574,7 +10428,9 @@
         <p:txBody>
           <a:bodyPr rtlCol="0" anchor="ctr"/>
           <a:lstStyle/>
-          <a:p/>
+          <a:p>
+            <a:endParaRPr/>
+          </a:p>
         </p:txBody>
       </p:sp>
       <p:sp>
@@ -10594,7 +10450,7 @@
           <a:noFill/>
         </p:spPr>
         <p:txBody>
-          <a:bodyPr wrap="square" anchor="t" lIns="0" rIns="0" tIns="0" bIns="0">
+          <a:bodyPr wrap="square" lIns="0" tIns="0" rIns="0" bIns="0" anchor="t">
             <a:spAutoFit/>
           </a:bodyPr>
           <a:lstStyle/>
@@ -10633,7 +10489,7 @@
           <a:noFill/>
         </p:spPr>
         <p:txBody>
-          <a:bodyPr wrap="square" anchor="t" lIns="0" rIns="0" tIns="0" bIns="0">
+          <a:bodyPr wrap="square" lIns="0" tIns="0" rIns="0" bIns="0" anchor="t">
             <a:spAutoFit/>
           </a:bodyPr>
           <a:lstStyle/>
@@ -10744,7 +10600,9 @@
         <p:txBody>
           <a:bodyPr rtlCol="0" anchor="ctr"/>
           <a:lstStyle/>
-          <a:p/>
+          <a:p>
+            <a:endParaRPr/>
+          </a:p>
         </p:txBody>
       </p:sp>
       <p:sp>
@@ -10764,7 +10622,7 @@
           <a:noFill/>
         </p:spPr>
         <p:txBody>
-          <a:bodyPr wrap="square" anchor="t" lIns="0" rIns="0" tIns="0" bIns="0">
+          <a:bodyPr wrap="square" lIns="0" tIns="0" rIns="0" bIns="0" anchor="t">
             <a:spAutoFit/>
           </a:bodyPr>
           <a:lstStyle/>
@@ -10803,7 +10661,7 @@
           <a:noFill/>
         </p:spPr>
         <p:txBody>
-          <a:bodyPr wrap="square" anchor="t" lIns="0" rIns="0" tIns="0" bIns="0">
+          <a:bodyPr wrap="square" lIns="0" tIns="0" rIns="0" bIns="0" anchor="t">
             <a:spAutoFit/>
           </a:bodyPr>
           <a:lstStyle/>
@@ -10914,7 +10772,9 @@
         <p:txBody>
           <a:bodyPr rtlCol="0" anchor="ctr"/>
           <a:lstStyle/>
-          <a:p/>
+          <a:p>
+            <a:endParaRPr/>
+          </a:p>
         </p:txBody>
       </p:sp>
       <p:sp>
@@ -10934,7 +10794,7 @@
           <a:noFill/>
         </p:spPr>
         <p:txBody>
-          <a:bodyPr wrap="square" anchor="t" lIns="0" rIns="0" tIns="0" bIns="0">
+          <a:bodyPr wrap="square" lIns="0" tIns="0" rIns="0" bIns="0" anchor="t">
             <a:spAutoFit/>
           </a:bodyPr>
           <a:lstStyle/>
@@ -10973,7 +10833,7 @@
           <a:noFill/>
         </p:spPr>
         <p:txBody>
-          <a:bodyPr wrap="square" anchor="t" lIns="0" rIns="0" tIns="0" bIns="0">
+          <a:bodyPr wrap="square" lIns="0" tIns="0" rIns="0" bIns="0" anchor="t">
             <a:spAutoFit/>
           </a:bodyPr>
           <a:lstStyle/>
@@ -11012,7 +10872,7 @@
           <a:noFill/>
         </p:spPr>
         <p:txBody>
-          <a:bodyPr wrap="square" anchor="t" lIns="0" rIns="0" tIns="0" bIns="0">
+          <a:bodyPr wrap="square" lIns="0" tIns="0" rIns="0" bIns="0" anchor="t">
             <a:spAutoFit/>
           </a:bodyPr>
           <a:lstStyle/>
@@ -11043,7 +10903,7 @@
 </file>
 
 <file path=ppt/slides/slide16.xml><?xml version="1.0" encoding="utf-8"?>
-<p:sld xmlns:a="http://schemas.openxmlformats.org/drawingml/2006/main" xmlns:p="http://schemas.openxmlformats.org/presentationml/2006/main" xmlns:r="http://schemas.openxmlformats.org/officeDocument/2006/relationships">
+<p:sld xmlns:a="http://schemas.openxmlformats.org/drawingml/2006/main" xmlns:r="http://schemas.openxmlformats.org/officeDocument/2006/relationships" xmlns:p="http://schemas.openxmlformats.org/presentationml/2006/main" show="0">
   <p:cSld>
     <p:bg>
       <p:bgPr>
@@ -11059,7 +10919,14 @@
         <p:cNvGrpSpPr/>
         <p:nvPr/>
       </p:nvGrpSpPr>
-      <p:grpSpPr/>
+      <p:grpSpPr>
+        <a:xfrm>
+          <a:off x="0" y="0"/>
+          <a:ext cx="0" cy="0"/>
+          <a:chOff x="0" y="0"/>
+          <a:chExt cx="0" cy="0"/>
+        </a:xfrm>
+      </p:grpSpPr>
       <p:sp>
         <p:nvSpPr>
           <p:cNvPr id="2" name="TextBox 1"/>
@@ -11077,7 +10944,7 @@
           <a:noFill/>
         </p:spPr>
         <p:txBody>
-          <a:bodyPr wrap="square" anchor="t" lIns="0" rIns="0" tIns="0" bIns="0">
+          <a:bodyPr wrap="square" lIns="0" tIns="0" rIns="0" bIns="0" anchor="t">
             <a:spAutoFit/>
           </a:bodyPr>
           <a:lstStyle/>
@@ -11088,7 +10955,7 @@
               </a:lnSpc>
             </a:pPr>
             <a:r>
-              <a:rPr sz="1200" b="1" i="0" spc="180">
+              <a:rPr sz="1200" b="1" i="0" spc="180" dirty="0">
                 <a:solidFill>
                   <a:srgbClr val="D9484E"/>
                 </a:solidFill>
@@ -11116,7 +10983,7 @@
           <a:noFill/>
         </p:spPr>
         <p:txBody>
-          <a:bodyPr wrap="square" anchor="t" lIns="0" rIns="0" tIns="0" bIns="0">
+          <a:bodyPr wrap="square" lIns="0" tIns="0" rIns="0" bIns="0" anchor="t">
             <a:spAutoFit/>
           </a:bodyPr>
           <a:lstStyle/>
@@ -11155,7 +11022,7 @@
           <a:noFill/>
         </p:spPr>
         <p:txBody>
-          <a:bodyPr wrap="square" anchor="t" lIns="0" rIns="0" tIns="0" bIns="0">
+          <a:bodyPr wrap="square" lIns="0" tIns="0" rIns="0" bIns="0" anchor="t">
             <a:spAutoFit/>
           </a:bodyPr>
           <a:lstStyle/>
@@ -11194,7 +11061,7 @@
           <a:noFill/>
         </p:spPr>
         <p:txBody>
-          <a:bodyPr wrap="square" anchor="t" lIns="0" rIns="0" tIns="0" bIns="0">
+          <a:bodyPr wrap="square" lIns="0" tIns="0" rIns="0" bIns="0" anchor="t">
             <a:spAutoFit/>
           </a:bodyPr>
           <a:lstStyle/>
@@ -11233,7 +11100,7 @@
           <a:noFill/>
         </p:spPr>
         <p:txBody>
-          <a:bodyPr wrap="square" anchor="t" lIns="0" rIns="0" tIns="0" bIns="0">
+          <a:bodyPr wrap="square" lIns="0" tIns="0" rIns="0" bIns="0" anchor="t">
             <a:spAutoFit/>
           </a:bodyPr>
           <a:lstStyle/>
@@ -11272,7 +11139,7 @@
           <a:noFill/>
         </p:spPr>
         <p:txBody>
-          <a:bodyPr wrap="square" anchor="t" lIns="0" rIns="0" tIns="0" bIns="0">
+          <a:bodyPr wrap="square" lIns="0" tIns="0" rIns="0" bIns="0" anchor="t">
             <a:spAutoFit/>
           </a:bodyPr>
           <a:lstStyle/>
@@ -11335,7 +11202,9 @@
         <p:txBody>
           <a:bodyPr rtlCol="0" anchor="ctr"/>
           <a:lstStyle/>
-          <a:p/>
+          <a:p>
+            <a:endParaRPr/>
+          </a:p>
         </p:txBody>
       </p:sp>
       <p:sp>
@@ -11355,7 +11224,7 @@
           <a:noFill/>
         </p:spPr>
         <p:txBody>
-          <a:bodyPr wrap="square" anchor="ctr" lIns="0" rIns="0" tIns="0" bIns="0">
+          <a:bodyPr wrap="square" lIns="0" tIns="0" rIns="0" bIns="0" anchor="ctr">
             <a:spAutoFit/>
           </a:bodyPr>
           <a:lstStyle/>
@@ -11394,7 +11263,7 @@
           <a:noFill/>
         </p:spPr>
         <p:txBody>
-          <a:bodyPr wrap="square" anchor="ctr" lIns="0" rIns="0" tIns="0" bIns="0">
+          <a:bodyPr wrap="square" lIns="0" tIns="0" rIns="0" bIns="0" anchor="ctr">
             <a:spAutoFit/>
           </a:bodyPr>
           <a:lstStyle/>
@@ -11433,7 +11302,7 @@
           <a:noFill/>
         </p:spPr>
         <p:txBody>
-          <a:bodyPr wrap="square" anchor="ctr" lIns="0" rIns="0" tIns="0" bIns="0">
+          <a:bodyPr wrap="square" lIns="0" tIns="0" rIns="0" bIns="0" anchor="ctr">
             <a:spAutoFit/>
           </a:bodyPr>
           <a:lstStyle/>
@@ -11472,7 +11341,7 @@
           <a:noFill/>
         </p:spPr>
         <p:txBody>
-          <a:bodyPr wrap="square" anchor="ctr" lIns="0" rIns="0" tIns="0" bIns="0">
+          <a:bodyPr wrap="square" lIns="0" tIns="0" rIns="0" bIns="0" anchor="ctr">
             <a:spAutoFit/>
           </a:bodyPr>
           <a:lstStyle/>
@@ -11511,7 +11380,7 @@
           <a:noFill/>
         </p:spPr>
         <p:txBody>
-          <a:bodyPr wrap="square" anchor="ctr" lIns="0" rIns="0" tIns="0" bIns="0">
+          <a:bodyPr wrap="square" lIns="0" tIns="0" rIns="0" bIns="0" anchor="ctr">
             <a:spAutoFit/>
           </a:bodyPr>
           <a:lstStyle/>
@@ -11550,7 +11419,7 @@
           <a:noFill/>
         </p:spPr>
         <p:txBody>
-          <a:bodyPr wrap="square" anchor="ctr" lIns="0" rIns="0" tIns="0" bIns="0">
+          <a:bodyPr wrap="square" lIns="0" tIns="0" rIns="0" bIns="0" anchor="ctr">
             <a:spAutoFit/>
           </a:bodyPr>
           <a:lstStyle/>
@@ -11589,7 +11458,7 @@
           <a:noFill/>
         </p:spPr>
         <p:txBody>
-          <a:bodyPr wrap="square" anchor="ctr" lIns="0" rIns="0" tIns="0" bIns="0">
+          <a:bodyPr wrap="square" lIns="0" tIns="0" rIns="0" bIns="0" anchor="ctr">
             <a:spAutoFit/>
           </a:bodyPr>
           <a:lstStyle/>
@@ -11628,7 +11497,7 @@
           <a:noFill/>
         </p:spPr>
         <p:txBody>
-          <a:bodyPr wrap="square" anchor="ctr" lIns="0" rIns="0" tIns="0" bIns="0">
+          <a:bodyPr wrap="square" lIns="0" tIns="0" rIns="0" bIns="0" anchor="ctr">
             <a:spAutoFit/>
           </a:bodyPr>
           <a:lstStyle/>
@@ -11691,7 +11560,9 @@
         <p:txBody>
           <a:bodyPr rtlCol="0" anchor="ctr"/>
           <a:lstStyle/>
-          <a:p/>
+          <a:p>
+            <a:endParaRPr/>
+          </a:p>
         </p:txBody>
       </p:sp>
       <p:sp>
@@ -11711,7 +11582,7 @@
           <a:noFill/>
         </p:spPr>
         <p:txBody>
-          <a:bodyPr wrap="square" anchor="ctr" lIns="0" rIns="0" tIns="0" bIns="0">
+          <a:bodyPr wrap="square" lIns="0" tIns="0" rIns="0" bIns="0" anchor="ctr">
             <a:spAutoFit/>
           </a:bodyPr>
           <a:lstStyle/>
@@ -11750,7 +11621,7 @@
           <a:noFill/>
         </p:spPr>
         <p:txBody>
-          <a:bodyPr wrap="square" anchor="ctr" lIns="0" rIns="0" tIns="0" bIns="0">
+          <a:bodyPr wrap="square" lIns="0" tIns="0" rIns="0" bIns="0" anchor="ctr">
             <a:spAutoFit/>
           </a:bodyPr>
           <a:lstStyle/>
@@ -11789,7 +11660,7 @@
           <a:noFill/>
         </p:spPr>
         <p:txBody>
-          <a:bodyPr wrap="square" anchor="ctr" lIns="0" rIns="0" tIns="0" bIns="0">
+          <a:bodyPr wrap="square" lIns="0" tIns="0" rIns="0" bIns="0" anchor="ctr">
             <a:spAutoFit/>
           </a:bodyPr>
           <a:lstStyle/>
@@ -11828,7 +11699,7 @@
           <a:noFill/>
         </p:spPr>
         <p:txBody>
-          <a:bodyPr wrap="square" anchor="ctr" lIns="0" rIns="0" tIns="0" bIns="0">
+          <a:bodyPr wrap="square" lIns="0" tIns="0" rIns="0" bIns="0" anchor="ctr">
             <a:spAutoFit/>
           </a:bodyPr>
           <a:lstStyle/>
@@ -11867,7 +11738,7 @@
           <a:noFill/>
         </p:spPr>
         <p:txBody>
-          <a:bodyPr wrap="square" anchor="ctr" lIns="0" rIns="0" tIns="0" bIns="0">
+          <a:bodyPr wrap="square" lIns="0" tIns="0" rIns="0" bIns="0" anchor="ctr">
             <a:spAutoFit/>
           </a:bodyPr>
           <a:lstStyle/>
@@ -11906,7 +11777,7 @@
           <a:noFill/>
         </p:spPr>
         <p:txBody>
-          <a:bodyPr wrap="square" anchor="ctr" lIns="0" rIns="0" tIns="0" bIns="0">
+          <a:bodyPr wrap="square" lIns="0" tIns="0" rIns="0" bIns="0" anchor="ctr">
             <a:spAutoFit/>
           </a:bodyPr>
           <a:lstStyle/>
@@ -11945,7 +11816,7 @@
           <a:noFill/>
         </p:spPr>
         <p:txBody>
-          <a:bodyPr wrap="square" anchor="ctr" lIns="0" rIns="0" tIns="0" bIns="0">
+          <a:bodyPr wrap="square" lIns="0" tIns="0" rIns="0" bIns="0" anchor="ctr">
             <a:spAutoFit/>
           </a:bodyPr>
           <a:lstStyle/>
@@ -11984,7 +11855,7 @@
           <a:noFill/>
         </p:spPr>
         <p:txBody>
-          <a:bodyPr wrap="square" anchor="ctr" lIns="0" rIns="0" tIns="0" bIns="0">
+          <a:bodyPr wrap="square" lIns="0" tIns="0" rIns="0" bIns="0" anchor="ctr">
             <a:spAutoFit/>
           </a:bodyPr>
           <a:lstStyle/>
@@ -12047,7 +11918,9 @@
         <p:txBody>
           <a:bodyPr rtlCol="0" anchor="ctr"/>
           <a:lstStyle/>
-          <a:p/>
+          <a:p>
+            <a:endParaRPr/>
+          </a:p>
         </p:txBody>
       </p:sp>
       <p:sp>
@@ -12067,7 +11940,7 @@
           <a:noFill/>
         </p:spPr>
         <p:txBody>
-          <a:bodyPr wrap="square" anchor="ctr" lIns="0" rIns="0" tIns="0" bIns="0">
+          <a:bodyPr wrap="square" lIns="0" tIns="0" rIns="0" bIns="0" anchor="ctr">
             <a:spAutoFit/>
           </a:bodyPr>
           <a:lstStyle/>
@@ -12106,7 +11979,7 @@
           <a:noFill/>
         </p:spPr>
         <p:txBody>
-          <a:bodyPr wrap="square" anchor="ctr" lIns="0" rIns="0" tIns="0" bIns="0">
+          <a:bodyPr wrap="square" lIns="0" tIns="0" rIns="0" bIns="0" anchor="ctr">
             <a:spAutoFit/>
           </a:bodyPr>
           <a:lstStyle/>
@@ -12145,7 +12018,7 @@
           <a:noFill/>
         </p:spPr>
         <p:txBody>
-          <a:bodyPr wrap="square" anchor="ctr" lIns="0" rIns="0" tIns="0" bIns="0">
+          <a:bodyPr wrap="square" lIns="0" tIns="0" rIns="0" bIns="0" anchor="ctr">
             <a:spAutoFit/>
           </a:bodyPr>
           <a:lstStyle/>
@@ -12184,7 +12057,7 @@
           <a:noFill/>
         </p:spPr>
         <p:txBody>
-          <a:bodyPr wrap="square" anchor="ctr" lIns="0" rIns="0" tIns="0" bIns="0">
+          <a:bodyPr wrap="square" lIns="0" tIns="0" rIns="0" bIns="0" anchor="ctr">
             <a:spAutoFit/>
           </a:bodyPr>
           <a:lstStyle/>
@@ -12223,7 +12096,7 @@
           <a:noFill/>
         </p:spPr>
         <p:txBody>
-          <a:bodyPr wrap="square" anchor="ctr" lIns="0" rIns="0" tIns="0" bIns="0">
+          <a:bodyPr wrap="square" lIns="0" tIns="0" rIns="0" bIns="0" anchor="ctr">
             <a:spAutoFit/>
           </a:bodyPr>
           <a:lstStyle/>
@@ -12262,7 +12135,7 @@
           <a:noFill/>
         </p:spPr>
         <p:txBody>
-          <a:bodyPr wrap="square" anchor="ctr" lIns="0" rIns="0" tIns="0" bIns="0">
+          <a:bodyPr wrap="square" lIns="0" tIns="0" rIns="0" bIns="0" anchor="ctr">
             <a:spAutoFit/>
           </a:bodyPr>
           <a:lstStyle/>
@@ -12301,7 +12174,7 @@
           <a:noFill/>
         </p:spPr>
         <p:txBody>
-          <a:bodyPr wrap="square" anchor="ctr" lIns="0" rIns="0" tIns="0" bIns="0">
+          <a:bodyPr wrap="square" lIns="0" tIns="0" rIns="0" bIns="0" anchor="ctr">
             <a:spAutoFit/>
           </a:bodyPr>
           <a:lstStyle/>
@@ -12340,7 +12213,7 @@
           <a:noFill/>
         </p:spPr>
         <p:txBody>
-          <a:bodyPr wrap="square" anchor="ctr" lIns="0" rIns="0" tIns="0" bIns="0">
+          <a:bodyPr wrap="square" lIns="0" tIns="0" rIns="0" bIns="0" anchor="ctr">
             <a:spAutoFit/>
           </a:bodyPr>
           <a:lstStyle/>
@@ -12405,6 +12278,7 @@
           <a:lstStyle/>
           <a:p>
             <a:pPr algn="ctr"/>
+            <a:endParaRPr/>
           </a:p>
         </p:txBody>
       </p:sp>
@@ -12425,7 +12299,7 @@
           <a:noFill/>
         </p:spPr>
         <p:txBody>
-          <a:bodyPr wrap="square" anchor="t" lIns="0" rIns="0" tIns="0" bIns="0">
+          <a:bodyPr wrap="square" lIns="0" tIns="0" rIns="0" bIns="0" anchor="t">
             <a:spAutoFit/>
           </a:bodyPr>
           <a:lstStyle/>
@@ -12464,7 +12338,7 @@
           <a:noFill/>
         </p:spPr>
         <p:txBody>
-          <a:bodyPr wrap="square" anchor="t" lIns="0" rIns="0" tIns="0" bIns="0">
+          <a:bodyPr wrap="square" lIns="0" tIns="0" rIns="0" bIns="0" anchor="t">
             <a:spAutoFit/>
           </a:bodyPr>
           <a:lstStyle/>
@@ -12529,6 +12403,7 @@
           <a:lstStyle/>
           <a:p>
             <a:pPr algn="ctr"/>
+            <a:endParaRPr/>
           </a:p>
         </p:txBody>
       </p:sp>
@@ -12549,7 +12424,7 @@
           <a:noFill/>
         </p:spPr>
         <p:txBody>
-          <a:bodyPr wrap="square" anchor="t" lIns="0" rIns="0" tIns="0" bIns="0">
+          <a:bodyPr wrap="square" lIns="0" tIns="0" rIns="0" bIns="0" anchor="t">
             <a:spAutoFit/>
           </a:bodyPr>
           <a:lstStyle/>
@@ -12588,7 +12463,7 @@
           <a:noFill/>
         </p:spPr>
         <p:txBody>
-          <a:bodyPr wrap="square" anchor="t" lIns="0" rIns="0" tIns="0" bIns="0">
+          <a:bodyPr wrap="square" lIns="0" tIns="0" rIns="0" bIns="0" anchor="t">
             <a:spAutoFit/>
           </a:bodyPr>
           <a:lstStyle/>
@@ -12619,7 +12494,7 @@
 </file>
 
 <file path=ppt/slides/slide17.xml><?xml version="1.0" encoding="utf-8"?>
-<p:sld xmlns:a="http://schemas.openxmlformats.org/drawingml/2006/main" xmlns:p="http://schemas.openxmlformats.org/presentationml/2006/main" xmlns:r="http://schemas.openxmlformats.org/officeDocument/2006/relationships">
+<p:sld xmlns:a="http://schemas.openxmlformats.org/drawingml/2006/main" xmlns:r="http://schemas.openxmlformats.org/officeDocument/2006/relationships" xmlns:p="http://schemas.openxmlformats.org/presentationml/2006/main" show="0">
   <p:cSld>
     <p:bg>
       <p:bgPr>
@@ -12635,7 +12510,14 @@
         <p:cNvGrpSpPr/>
         <p:nvPr/>
       </p:nvGrpSpPr>
-      <p:grpSpPr/>
+      <p:grpSpPr>
+        <a:xfrm>
+          <a:off x="0" y="0"/>
+          <a:ext cx="0" cy="0"/>
+          <a:chOff x="0" y="0"/>
+          <a:chExt cx="0" cy="0"/>
+        </a:xfrm>
+      </p:grpSpPr>
       <p:sp>
         <p:nvSpPr>
           <p:cNvPr id="2" name="TextBox 1"/>
@@ -12653,7 +12535,7 @@
           <a:noFill/>
         </p:spPr>
         <p:txBody>
-          <a:bodyPr wrap="square" anchor="t" lIns="0" rIns="0" tIns="0" bIns="0">
+          <a:bodyPr wrap="square" lIns="0" tIns="0" rIns="0" bIns="0" anchor="t">
             <a:spAutoFit/>
           </a:bodyPr>
           <a:lstStyle/>
@@ -12692,7 +12574,7 @@
           <a:noFill/>
         </p:spPr>
         <p:txBody>
-          <a:bodyPr wrap="square" anchor="t" lIns="0" rIns="0" tIns="0" bIns="0">
+          <a:bodyPr wrap="square" lIns="0" tIns="0" rIns="0" bIns="0" anchor="t">
             <a:spAutoFit/>
           </a:bodyPr>
           <a:lstStyle/>
@@ -12755,7 +12637,9 @@
         <p:txBody>
           <a:bodyPr rtlCol="0" anchor="ctr"/>
           <a:lstStyle/>
-          <a:p/>
+          <a:p>
+            <a:endParaRPr/>
+          </a:p>
         </p:txBody>
       </p:sp>
       <p:sp>
@@ -12775,7 +12659,7 @@
           <a:noFill/>
         </p:spPr>
         <p:txBody>
-          <a:bodyPr wrap="square" anchor="ctr" lIns="0" rIns="0" tIns="0" bIns="0">
+          <a:bodyPr wrap="square" lIns="0" tIns="0" rIns="0" bIns="0" anchor="ctr">
             <a:spAutoFit/>
           </a:bodyPr>
           <a:lstStyle/>
@@ -12814,7 +12698,7 @@
           <a:noFill/>
         </p:spPr>
         <p:txBody>
-          <a:bodyPr wrap="square" anchor="t" lIns="0" rIns="0" tIns="0" bIns="0">
+          <a:bodyPr wrap="square" lIns="0" tIns="0" rIns="0" bIns="0" anchor="t">
             <a:spAutoFit/>
           </a:bodyPr>
           <a:lstStyle/>
@@ -12893,7 +12777,9 @@
         <p:txBody>
           <a:bodyPr rtlCol="0" anchor="ctr"/>
           <a:lstStyle/>
-          <a:p/>
+          <a:p>
+            <a:endParaRPr/>
+          </a:p>
         </p:txBody>
       </p:sp>
       <p:sp>
@@ -12913,7 +12799,7 @@
           <a:noFill/>
         </p:spPr>
         <p:txBody>
-          <a:bodyPr wrap="square" anchor="ctr" lIns="0" rIns="0" tIns="0" bIns="0">
+          <a:bodyPr wrap="square" lIns="0" tIns="0" rIns="0" bIns="0" anchor="ctr">
             <a:spAutoFit/>
           </a:bodyPr>
           <a:lstStyle/>
@@ -12952,7 +12838,7 @@
           <a:noFill/>
         </p:spPr>
         <p:txBody>
-          <a:bodyPr wrap="square" anchor="t" lIns="0" rIns="0" tIns="0" bIns="0">
+          <a:bodyPr wrap="square" lIns="0" tIns="0" rIns="0" bIns="0" anchor="t">
             <a:spAutoFit/>
           </a:bodyPr>
           <a:lstStyle/>
@@ -13031,7 +12917,9 @@
         <p:txBody>
           <a:bodyPr rtlCol="0" anchor="ctr"/>
           <a:lstStyle/>
-          <a:p/>
+          <a:p>
+            <a:endParaRPr/>
+          </a:p>
         </p:txBody>
       </p:sp>
       <p:sp>
@@ -13051,7 +12939,7 @@
           <a:noFill/>
         </p:spPr>
         <p:txBody>
-          <a:bodyPr wrap="square" anchor="ctr" lIns="0" rIns="0" tIns="0" bIns="0">
+          <a:bodyPr wrap="square" lIns="0" tIns="0" rIns="0" bIns="0" anchor="ctr">
             <a:spAutoFit/>
           </a:bodyPr>
           <a:lstStyle/>
@@ -13090,7 +12978,7 @@
           <a:noFill/>
         </p:spPr>
         <p:txBody>
-          <a:bodyPr wrap="square" anchor="t" lIns="0" rIns="0" tIns="0" bIns="0">
+          <a:bodyPr wrap="square" lIns="0" tIns="0" rIns="0" bIns="0" anchor="t">
             <a:spAutoFit/>
           </a:bodyPr>
           <a:lstStyle/>
@@ -13171,6 +13059,7 @@
           <a:lstStyle/>
           <a:p>
             <a:pPr algn="ctr"/>
+            <a:endParaRPr/>
           </a:p>
         </p:txBody>
       </p:sp>
@@ -13191,7 +13080,7 @@
           <a:noFill/>
         </p:spPr>
         <p:txBody>
-          <a:bodyPr wrap="square" anchor="t" lIns="0" rIns="0" tIns="0" bIns="0">
+          <a:bodyPr wrap="square" lIns="0" tIns="0" rIns="0" bIns="0" anchor="t">
             <a:spAutoFit/>
           </a:bodyPr>
           <a:lstStyle/>
@@ -13230,7 +13119,7 @@
           <a:noFill/>
         </p:spPr>
         <p:txBody>
-          <a:bodyPr wrap="square" anchor="t" lIns="0" rIns="0" tIns="0" bIns="0">
+          <a:bodyPr wrap="square" lIns="0" tIns="0" rIns="0" bIns="0" anchor="t">
             <a:spAutoFit/>
           </a:bodyPr>
           <a:lstStyle/>
@@ -13295,6 +13184,7 @@
           <a:lstStyle/>
           <a:p>
             <a:pPr algn="ctr"/>
+            <a:endParaRPr/>
           </a:p>
         </p:txBody>
       </p:sp>
@@ -13315,7 +13205,7 @@
           <a:noFill/>
         </p:spPr>
         <p:txBody>
-          <a:bodyPr wrap="square" anchor="t" lIns="0" rIns="0" tIns="0" bIns="0">
+          <a:bodyPr wrap="square" lIns="0" tIns="0" rIns="0" bIns="0" anchor="t">
             <a:spAutoFit/>
           </a:bodyPr>
           <a:lstStyle/>
@@ -13354,7 +13244,7 @@
           <a:noFill/>
         </p:spPr>
         <p:txBody>
-          <a:bodyPr wrap="square" anchor="t" lIns="0" rIns="0" tIns="0" bIns="0">
+          <a:bodyPr wrap="square" lIns="0" tIns="0" rIns="0" bIns="0" anchor="t">
             <a:spAutoFit/>
           </a:bodyPr>
           <a:lstStyle/>
@@ -13419,6 +13309,7 @@
           <a:lstStyle/>
           <a:p>
             <a:pPr algn="ctr"/>
+            <a:endParaRPr/>
           </a:p>
         </p:txBody>
       </p:sp>
@@ -13439,7 +13330,7 @@
           <a:noFill/>
         </p:spPr>
         <p:txBody>
-          <a:bodyPr wrap="square" anchor="t" lIns="0" rIns="0" tIns="0" bIns="0">
+          <a:bodyPr wrap="square" lIns="0" tIns="0" rIns="0" bIns="0" anchor="t">
             <a:spAutoFit/>
           </a:bodyPr>
           <a:lstStyle/>
@@ -13478,7 +13369,7 @@
           <a:noFill/>
         </p:spPr>
         <p:txBody>
-          <a:bodyPr wrap="square" anchor="t" lIns="0" rIns="0" tIns="0" bIns="0">
+          <a:bodyPr wrap="square" lIns="0" tIns="0" rIns="0" bIns="0" anchor="t">
             <a:spAutoFit/>
           </a:bodyPr>
           <a:lstStyle/>
@@ -13509,7 +13400,7 @@
 </file>
 
 <file path=ppt/slides/slide18.xml><?xml version="1.0" encoding="utf-8"?>
-<p:sld xmlns:a="http://schemas.openxmlformats.org/drawingml/2006/main" xmlns:p="http://schemas.openxmlformats.org/presentationml/2006/main" xmlns:r="http://schemas.openxmlformats.org/officeDocument/2006/relationships">
+<p:sld xmlns:a="http://schemas.openxmlformats.org/drawingml/2006/main" xmlns:r="http://schemas.openxmlformats.org/officeDocument/2006/relationships" xmlns:p="http://schemas.openxmlformats.org/presentationml/2006/main" show="0">
   <p:cSld>
     <p:bg>
       <p:bgPr>
@@ -13525,7 +13416,14 @@
         <p:cNvGrpSpPr/>
         <p:nvPr/>
       </p:nvGrpSpPr>
-      <p:grpSpPr/>
+      <p:grpSpPr>
+        <a:xfrm>
+          <a:off x="0" y="0"/>
+          <a:ext cx="0" cy="0"/>
+          <a:chOff x="0" y="0"/>
+          <a:chExt cx="0" cy="0"/>
+        </a:xfrm>
+      </p:grpSpPr>
       <p:sp>
         <p:nvSpPr>
           <p:cNvPr id="2" name="TextBox 1"/>
@@ -13543,7 +13441,7 @@
           <a:noFill/>
         </p:spPr>
         <p:txBody>
-          <a:bodyPr wrap="square" anchor="t" lIns="0" rIns="0" tIns="0" bIns="0">
+          <a:bodyPr wrap="square" lIns="0" tIns="0" rIns="0" bIns="0" anchor="t">
             <a:spAutoFit/>
           </a:bodyPr>
           <a:lstStyle/>
@@ -13582,7 +13480,7 @@
           <a:noFill/>
         </p:spPr>
         <p:txBody>
-          <a:bodyPr wrap="square" anchor="t" lIns="0" rIns="0" tIns="0" bIns="0">
+          <a:bodyPr wrap="square" lIns="0" tIns="0" rIns="0" bIns="0" anchor="t">
             <a:spAutoFit/>
           </a:bodyPr>
           <a:lstStyle/>
@@ -13613,7 +13511,7 @@
           <p:nvPr/>
         </p:nvPicPr>
         <p:blipFill>
-          <a:blip r:embed="rId2"/>
+          <a:blip r:embed="rId3"/>
           <a:stretch>
             <a:fillRect/>
           </a:stretch>
@@ -13637,7 +13535,7 @@
 </file>
 
 <file path=ppt/slides/slide19.xml><?xml version="1.0" encoding="utf-8"?>
-<p:sld xmlns:a="http://schemas.openxmlformats.org/drawingml/2006/main" xmlns:p="http://schemas.openxmlformats.org/presentationml/2006/main" xmlns:r="http://schemas.openxmlformats.org/officeDocument/2006/relationships">
+<p:sld xmlns:a="http://schemas.openxmlformats.org/drawingml/2006/main" xmlns:r="http://schemas.openxmlformats.org/officeDocument/2006/relationships" xmlns:p="http://schemas.openxmlformats.org/presentationml/2006/main" show="0">
   <p:cSld>
     <p:bg>
       <p:bgPr>
@@ -13653,7 +13551,14 @@
         <p:cNvGrpSpPr/>
         <p:nvPr/>
       </p:nvGrpSpPr>
-      <p:grpSpPr/>
+      <p:grpSpPr>
+        <a:xfrm>
+          <a:off x="0" y="0"/>
+          <a:ext cx="0" cy="0"/>
+          <a:chOff x="0" y="0"/>
+          <a:chExt cx="0" cy="0"/>
+        </a:xfrm>
+      </p:grpSpPr>
       <p:sp>
         <p:nvSpPr>
           <p:cNvPr id="2" name="TextBox 1"/>
@@ -13671,7 +13576,7 @@
           <a:noFill/>
         </p:spPr>
         <p:txBody>
-          <a:bodyPr wrap="square" anchor="t" lIns="0" rIns="0" tIns="0" bIns="0">
+          <a:bodyPr wrap="square" lIns="0" tIns="0" rIns="0" bIns="0" anchor="t">
             <a:spAutoFit/>
           </a:bodyPr>
           <a:lstStyle/>
@@ -13710,7 +13615,7 @@
           <a:noFill/>
         </p:spPr>
         <p:txBody>
-          <a:bodyPr wrap="square" anchor="t" lIns="0" rIns="0" tIns="0" bIns="0">
+          <a:bodyPr wrap="square" lIns="0" tIns="0" rIns="0" bIns="0" anchor="t">
             <a:spAutoFit/>
           </a:bodyPr>
           <a:lstStyle/>
@@ -13741,7 +13646,7 @@
           <p:nvPr/>
         </p:nvPicPr>
         <p:blipFill>
-          <a:blip r:embed="rId2"/>
+          <a:blip r:embed="rId3"/>
           <a:stretch>
             <a:fillRect/>
           </a:stretch>
@@ -13799,6 +13704,7 @@
           <a:lstStyle/>
           <a:p>
             <a:pPr algn="ctr"/>
+            <a:endParaRPr/>
           </a:p>
         </p:txBody>
       </p:sp>
@@ -13819,7 +13725,7 @@
           <a:noFill/>
         </p:spPr>
         <p:txBody>
-          <a:bodyPr wrap="square" anchor="t" lIns="0" rIns="0" tIns="0" bIns="0">
+          <a:bodyPr wrap="square" lIns="0" tIns="0" rIns="0" bIns="0" anchor="t">
             <a:spAutoFit/>
           </a:bodyPr>
           <a:lstStyle/>
@@ -13858,7 +13764,7 @@
           <a:noFill/>
         </p:spPr>
         <p:txBody>
-          <a:bodyPr wrap="square" anchor="t" lIns="0" rIns="0" tIns="0" bIns="0">
+          <a:bodyPr wrap="square" lIns="0" tIns="0" rIns="0" bIns="0" anchor="t">
             <a:spAutoFit/>
           </a:bodyPr>
           <a:lstStyle/>
@@ -13923,6 +13829,7 @@
           <a:lstStyle/>
           <a:p>
             <a:pPr algn="ctr"/>
+            <a:endParaRPr/>
           </a:p>
         </p:txBody>
       </p:sp>
@@ -13943,7 +13850,7 @@
           <a:noFill/>
         </p:spPr>
         <p:txBody>
-          <a:bodyPr wrap="square" anchor="t" lIns="0" rIns="0" tIns="0" bIns="0">
+          <a:bodyPr wrap="square" lIns="0" tIns="0" rIns="0" bIns="0" anchor="t">
             <a:spAutoFit/>
           </a:bodyPr>
           <a:lstStyle/>
@@ -13982,7 +13889,7 @@
           <a:noFill/>
         </p:spPr>
         <p:txBody>
-          <a:bodyPr wrap="square" anchor="t" lIns="0" rIns="0" tIns="0" bIns="0">
+          <a:bodyPr wrap="square" lIns="0" tIns="0" rIns="0" bIns="0" anchor="t">
             <a:spAutoFit/>
           </a:bodyPr>
           <a:lstStyle/>
@@ -14013,7 +13920,7 @@
 </file>
 
 <file path=ppt/slides/slide2.xml><?xml version="1.0" encoding="utf-8"?>
-<p:sld xmlns:a="http://schemas.openxmlformats.org/drawingml/2006/main" xmlns:p="http://schemas.openxmlformats.org/presentationml/2006/main" xmlns:r="http://schemas.openxmlformats.org/officeDocument/2006/relationships">
+<p:sld xmlns:a="http://schemas.openxmlformats.org/drawingml/2006/main" xmlns:r="http://schemas.openxmlformats.org/officeDocument/2006/relationships" xmlns:p="http://schemas.openxmlformats.org/presentationml/2006/main">
   <p:cSld>
     <p:bg>
       <p:bgPr>
@@ -14029,7 +13936,14 @@
         <p:cNvGrpSpPr/>
         <p:nvPr/>
       </p:nvGrpSpPr>
-      <p:grpSpPr/>
+      <p:grpSpPr>
+        <a:xfrm>
+          <a:off x="0" y="0"/>
+          <a:ext cx="0" cy="0"/>
+          <a:chOff x="0" y="0"/>
+          <a:chExt cx="0" cy="0"/>
+        </a:xfrm>
+      </p:grpSpPr>
       <p:sp>
         <p:nvSpPr>
           <p:cNvPr id="2" name="TextBox 1"/>
@@ -14039,15 +13953,15 @@
         <p:spPr>
           <a:xfrm>
             <a:off x="566928" y="365760"/>
-            <a:ext cx="11057839" cy="274320"/>
-          </a:xfrm>
-          <a:prstGeom prst="rect">
-            <a:avLst/>
-          </a:prstGeom>
-          <a:noFill/>
-        </p:spPr>
-        <p:txBody>
-          <a:bodyPr wrap="square" anchor="t" lIns="0" rIns="0" tIns="0" bIns="0">
+            <a:ext cx="11057839" cy="209673"/>
+          </a:xfrm>
+          <a:prstGeom prst="rect">
+            <a:avLst/>
+          </a:prstGeom>
+          <a:noFill/>
+        </p:spPr>
+        <p:txBody>
+          <a:bodyPr wrap="square" lIns="0" tIns="0" rIns="0" bIns="0" anchor="t">
             <a:spAutoFit/>
           </a:bodyPr>
           <a:lstStyle/>
@@ -14058,13 +13972,13 @@
               </a:lnSpc>
             </a:pPr>
             <a:r>
-              <a:rPr sz="1200" b="1" i="0" spc="180">
+              <a:rPr sz="1200" b="1" i="0" spc="180" dirty="0">
                 <a:solidFill>
                   <a:srgbClr val="D9484E"/>
                 </a:solidFill>
                 <a:latin typeface="Calibri"/>
               </a:rPr>
-              <a:t>MOTIVATION  ·  1 OF 3</a:t>
+              <a:t>MOTIVATION</a:t>
             </a:r>
           </a:p>
         </p:txBody>
@@ -14086,7 +14000,7 @@
           <a:noFill/>
         </p:spPr>
         <p:txBody>
-          <a:bodyPr wrap="square" anchor="t" lIns="0" rIns="0" tIns="0" bIns="0">
+          <a:bodyPr wrap="square" lIns="0" tIns="0" rIns="0" bIns="0" anchor="t">
             <a:spAutoFit/>
           </a:bodyPr>
           <a:lstStyle/>
@@ -14125,7 +14039,7 @@
           <a:noFill/>
         </p:spPr>
         <p:txBody>
-          <a:bodyPr wrap="square" anchor="t" lIns="0" rIns="0" tIns="0" bIns="0">
+          <a:bodyPr wrap="square" lIns="0" tIns="0" rIns="0" bIns="0" anchor="t">
             <a:spAutoFit/>
           </a:bodyPr>
           <a:lstStyle/>
@@ -14190,6 +14104,7 @@
           <a:lstStyle/>
           <a:p>
             <a:pPr algn="ctr"/>
+            <a:endParaRPr/>
           </a:p>
         </p:txBody>
       </p:sp>
@@ -14210,7 +14125,7 @@
           <a:noFill/>
         </p:spPr>
         <p:txBody>
-          <a:bodyPr wrap="square" anchor="t" lIns="0" rIns="0" tIns="0" bIns="0">
+          <a:bodyPr wrap="square" lIns="0" tIns="0" rIns="0" bIns="0" anchor="t">
             <a:spAutoFit/>
           </a:bodyPr>
           <a:lstStyle/>
@@ -14249,7 +14164,7 @@
           <a:noFill/>
         </p:spPr>
         <p:txBody>
-          <a:bodyPr wrap="square" anchor="t" lIns="0" rIns="0" tIns="0" bIns="0">
+          <a:bodyPr wrap="square" lIns="0" tIns="0" rIns="0" bIns="0" anchor="t">
             <a:spAutoFit/>
           </a:bodyPr>
           <a:lstStyle/>
@@ -14330,6 +14245,7 @@
           <a:lstStyle/>
           <a:p>
             <a:pPr algn="ctr"/>
+            <a:endParaRPr/>
           </a:p>
         </p:txBody>
       </p:sp>
@@ -14350,7 +14266,7 @@
           <a:noFill/>
         </p:spPr>
         <p:txBody>
-          <a:bodyPr wrap="square" anchor="t" lIns="0" rIns="0" tIns="0" bIns="0">
+          <a:bodyPr wrap="square" lIns="0" tIns="0" rIns="0" bIns="0" anchor="t">
             <a:spAutoFit/>
           </a:bodyPr>
           <a:lstStyle/>
@@ -14389,7 +14305,7 @@
           <a:noFill/>
         </p:spPr>
         <p:txBody>
-          <a:bodyPr wrap="square" anchor="t" lIns="0" rIns="0" tIns="0" bIns="0">
+          <a:bodyPr wrap="square" lIns="0" tIns="0" rIns="0" bIns="0" anchor="t">
             <a:spAutoFit/>
           </a:bodyPr>
           <a:lstStyle/>
@@ -14452,7 +14368,9 @@
         <p:txBody>
           <a:bodyPr rtlCol="0" anchor="ctr"/>
           <a:lstStyle/>
-          <a:p/>
+          <a:p>
+            <a:endParaRPr/>
+          </a:p>
         </p:txBody>
       </p:sp>
       <p:sp>
@@ -14472,7 +14390,7 @@
           <a:noFill/>
         </p:spPr>
         <p:txBody>
-          <a:bodyPr wrap="square" anchor="ctr" lIns="0" rIns="0" tIns="0" bIns="0">
+          <a:bodyPr wrap="square" lIns="0" tIns="0" rIns="0" bIns="0" anchor="ctr">
             <a:spAutoFit/>
           </a:bodyPr>
           <a:lstStyle/>
@@ -14511,7 +14429,7 @@
           <a:noFill/>
         </p:spPr>
         <p:txBody>
-          <a:bodyPr wrap="square" anchor="t" lIns="0" rIns="0" tIns="0" bIns="0">
+          <a:bodyPr wrap="square" lIns="0" tIns="0" rIns="0" bIns="0" anchor="t">
             <a:spAutoFit/>
           </a:bodyPr>
           <a:lstStyle/>
@@ -14590,7 +14508,9 @@
         <p:txBody>
           <a:bodyPr rtlCol="0" anchor="ctr"/>
           <a:lstStyle/>
-          <a:p/>
+          <a:p>
+            <a:endParaRPr/>
+          </a:p>
         </p:txBody>
       </p:sp>
       <p:sp>
@@ -14610,7 +14530,7 @@
           <a:noFill/>
         </p:spPr>
         <p:txBody>
-          <a:bodyPr wrap="square" anchor="ctr" lIns="0" rIns="0" tIns="0" bIns="0">
+          <a:bodyPr wrap="square" lIns="0" tIns="0" rIns="0" bIns="0" anchor="ctr">
             <a:spAutoFit/>
           </a:bodyPr>
           <a:lstStyle/>
@@ -14649,7 +14569,7 @@
           <a:noFill/>
         </p:spPr>
         <p:txBody>
-          <a:bodyPr wrap="square" anchor="t" lIns="0" rIns="0" tIns="0" bIns="0">
+          <a:bodyPr wrap="square" lIns="0" tIns="0" rIns="0" bIns="0" anchor="t">
             <a:spAutoFit/>
           </a:bodyPr>
           <a:lstStyle/>
@@ -14704,7 +14624,7 @@
           <a:noFill/>
         </p:spPr>
         <p:txBody>
-          <a:bodyPr wrap="square" anchor="ctr" lIns="0" rIns="0" tIns="0" bIns="0">
+          <a:bodyPr wrap="square" lIns="0" tIns="0" rIns="0" bIns="0" anchor="ctr">
             <a:spAutoFit/>
           </a:bodyPr>
           <a:lstStyle/>
@@ -14767,7 +14687,9 @@
         <p:txBody>
           <a:bodyPr rtlCol="0" anchor="ctr"/>
           <a:lstStyle/>
-          <a:p/>
+          <a:p>
+            <a:endParaRPr/>
+          </a:p>
         </p:txBody>
       </p:sp>
       <p:sp>
@@ -14787,7 +14709,7 @@
           <a:noFill/>
         </p:spPr>
         <p:txBody>
-          <a:bodyPr wrap="square" anchor="t" lIns="0" rIns="0" tIns="0" bIns="0">
+          <a:bodyPr wrap="square" lIns="0" tIns="0" rIns="0" bIns="0" anchor="t">
             <a:spAutoFit/>
           </a:bodyPr>
           <a:lstStyle/>
@@ -14842,7 +14764,7 @@
           <a:noFill/>
         </p:spPr>
         <p:txBody>
-          <a:bodyPr wrap="square" anchor="t" lIns="0" rIns="0" tIns="0" bIns="0">
+          <a:bodyPr wrap="square" lIns="0" tIns="0" rIns="0" bIns="0" anchor="t">
             <a:spAutoFit/>
           </a:bodyPr>
           <a:lstStyle/>
@@ -14873,7 +14795,7 @@
 </file>
 
 <file path=ppt/slides/slide3.xml><?xml version="1.0" encoding="utf-8"?>
-<p:sld xmlns:a="http://schemas.openxmlformats.org/drawingml/2006/main" xmlns:p="http://schemas.openxmlformats.org/presentationml/2006/main" xmlns:r="http://schemas.openxmlformats.org/officeDocument/2006/relationships">
+<p:sld xmlns:a="http://schemas.openxmlformats.org/drawingml/2006/main" xmlns:r="http://schemas.openxmlformats.org/officeDocument/2006/relationships" xmlns:p="http://schemas.openxmlformats.org/presentationml/2006/main">
   <p:cSld>
     <p:bg>
       <p:bgPr>
@@ -14889,7 +14811,14 @@
         <p:cNvGrpSpPr/>
         <p:nvPr/>
       </p:nvGrpSpPr>
-      <p:grpSpPr/>
+      <p:grpSpPr>
+        <a:xfrm>
+          <a:off x="0" y="0"/>
+          <a:ext cx="0" cy="0"/>
+          <a:chOff x="0" y="0"/>
+          <a:chExt cx="0" cy="0"/>
+        </a:xfrm>
+      </p:grpSpPr>
       <p:sp>
         <p:nvSpPr>
           <p:cNvPr id="2" name="TextBox 1"/>
@@ -14899,15 +14828,15 @@
         <p:spPr>
           <a:xfrm>
             <a:off x="566928" y="365760"/>
-            <a:ext cx="11057839" cy="274320"/>
-          </a:xfrm>
-          <a:prstGeom prst="rect">
-            <a:avLst/>
-          </a:prstGeom>
-          <a:noFill/>
-        </p:spPr>
-        <p:txBody>
-          <a:bodyPr wrap="square" anchor="t" lIns="0" rIns="0" tIns="0" bIns="0">
+            <a:ext cx="11057839" cy="209673"/>
+          </a:xfrm>
+          <a:prstGeom prst="rect">
+            <a:avLst/>
+          </a:prstGeom>
+          <a:noFill/>
+        </p:spPr>
+        <p:txBody>
+          <a:bodyPr wrap="square" lIns="0" tIns="0" rIns="0" bIns="0" anchor="t">
             <a:spAutoFit/>
           </a:bodyPr>
           <a:lstStyle/>
@@ -14918,14 +14847,29 @@
               </a:lnSpc>
             </a:pPr>
             <a:r>
-              <a:rPr sz="1200" b="1" i="0" spc="180">
+              <a:rPr sz="1200" b="1" i="0" spc="180" dirty="0">
                 <a:solidFill>
                   <a:srgbClr val="D9484E"/>
                 </a:solidFill>
                 <a:latin typeface="Calibri"/>
               </a:rPr>
-              <a:t>MOTIVATION  ·  2 OF 3</a:t>
-            </a:r>
+              <a:t>MOTIVATIO</a:t>
+            </a:r>
+            <a:r>
+              <a:rPr lang="en-US" sz="1200" b="1" i="0" spc="180" dirty="0">
+                <a:solidFill>
+                  <a:srgbClr val="D9484E"/>
+                </a:solidFill>
+                <a:latin typeface="Calibri"/>
+              </a:rPr>
+              <a:t>N</a:t>
+            </a:r>
+            <a:endParaRPr sz="1200" b="1" i="0" spc="180" dirty="0">
+              <a:solidFill>
+                <a:srgbClr val="D9484E"/>
+              </a:solidFill>
+              <a:latin typeface="Calibri"/>
+            </a:endParaRPr>
           </a:p>
         </p:txBody>
       </p:sp>
@@ -14946,7 +14890,7 @@
           <a:noFill/>
         </p:spPr>
         <p:txBody>
-          <a:bodyPr wrap="square" anchor="t" lIns="0" rIns="0" tIns="0" bIns="0">
+          <a:bodyPr wrap="square" lIns="0" tIns="0" rIns="0" bIns="0" anchor="t">
             <a:spAutoFit/>
           </a:bodyPr>
           <a:lstStyle/>
@@ -14985,7 +14929,7 @@
           <a:noFill/>
         </p:spPr>
         <p:txBody>
-          <a:bodyPr wrap="square" anchor="t" lIns="0" rIns="0" tIns="0" bIns="0">
+          <a:bodyPr wrap="square" lIns="0" tIns="0" rIns="0" bIns="0" anchor="t">
             <a:spAutoFit/>
           </a:bodyPr>
           <a:lstStyle/>
@@ -14995,15 +14939,7 @@
                 <a:spcPct val="122000"/>
               </a:lnSpc>
             </a:pPr>
-            <a:r>
-              <a:rPr sz="1250" b="1" i="0" spc="60">
-                <a:solidFill>
-                  <a:srgbClr val="6B7691"/>
-                </a:solidFill>
-                <a:latin typeface="Calibri"/>
-              </a:rPr>
-              <a:t/>
-            </a:r>
+            <a:endParaRPr/>
           </a:p>
         </p:txBody>
       </p:sp>
@@ -15024,7 +14960,7 @@
           <a:noFill/>
         </p:spPr>
         <p:txBody>
-          <a:bodyPr wrap="square" anchor="t" lIns="0" rIns="0" tIns="0" bIns="0">
+          <a:bodyPr wrap="square" lIns="0" tIns="0" rIns="0" bIns="0" anchor="t">
             <a:spAutoFit/>
           </a:bodyPr>
           <a:lstStyle/>
@@ -15063,7 +14999,7 @@
           <a:noFill/>
         </p:spPr>
         <p:txBody>
-          <a:bodyPr wrap="square" anchor="t" lIns="0" rIns="0" tIns="0" bIns="0">
+          <a:bodyPr wrap="square" lIns="0" tIns="0" rIns="0" bIns="0" anchor="t">
             <a:spAutoFit/>
           </a:bodyPr>
           <a:lstStyle/>
@@ -15102,7 +15038,7 @@
           <a:noFill/>
         </p:spPr>
         <p:txBody>
-          <a:bodyPr wrap="square" anchor="t" lIns="0" rIns="0" tIns="0" bIns="0">
+          <a:bodyPr wrap="square" lIns="0" tIns="0" rIns="0" bIns="0" anchor="t">
             <a:spAutoFit/>
           </a:bodyPr>
           <a:lstStyle/>
@@ -15141,7 +15077,7 @@
           <a:noFill/>
         </p:spPr>
         <p:txBody>
-          <a:bodyPr wrap="square" anchor="t" lIns="0" rIns="0" tIns="0" bIns="0">
+          <a:bodyPr wrap="square" lIns="0" tIns="0" rIns="0" bIns="0" anchor="t">
             <a:spAutoFit/>
           </a:bodyPr>
           <a:lstStyle/>
@@ -15180,7 +15116,7 @@
           <a:noFill/>
         </p:spPr>
         <p:txBody>
-          <a:bodyPr wrap="square" anchor="t" lIns="0" rIns="0" tIns="0" bIns="0">
+          <a:bodyPr wrap="square" lIns="0" tIns="0" rIns="0" bIns="0" anchor="t">
             <a:spAutoFit/>
           </a:bodyPr>
           <a:lstStyle/>
@@ -15243,7 +15179,9 @@
         <p:txBody>
           <a:bodyPr rtlCol="0" anchor="ctr"/>
           <a:lstStyle/>
-          <a:p/>
+          <a:p>
+            <a:endParaRPr/>
+          </a:p>
         </p:txBody>
       </p:sp>
       <p:sp>
@@ -15263,7 +15201,7 @@
           <a:noFill/>
         </p:spPr>
         <p:txBody>
-          <a:bodyPr wrap="square" anchor="ctr" lIns="0" rIns="0" tIns="0" bIns="0">
+          <a:bodyPr wrap="square" lIns="0" tIns="0" rIns="0" bIns="0" anchor="ctr">
             <a:spAutoFit/>
           </a:bodyPr>
           <a:lstStyle/>
@@ -15302,7 +15240,7 @@
           <a:noFill/>
         </p:spPr>
         <p:txBody>
-          <a:bodyPr wrap="square" anchor="ctr" lIns="0" rIns="0" tIns="0" bIns="0">
+          <a:bodyPr wrap="square" lIns="0" tIns="0" rIns="0" bIns="0" anchor="ctr">
             <a:spAutoFit/>
           </a:bodyPr>
           <a:lstStyle/>
@@ -15341,7 +15279,7 @@
           <a:noFill/>
         </p:spPr>
         <p:txBody>
-          <a:bodyPr wrap="square" anchor="ctr" lIns="0" rIns="0" tIns="0" bIns="0">
+          <a:bodyPr wrap="square" lIns="0" tIns="0" rIns="0" bIns="0" anchor="ctr">
             <a:spAutoFit/>
           </a:bodyPr>
           <a:lstStyle/>
@@ -15380,7 +15318,7 @@
           <a:noFill/>
         </p:spPr>
         <p:txBody>
-          <a:bodyPr wrap="square" anchor="ctr" lIns="0" rIns="0" tIns="0" bIns="0">
+          <a:bodyPr wrap="square" lIns="0" tIns="0" rIns="0" bIns="0" anchor="ctr">
             <a:spAutoFit/>
           </a:bodyPr>
           <a:lstStyle/>
@@ -15419,7 +15357,7 @@
           <a:noFill/>
         </p:spPr>
         <p:txBody>
-          <a:bodyPr wrap="square" anchor="ctr" lIns="0" rIns="0" tIns="0" bIns="0">
+          <a:bodyPr wrap="square" lIns="0" tIns="0" rIns="0" bIns="0" anchor="ctr">
             <a:spAutoFit/>
           </a:bodyPr>
           <a:lstStyle/>
@@ -15458,7 +15396,7 @@
           <a:noFill/>
         </p:spPr>
         <p:txBody>
-          <a:bodyPr wrap="square" anchor="ctr" lIns="0" rIns="0" tIns="0" bIns="0">
+          <a:bodyPr wrap="square" lIns="0" tIns="0" rIns="0" bIns="0" anchor="ctr">
             <a:spAutoFit/>
           </a:bodyPr>
           <a:lstStyle/>
@@ -15497,7 +15435,7 @@
           <a:noFill/>
         </p:spPr>
         <p:txBody>
-          <a:bodyPr wrap="square" anchor="t" lIns="0" rIns="0" tIns="0" bIns="0">
+          <a:bodyPr wrap="square" lIns="0" tIns="0" rIns="0" bIns="0" anchor="t">
             <a:spAutoFit/>
           </a:bodyPr>
           <a:lstStyle/>
@@ -15508,7 +15446,7 @@
               </a:lnSpc>
             </a:pPr>
             <a:r>
-              <a:rPr sz="1550" b="0" i="0">
+              <a:rPr sz="1550" b="0" i="0" dirty="0">
                 <a:solidFill>
                   <a:srgbClr val="2E3A59"/>
                 </a:solidFill>
@@ -15560,7 +15498,9 @@
         <p:txBody>
           <a:bodyPr rtlCol="0" anchor="ctr"/>
           <a:lstStyle/>
-          <a:p/>
+          <a:p>
+            <a:endParaRPr/>
+          </a:p>
         </p:txBody>
       </p:sp>
       <p:sp>
@@ -15580,7 +15520,7 @@
           <a:noFill/>
         </p:spPr>
         <p:txBody>
-          <a:bodyPr wrap="square" anchor="t" lIns="0" rIns="0" tIns="0" bIns="0">
+          <a:bodyPr wrap="square" lIns="0" tIns="0" rIns="0" bIns="0" anchor="t">
             <a:spAutoFit/>
           </a:bodyPr>
           <a:lstStyle/>
@@ -15619,7 +15559,7 @@
           <a:noFill/>
         </p:spPr>
         <p:txBody>
-          <a:bodyPr wrap="square" anchor="t" lIns="0" rIns="0" tIns="0" bIns="0">
+          <a:bodyPr wrap="square" lIns="0" tIns="0" rIns="0" bIns="0" anchor="t">
             <a:spAutoFit/>
           </a:bodyPr>
           <a:lstStyle/>
@@ -15698,7 +15638,9 @@
         <p:txBody>
           <a:bodyPr rtlCol="0" anchor="ctr"/>
           <a:lstStyle/>
-          <a:p/>
+          <a:p>
+            <a:endParaRPr/>
+          </a:p>
         </p:txBody>
       </p:sp>
       <p:sp>
@@ -15718,7 +15660,7 @@
           <a:noFill/>
         </p:spPr>
         <p:txBody>
-          <a:bodyPr wrap="square" anchor="ctr" lIns="0" rIns="0" tIns="0" bIns="0">
+          <a:bodyPr wrap="square" lIns="0" tIns="0" rIns="0" bIns="0" anchor="ctr">
             <a:spAutoFit/>
           </a:bodyPr>
           <a:lstStyle/>
@@ -15757,7 +15699,7 @@
           <a:noFill/>
         </p:spPr>
         <p:txBody>
-          <a:bodyPr wrap="square" anchor="t" lIns="0" rIns="0" tIns="0" bIns="0">
+          <a:bodyPr wrap="square" lIns="0" tIns="0" rIns="0" bIns="0" anchor="t">
             <a:spAutoFit/>
           </a:bodyPr>
           <a:lstStyle/>
@@ -15812,7 +15754,7 @@
           <a:noFill/>
         </p:spPr>
         <p:txBody>
-          <a:bodyPr wrap="square" anchor="t" lIns="0" rIns="0" tIns="0" bIns="0">
+          <a:bodyPr wrap="square" lIns="0" tIns="0" rIns="0" bIns="0" anchor="t">
             <a:spAutoFit/>
           </a:bodyPr>
           <a:lstStyle/>
@@ -15859,7 +15801,7 @@
 </file>
 
 <file path=ppt/slides/slide4.xml><?xml version="1.0" encoding="utf-8"?>
-<p:sld xmlns:a="http://schemas.openxmlformats.org/drawingml/2006/main" xmlns:p="http://schemas.openxmlformats.org/presentationml/2006/main" xmlns:r="http://schemas.openxmlformats.org/officeDocument/2006/relationships">
+<p:sld xmlns:a="http://schemas.openxmlformats.org/drawingml/2006/main" xmlns:r="http://schemas.openxmlformats.org/officeDocument/2006/relationships" xmlns:p="http://schemas.openxmlformats.org/presentationml/2006/main">
   <p:cSld>
     <p:bg>
       <p:bgPr>
@@ -15875,7 +15817,14 @@
         <p:cNvGrpSpPr/>
         <p:nvPr/>
       </p:nvGrpSpPr>
-      <p:grpSpPr/>
+      <p:grpSpPr>
+        <a:xfrm>
+          <a:off x="0" y="0"/>
+          <a:ext cx="0" cy="0"/>
+          <a:chOff x="0" y="0"/>
+          <a:chExt cx="0" cy="0"/>
+        </a:xfrm>
+      </p:grpSpPr>
       <p:sp>
         <p:nvSpPr>
           <p:cNvPr id="2" name="TextBox 1"/>
@@ -15885,15 +15834,15 @@
         <p:spPr>
           <a:xfrm>
             <a:off x="566928" y="365760"/>
-            <a:ext cx="11057839" cy="274320"/>
-          </a:xfrm>
-          <a:prstGeom prst="rect">
-            <a:avLst/>
-          </a:prstGeom>
-          <a:noFill/>
-        </p:spPr>
-        <p:txBody>
-          <a:bodyPr wrap="square" anchor="t" lIns="0" rIns="0" tIns="0" bIns="0">
+            <a:ext cx="11057839" cy="209673"/>
+          </a:xfrm>
+          <a:prstGeom prst="rect">
+            <a:avLst/>
+          </a:prstGeom>
+          <a:noFill/>
+        </p:spPr>
+        <p:txBody>
+          <a:bodyPr wrap="square" lIns="0" tIns="0" rIns="0" bIns="0" anchor="t">
             <a:spAutoFit/>
           </a:bodyPr>
           <a:lstStyle/>
@@ -15904,13 +15853,13 @@
               </a:lnSpc>
             </a:pPr>
             <a:r>
-              <a:rPr sz="1200" b="1" i="0" spc="180">
+              <a:rPr sz="1200" b="1" i="0" spc="180" dirty="0">
                 <a:solidFill>
                   <a:srgbClr val="D9484E"/>
                 </a:solidFill>
                 <a:latin typeface="Calibri"/>
               </a:rPr>
-              <a:t>MOTIVATION  ·  3 OF 3</a:t>
+              <a:t>MOTIVATION</a:t>
             </a:r>
           </a:p>
         </p:txBody>
@@ -15932,7 +15881,7 @@
           <a:noFill/>
         </p:spPr>
         <p:txBody>
-          <a:bodyPr wrap="square" anchor="t" lIns="0" rIns="0" tIns="0" bIns="0">
+          <a:bodyPr wrap="square" lIns="0" tIns="0" rIns="0" bIns="0" anchor="t">
             <a:spAutoFit/>
           </a:bodyPr>
           <a:lstStyle/>
@@ -15997,6 +15946,7 @@
           <a:lstStyle/>
           <a:p>
             <a:pPr algn="ctr"/>
+            <a:endParaRPr/>
           </a:p>
         </p:txBody>
       </p:sp>
@@ -16017,7 +15967,7 @@
           <a:noFill/>
         </p:spPr>
         <p:txBody>
-          <a:bodyPr wrap="square" anchor="t" lIns="0" rIns="0" tIns="0" bIns="0">
+          <a:bodyPr wrap="square" lIns="0" tIns="0" rIns="0" bIns="0" anchor="t">
             <a:spAutoFit/>
           </a:bodyPr>
           <a:lstStyle/>
@@ -16028,7 +15978,7 @@
               </a:lnSpc>
             </a:pPr>
             <a:r>
-              <a:rPr sz="1600" b="1" i="0">
+              <a:rPr sz="1600" b="1" i="0" dirty="0">
                 <a:solidFill>
                   <a:srgbClr val="FFFFFF"/>
                 </a:solidFill>
@@ -16056,7 +16006,7 @@
           <a:noFill/>
         </p:spPr>
         <p:txBody>
-          <a:bodyPr wrap="square" anchor="t" lIns="0" rIns="0" tIns="0" bIns="0">
+          <a:bodyPr wrap="square" lIns="0" tIns="0" rIns="0" bIns="0" anchor="t">
             <a:spAutoFit/>
           </a:bodyPr>
           <a:lstStyle/>
@@ -16137,6 +16087,7 @@
           <a:lstStyle/>
           <a:p>
             <a:pPr algn="ctr"/>
+            <a:endParaRPr/>
           </a:p>
         </p:txBody>
       </p:sp>
@@ -16157,7 +16108,7 @@
           <a:noFill/>
         </p:spPr>
         <p:txBody>
-          <a:bodyPr wrap="square" anchor="t" lIns="0" rIns="0" tIns="0" bIns="0">
+          <a:bodyPr wrap="square" lIns="0" tIns="0" rIns="0" bIns="0" anchor="t">
             <a:spAutoFit/>
           </a:bodyPr>
           <a:lstStyle/>
@@ -16196,7 +16147,7 @@
           <a:noFill/>
         </p:spPr>
         <p:txBody>
-          <a:bodyPr wrap="square" anchor="t" lIns="0" rIns="0" tIns="0" bIns="0">
+          <a:bodyPr wrap="square" lIns="0" tIns="0" rIns="0" bIns="0" anchor="t">
             <a:spAutoFit/>
           </a:bodyPr>
           <a:lstStyle/>
@@ -16207,7 +16158,7 @@
               </a:lnSpc>
             </a:pPr>
             <a:r>
-              <a:rPr sz="1400" b="0" i="0">
+              <a:rPr sz="1400" b="0" i="0" dirty="0">
                 <a:solidFill>
                   <a:srgbClr val="C4CBDC"/>
                 </a:solidFill>
@@ -16261,6 +16212,7 @@
           <a:lstStyle/>
           <a:p>
             <a:pPr algn="ctr"/>
+            <a:endParaRPr/>
           </a:p>
         </p:txBody>
       </p:sp>
@@ -16281,7 +16233,7 @@
           <a:noFill/>
         </p:spPr>
         <p:txBody>
-          <a:bodyPr wrap="square" anchor="t" lIns="0" rIns="0" tIns="0" bIns="0">
+          <a:bodyPr wrap="square" lIns="0" tIns="0" rIns="0" bIns="0" anchor="t">
             <a:spAutoFit/>
           </a:bodyPr>
           <a:lstStyle/>
@@ -16320,7 +16272,7 @@
           <a:noFill/>
         </p:spPr>
         <p:txBody>
-          <a:bodyPr wrap="square" anchor="t" lIns="0" rIns="0" tIns="0" bIns="0">
+          <a:bodyPr wrap="square" lIns="0" tIns="0" rIns="0" bIns="0" anchor="t">
             <a:spAutoFit/>
           </a:bodyPr>
           <a:lstStyle/>
@@ -16383,7 +16335,9 @@
         <p:txBody>
           <a:bodyPr rtlCol="0" anchor="ctr"/>
           <a:lstStyle/>
-          <a:p/>
+          <a:p>
+            <a:endParaRPr/>
+          </a:p>
         </p:txBody>
       </p:sp>
       <p:sp>
@@ -16403,7 +16357,7 @@
           <a:noFill/>
         </p:spPr>
         <p:txBody>
-          <a:bodyPr wrap="square" anchor="t" lIns="0" rIns="0" tIns="0" bIns="0">
+          <a:bodyPr wrap="square" lIns="0" tIns="0" rIns="0" bIns="0" anchor="t">
             <a:spAutoFit/>
           </a:bodyPr>
           <a:lstStyle/>
@@ -16458,7 +16412,7 @@
           <a:noFill/>
         </p:spPr>
         <p:txBody>
-          <a:bodyPr wrap="square" anchor="t" lIns="0" rIns="0" tIns="0" bIns="0">
+          <a:bodyPr wrap="square" lIns="0" tIns="0" rIns="0" bIns="0" anchor="t">
             <a:spAutoFit/>
           </a:bodyPr>
           <a:lstStyle/>
@@ -16489,7 +16443,7 @@
 </file>
 
 <file path=ppt/slides/slide5.xml><?xml version="1.0" encoding="utf-8"?>
-<p:sld xmlns:a="http://schemas.openxmlformats.org/drawingml/2006/main" xmlns:p="http://schemas.openxmlformats.org/presentationml/2006/main" xmlns:r="http://schemas.openxmlformats.org/officeDocument/2006/relationships">
+<p:sld xmlns:a="http://schemas.openxmlformats.org/drawingml/2006/main" xmlns:r="http://schemas.openxmlformats.org/officeDocument/2006/relationships" xmlns:p="http://schemas.openxmlformats.org/presentationml/2006/main">
   <p:cSld>
     <p:bg>
       <p:bgPr>
@@ -16505,7 +16459,14 @@
         <p:cNvGrpSpPr/>
         <p:nvPr/>
       </p:nvGrpSpPr>
-      <p:grpSpPr/>
+      <p:grpSpPr>
+        <a:xfrm>
+          <a:off x="0" y="0"/>
+          <a:ext cx="0" cy="0"/>
+          <a:chOff x="0" y="0"/>
+          <a:chExt cx="0" cy="0"/>
+        </a:xfrm>
+      </p:grpSpPr>
       <p:sp>
         <p:nvSpPr>
           <p:cNvPr id="2" name="TextBox 1"/>
@@ -16523,7 +16484,7 @@
           <a:noFill/>
         </p:spPr>
         <p:txBody>
-          <a:bodyPr wrap="square" anchor="t" lIns="0" rIns="0" tIns="0" bIns="0">
+          <a:bodyPr wrap="square" lIns="0" tIns="0" rIns="0" bIns="0" anchor="t">
             <a:spAutoFit/>
           </a:bodyPr>
           <a:lstStyle/>
@@ -16562,7 +16523,7 @@
           <a:noFill/>
         </p:spPr>
         <p:txBody>
-          <a:bodyPr wrap="square" anchor="t" lIns="0" rIns="0" tIns="0" bIns="0">
+          <a:bodyPr wrap="square" lIns="0" tIns="0" rIns="0" bIns="0" anchor="t">
             <a:spAutoFit/>
           </a:bodyPr>
           <a:lstStyle/>
@@ -16625,7 +16586,9 @@
         <p:txBody>
           <a:bodyPr rtlCol="0" anchor="ctr"/>
           <a:lstStyle/>
-          <a:p/>
+          <a:p>
+            <a:endParaRPr/>
+          </a:p>
         </p:txBody>
       </p:sp>
       <p:sp>
@@ -16645,7 +16608,7 @@
           <a:noFill/>
         </p:spPr>
         <p:txBody>
-          <a:bodyPr wrap="square" anchor="ctr" lIns="0" rIns="0" tIns="0" bIns="0">
+          <a:bodyPr wrap="square" lIns="0" tIns="0" rIns="0" bIns="0" anchor="ctr">
             <a:spAutoFit/>
           </a:bodyPr>
           <a:lstStyle/>
@@ -16684,7 +16647,7 @@
           <a:noFill/>
         </p:spPr>
         <p:txBody>
-          <a:bodyPr wrap="square" anchor="t" lIns="0" rIns="0" tIns="0" bIns="0">
+          <a:bodyPr wrap="square" lIns="0" tIns="0" rIns="0" bIns="0" anchor="t">
             <a:spAutoFit/>
           </a:bodyPr>
           <a:lstStyle/>
@@ -16723,7 +16686,7 @@
           <a:noFill/>
         </p:spPr>
         <p:txBody>
-          <a:bodyPr wrap="square" anchor="t" lIns="0" rIns="0" tIns="0" bIns="0">
+          <a:bodyPr wrap="square" lIns="0" tIns="0" rIns="0" bIns="0" anchor="t">
             <a:spAutoFit/>
           </a:bodyPr>
           <a:lstStyle/>
@@ -16786,7 +16749,9 @@
         <p:txBody>
           <a:bodyPr rtlCol="0" anchor="ctr"/>
           <a:lstStyle/>
-          <a:p/>
+          <a:p>
+            <a:endParaRPr/>
+          </a:p>
         </p:txBody>
       </p:sp>
       <p:sp>
@@ -16806,7 +16771,7 @@
           <a:noFill/>
         </p:spPr>
         <p:txBody>
-          <a:bodyPr wrap="square" anchor="ctr" lIns="0" rIns="0" tIns="0" bIns="0">
+          <a:bodyPr wrap="square" lIns="0" tIns="0" rIns="0" bIns="0" anchor="ctr">
             <a:spAutoFit/>
           </a:bodyPr>
           <a:lstStyle/>
@@ -16845,7 +16810,7 @@
           <a:noFill/>
         </p:spPr>
         <p:txBody>
-          <a:bodyPr wrap="square" anchor="t" lIns="0" rIns="0" tIns="0" bIns="0">
+          <a:bodyPr wrap="square" lIns="0" tIns="0" rIns="0" bIns="0" anchor="t">
             <a:spAutoFit/>
           </a:bodyPr>
           <a:lstStyle/>
@@ -16884,7 +16849,7 @@
           <a:noFill/>
         </p:spPr>
         <p:txBody>
-          <a:bodyPr wrap="square" anchor="t" lIns="0" rIns="0" tIns="0" bIns="0">
+          <a:bodyPr wrap="square" lIns="0" tIns="0" rIns="0" bIns="0" anchor="t">
             <a:spAutoFit/>
           </a:bodyPr>
           <a:lstStyle/>
@@ -16947,7 +16912,9 @@
         <p:txBody>
           <a:bodyPr rtlCol="0" anchor="ctr"/>
           <a:lstStyle/>
-          <a:p/>
+          <a:p>
+            <a:endParaRPr/>
+          </a:p>
         </p:txBody>
       </p:sp>
       <p:sp>
@@ -16967,7 +16934,7 @@
           <a:noFill/>
         </p:spPr>
         <p:txBody>
-          <a:bodyPr wrap="square" anchor="ctr" lIns="0" rIns="0" tIns="0" bIns="0">
+          <a:bodyPr wrap="square" lIns="0" tIns="0" rIns="0" bIns="0" anchor="ctr">
             <a:spAutoFit/>
           </a:bodyPr>
           <a:lstStyle/>
@@ -17006,7 +16973,7 @@
           <a:noFill/>
         </p:spPr>
         <p:txBody>
-          <a:bodyPr wrap="square" anchor="t" lIns="0" rIns="0" tIns="0" bIns="0">
+          <a:bodyPr wrap="square" lIns="0" tIns="0" rIns="0" bIns="0" anchor="t">
             <a:spAutoFit/>
           </a:bodyPr>
           <a:lstStyle/>
@@ -17045,7 +17012,7 @@
           <a:noFill/>
         </p:spPr>
         <p:txBody>
-          <a:bodyPr wrap="square" anchor="t" lIns="0" rIns="0" tIns="0" bIns="0">
+          <a:bodyPr wrap="square" lIns="0" tIns="0" rIns="0" bIns="0" anchor="t">
             <a:spAutoFit/>
           </a:bodyPr>
           <a:lstStyle/>
@@ -17108,7 +17075,9 @@
         <p:txBody>
           <a:bodyPr rtlCol="0" anchor="ctr"/>
           <a:lstStyle/>
-          <a:p/>
+          <a:p>
+            <a:endParaRPr/>
+          </a:p>
         </p:txBody>
       </p:sp>
       <p:sp>
@@ -17128,7 +17097,7 @@
           <a:noFill/>
         </p:spPr>
         <p:txBody>
-          <a:bodyPr wrap="square" anchor="t" lIns="0" rIns="0" tIns="0" bIns="0">
+          <a:bodyPr wrap="square" lIns="0" tIns="0" rIns="0" bIns="0" anchor="t">
             <a:spAutoFit/>
           </a:bodyPr>
           <a:lstStyle/>
@@ -17159,7 +17128,7 @@
 </file>
 
 <file path=ppt/slides/slide6.xml><?xml version="1.0" encoding="utf-8"?>
-<p:sld xmlns:a="http://schemas.openxmlformats.org/drawingml/2006/main" xmlns:p="http://schemas.openxmlformats.org/presentationml/2006/main" xmlns:r="http://schemas.openxmlformats.org/officeDocument/2006/relationships">
+<p:sld xmlns:a="http://schemas.openxmlformats.org/drawingml/2006/main" xmlns:r="http://schemas.openxmlformats.org/officeDocument/2006/relationships" xmlns:p="http://schemas.openxmlformats.org/presentationml/2006/main">
   <p:cSld>
     <p:bg>
       <p:bgPr>
@@ -17175,7 +17144,14 @@
         <p:cNvGrpSpPr/>
         <p:nvPr/>
       </p:nvGrpSpPr>
-      <p:grpSpPr/>
+      <p:grpSpPr>
+        <a:xfrm>
+          <a:off x="0" y="0"/>
+          <a:ext cx="0" cy="0"/>
+          <a:chOff x="0" y="0"/>
+          <a:chExt cx="0" cy="0"/>
+        </a:xfrm>
+      </p:grpSpPr>
       <p:sp>
         <p:nvSpPr>
           <p:cNvPr id="2" name="TextBox 1"/>
@@ -17193,7 +17169,7 @@
           <a:noFill/>
         </p:spPr>
         <p:txBody>
-          <a:bodyPr wrap="square" anchor="t" lIns="0" rIns="0" tIns="0" bIns="0">
+          <a:bodyPr wrap="square" lIns="0" tIns="0" rIns="0" bIns="0" anchor="t">
             <a:spAutoFit/>
           </a:bodyPr>
           <a:lstStyle/>
@@ -17204,7 +17180,7 @@
               </a:lnSpc>
             </a:pPr>
             <a:r>
-              <a:rPr sz="1200" b="1" i="0" spc="180">
+              <a:rPr sz="1200" b="1" i="0" spc="180" dirty="0">
                 <a:solidFill>
                   <a:srgbClr val="D9484E"/>
                 </a:solidFill>
@@ -17232,7 +17208,7 @@
           <a:noFill/>
         </p:spPr>
         <p:txBody>
-          <a:bodyPr wrap="square" anchor="t" lIns="0" rIns="0" tIns="0" bIns="0">
+          <a:bodyPr wrap="square" lIns="0" tIns="0" rIns="0" bIns="0" anchor="t">
             <a:spAutoFit/>
           </a:bodyPr>
           <a:lstStyle/>
@@ -17295,7 +17271,9 @@
         <p:txBody>
           <a:bodyPr rtlCol="0" anchor="ctr"/>
           <a:lstStyle/>
-          <a:p/>
+          <a:p>
+            <a:endParaRPr/>
+          </a:p>
         </p:txBody>
       </p:sp>
       <p:sp>
@@ -17315,7 +17293,7 @@
           <a:noFill/>
         </p:spPr>
         <p:txBody>
-          <a:bodyPr wrap="square" anchor="ctr" lIns="0" rIns="0" tIns="0" bIns="0">
+          <a:bodyPr wrap="square" lIns="0" tIns="0" rIns="0" bIns="0" anchor="ctr">
             <a:spAutoFit/>
           </a:bodyPr>
           <a:lstStyle/>
@@ -17326,7 +17304,7 @@
               </a:lnSpc>
             </a:pPr>
             <a:r>
-              <a:rPr sz="3400" b="1" i="0">
+              <a:rPr sz="3400" b="1" i="0" dirty="0">
                 <a:solidFill>
                   <a:srgbClr val="141A2E"/>
                 </a:solidFill>
@@ -17354,7 +17332,7 @@
           <a:noFill/>
         </p:spPr>
         <p:txBody>
-          <a:bodyPr wrap="square" anchor="t" lIns="0" rIns="0" tIns="0" bIns="0">
+          <a:bodyPr wrap="square" lIns="0" tIns="0" rIns="0" bIns="0" anchor="t">
             <a:spAutoFit/>
           </a:bodyPr>
           <a:lstStyle/>
@@ -17433,7 +17411,9 @@
         <p:txBody>
           <a:bodyPr rtlCol="0" anchor="ctr"/>
           <a:lstStyle/>
-          <a:p/>
+          <a:p>
+            <a:endParaRPr/>
+          </a:p>
         </p:txBody>
       </p:sp>
       <p:sp>
@@ -17453,7 +17433,7 @@
           <a:noFill/>
         </p:spPr>
         <p:txBody>
-          <a:bodyPr wrap="square" anchor="ctr" lIns="0" rIns="0" tIns="0" bIns="0">
+          <a:bodyPr wrap="square" lIns="0" tIns="0" rIns="0" bIns="0" anchor="ctr">
             <a:spAutoFit/>
           </a:bodyPr>
           <a:lstStyle/>
@@ -17492,7 +17472,7 @@
           <a:noFill/>
         </p:spPr>
         <p:txBody>
-          <a:bodyPr wrap="square" anchor="t" lIns="0" rIns="0" tIns="0" bIns="0">
+          <a:bodyPr wrap="square" lIns="0" tIns="0" rIns="0" bIns="0" anchor="t">
             <a:spAutoFit/>
           </a:bodyPr>
           <a:lstStyle/>
@@ -17571,7 +17551,9 @@
         <p:txBody>
           <a:bodyPr rtlCol="0" anchor="ctr"/>
           <a:lstStyle/>
-          <a:p/>
+          <a:p>
+            <a:endParaRPr/>
+          </a:p>
         </p:txBody>
       </p:sp>
       <p:sp>
@@ -17591,7 +17573,7 @@
           <a:noFill/>
         </p:spPr>
         <p:txBody>
-          <a:bodyPr wrap="square" anchor="ctr" lIns="0" rIns="0" tIns="0" bIns="0">
+          <a:bodyPr wrap="square" lIns="0" tIns="0" rIns="0" bIns="0" anchor="ctr">
             <a:spAutoFit/>
           </a:bodyPr>
           <a:lstStyle/>
@@ -17630,7 +17612,7 @@
           <a:noFill/>
         </p:spPr>
         <p:txBody>
-          <a:bodyPr wrap="square" anchor="t" lIns="0" rIns="0" tIns="0" bIns="0">
+          <a:bodyPr wrap="square" lIns="0" tIns="0" rIns="0" bIns="0" anchor="t">
             <a:spAutoFit/>
           </a:bodyPr>
           <a:lstStyle/>
@@ -17709,7 +17691,9 @@
         <p:txBody>
           <a:bodyPr rtlCol="0" anchor="ctr"/>
           <a:lstStyle/>
-          <a:p/>
+          <a:p>
+            <a:endParaRPr/>
+          </a:p>
         </p:txBody>
       </p:sp>
       <p:sp>
@@ -17729,7 +17713,7 @@
           <a:noFill/>
         </p:spPr>
         <p:txBody>
-          <a:bodyPr wrap="square" anchor="ctr" lIns="0" rIns="0" tIns="0" bIns="0">
+          <a:bodyPr wrap="square" lIns="0" tIns="0" rIns="0" bIns="0" anchor="ctr">
             <a:spAutoFit/>
           </a:bodyPr>
           <a:lstStyle/>
@@ -17768,7 +17752,7 @@
           <a:noFill/>
         </p:spPr>
         <p:txBody>
-          <a:bodyPr wrap="square" anchor="t" lIns="0" rIns="0" tIns="0" bIns="0">
+          <a:bodyPr wrap="square" lIns="0" tIns="0" rIns="0" bIns="0" anchor="t">
             <a:spAutoFit/>
           </a:bodyPr>
           <a:lstStyle/>
@@ -17849,6 +17833,7 @@
           <a:lstStyle/>
           <a:p>
             <a:pPr algn="ctr"/>
+            <a:endParaRPr/>
           </a:p>
         </p:txBody>
       </p:sp>
@@ -17869,7 +17854,7 @@
           <a:noFill/>
         </p:spPr>
         <p:txBody>
-          <a:bodyPr wrap="square" anchor="t" lIns="0" rIns="0" tIns="0" bIns="0">
+          <a:bodyPr wrap="square" lIns="0" tIns="0" rIns="0" bIns="0" anchor="t">
             <a:spAutoFit/>
           </a:bodyPr>
           <a:lstStyle/>
@@ -17880,7 +17865,7 @@
               </a:lnSpc>
             </a:pPr>
             <a:r>
-              <a:rPr sz="1600" b="1" i="0">
+              <a:rPr sz="1600" b="1" i="0" dirty="0">
                 <a:solidFill>
                   <a:srgbClr val="141A2E"/>
                 </a:solidFill>
@@ -17908,7 +17893,7 @@
           <a:noFill/>
         </p:spPr>
         <p:txBody>
-          <a:bodyPr wrap="square" anchor="t" lIns="0" rIns="0" tIns="0" bIns="0">
+          <a:bodyPr wrap="square" lIns="0" tIns="0" rIns="0" bIns="0" anchor="t">
             <a:spAutoFit/>
           </a:bodyPr>
           <a:lstStyle/>
@@ -17973,6 +17958,7 @@
           <a:lstStyle/>
           <a:p>
             <a:pPr algn="ctr"/>
+            <a:endParaRPr/>
           </a:p>
         </p:txBody>
       </p:sp>
@@ -17993,7 +17979,7 @@
           <a:noFill/>
         </p:spPr>
         <p:txBody>
-          <a:bodyPr wrap="square" anchor="t" lIns="0" rIns="0" tIns="0" bIns="0">
+          <a:bodyPr wrap="square" lIns="0" tIns="0" rIns="0" bIns="0" anchor="t">
             <a:spAutoFit/>
           </a:bodyPr>
           <a:lstStyle/>
@@ -18032,7 +18018,7 @@
           <a:noFill/>
         </p:spPr>
         <p:txBody>
-          <a:bodyPr wrap="square" anchor="t" lIns="0" rIns="0" tIns="0" bIns="0">
+          <a:bodyPr wrap="square" lIns="0" tIns="0" rIns="0" bIns="0" anchor="t">
             <a:spAutoFit/>
           </a:bodyPr>
           <a:lstStyle/>
@@ -18097,6 +18083,7 @@
           <a:lstStyle/>
           <a:p>
             <a:pPr algn="ctr"/>
+            <a:endParaRPr/>
           </a:p>
         </p:txBody>
       </p:sp>
@@ -18117,7 +18104,7 @@
           <a:noFill/>
         </p:spPr>
         <p:txBody>
-          <a:bodyPr wrap="square" anchor="t" lIns="0" rIns="0" tIns="0" bIns="0">
+          <a:bodyPr wrap="square" lIns="0" tIns="0" rIns="0" bIns="0" anchor="t">
             <a:spAutoFit/>
           </a:bodyPr>
           <a:lstStyle/>
@@ -18156,7 +18143,7 @@
           <a:noFill/>
         </p:spPr>
         <p:txBody>
-          <a:bodyPr wrap="square" anchor="t" lIns="0" rIns="0" tIns="0" bIns="0">
+          <a:bodyPr wrap="square" lIns="0" tIns="0" rIns="0" bIns="0" anchor="t">
             <a:spAutoFit/>
           </a:bodyPr>
           <a:lstStyle/>
@@ -18187,7 +18174,7 @@
 </file>
 
 <file path=ppt/slides/slide7.xml><?xml version="1.0" encoding="utf-8"?>
-<p:sld xmlns:a="http://schemas.openxmlformats.org/drawingml/2006/main" xmlns:p="http://schemas.openxmlformats.org/presentationml/2006/main" xmlns:r="http://schemas.openxmlformats.org/officeDocument/2006/relationships">
+<p:sld xmlns:a="http://schemas.openxmlformats.org/drawingml/2006/main" xmlns:r="http://schemas.openxmlformats.org/officeDocument/2006/relationships" xmlns:p="http://schemas.openxmlformats.org/presentationml/2006/main">
   <p:cSld>
     <p:bg>
       <p:bgPr>
@@ -18203,7 +18190,14 @@
         <p:cNvGrpSpPr/>
         <p:nvPr/>
       </p:nvGrpSpPr>
-      <p:grpSpPr/>
+      <p:grpSpPr>
+        <a:xfrm>
+          <a:off x="0" y="0"/>
+          <a:ext cx="0" cy="0"/>
+          <a:chOff x="0" y="0"/>
+          <a:chExt cx="0" cy="0"/>
+        </a:xfrm>
+      </p:grpSpPr>
       <p:sp>
         <p:nvSpPr>
           <p:cNvPr id="2" name="TextBox 1"/>
@@ -18221,7 +18215,7 @@
           <a:noFill/>
         </p:spPr>
         <p:txBody>
-          <a:bodyPr wrap="square" anchor="t" lIns="0" rIns="0" tIns="0" bIns="0">
+          <a:bodyPr wrap="square" lIns="0" tIns="0" rIns="0" bIns="0" anchor="t">
             <a:spAutoFit/>
           </a:bodyPr>
           <a:lstStyle/>
@@ -18260,7 +18254,7 @@
           <a:noFill/>
         </p:spPr>
         <p:txBody>
-          <a:bodyPr wrap="square" anchor="t" lIns="0" rIns="0" tIns="0" bIns="0">
+          <a:bodyPr wrap="square" lIns="0" tIns="0" rIns="0" bIns="0" anchor="t">
             <a:spAutoFit/>
           </a:bodyPr>
           <a:lstStyle/>
@@ -18299,7 +18293,7 @@
           <a:noFill/>
         </p:spPr>
         <p:txBody>
-          <a:bodyPr wrap="square" anchor="t" lIns="0" rIns="0" tIns="0" bIns="0">
+          <a:bodyPr wrap="square" lIns="0" tIns="0" rIns="0" bIns="0" anchor="t">
             <a:spAutoFit/>
           </a:bodyPr>
           <a:lstStyle/>
@@ -18330,7 +18324,7 @@
           <p:nvPr/>
         </p:nvPicPr>
         <p:blipFill>
-          <a:blip r:embed="rId2"/>
+          <a:blip r:embed="rId3"/>
           <a:stretch>
             <a:fillRect/>
           </a:stretch>
@@ -18354,7 +18348,7 @@
 </file>
 
 <file path=ppt/slides/slide8.xml><?xml version="1.0" encoding="utf-8"?>
-<p:sld xmlns:a="http://schemas.openxmlformats.org/drawingml/2006/main" xmlns:p="http://schemas.openxmlformats.org/presentationml/2006/main" xmlns:r="http://schemas.openxmlformats.org/officeDocument/2006/relationships">
+<p:sld xmlns:a="http://schemas.openxmlformats.org/drawingml/2006/main" xmlns:r="http://schemas.openxmlformats.org/officeDocument/2006/relationships" xmlns:p="http://schemas.openxmlformats.org/presentationml/2006/main">
   <p:cSld>
     <p:bg>
       <p:bgPr>
@@ -18370,7 +18364,14 @@
         <p:cNvGrpSpPr/>
         <p:nvPr/>
       </p:nvGrpSpPr>
-      <p:grpSpPr/>
+      <p:grpSpPr>
+        <a:xfrm>
+          <a:off x="0" y="0"/>
+          <a:ext cx="0" cy="0"/>
+          <a:chOff x="0" y="0"/>
+          <a:chExt cx="0" cy="0"/>
+        </a:xfrm>
+      </p:grpSpPr>
       <p:sp>
         <p:nvSpPr>
           <p:cNvPr id="2" name="TextBox 1"/>
@@ -18388,7 +18389,7 @@
           <a:noFill/>
         </p:spPr>
         <p:txBody>
-          <a:bodyPr wrap="square" anchor="t" lIns="0" rIns="0" tIns="0" bIns="0">
+          <a:bodyPr wrap="square" lIns="0" tIns="0" rIns="0" bIns="0" anchor="t">
             <a:spAutoFit/>
           </a:bodyPr>
           <a:lstStyle/>
@@ -18427,7 +18428,7 @@
           <a:noFill/>
         </p:spPr>
         <p:txBody>
-          <a:bodyPr wrap="square" anchor="t" lIns="0" rIns="0" tIns="0" bIns="0">
+          <a:bodyPr wrap="square" lIns="0" tIns="0" rIns="0" bIns="0" anchor="t">
             <a:spAutoFit/>
           </a:bodyPr>
           <a:lstStyle/>
@@ -18492,6 +18493,7 @@
           <a:lstStyle/>
           <a:p>
             <a:pPr algn="ctr"/>
+            <a:endParaRPr/>
           </a:p>
         </p:txBody>
       </p:sp>
@@ -18512,7 +18514,7 @@
           <a:noFill/>
         </p:spPr>
         <p:txBody>
-          <a:bodyPr wrap="square" anchor="t" lIns="0" rIns="0" tIns="0" bIns="0">
+          <a:bodyPr wrap="square" lIns="0" tIns="0" rIns="0" bIns="0" anchor="t">
             <a:spAutoFit/>
           </a:bodyPr>
           <a:lstStyle/>
@@ -18551,7 +18553,7 @@
           <a:noFill/>
         </p:spPr>
         <p:txBody>
-          <a:bodyPr wrap="square" anchor="t" lIns="0" rIns="0" tIns="0" bIns="0">
+          <a:bodyPr wrap="square" lIns="0" tIns="0" rIns="0" bIns="0" anchor="t">
             <a:spAutoFit/>
           </a:bodyPr>
           <a:lstStyle/>
@@ -18616,6 +18618,7 @@
           <a:lstStyle/>
           <a:p>
             <a:pPr algn="ctr"/>
+            <a:endParaRPr/>
           </a:p>
         </p:txBody>
       </p:sp>
@@ -18636,7 +18639,7 @@
           <a:noFill/>
         </p:spPr>
         <p:txBody>
-          <a:bodyPr wrap="square" anchor="t" lIns="0" rIns="0" tIns="0" bIns="0">
+          <a:bodyPr wrap="square" lIns="0" tIns="0" rIns="0" bIns="0" anchor="t">
             <a:spAutoFit/>
           </a:bodyPr>
           <a:lstStyle/>
@@ -18675,7 +18678,7 @@
           <a:noFill/>
         </p:spPr>
         <p:txBody>
-          <a:bodyPr wrap="square" anchor="t" lIns="0" rIns="0" tIns="0" bIns="0">
+          <a:bodyPr wrap="square" lIns="0" tIns="0" rIns="0" bIns="0" anchor="t">
             <a:spAutoFit/>
           </a:bodyPr>
           <a:lstStyle/>
@@ -18740,6 +18743,7 @@
           <a:lstStyle/>
           <a:p>
             <a:pPr algn="ctr"/>
+            <a:endParaRPr/>
           </a:p>
         </p:txBody>
       </p:sp>
@@ -18760,7 +18764,7 @@
           <a:noFill/>
         </p:spPr>
         <p:txBody>
-          <a:bodyPr wrap="square" anchor="t" lIns="0" rIns="0" tIns="0" bIns="0">
+          <a:bodyPr wrap="square" lIns="0" tIns="0" rIns="0" bIns="0" anchor="t">
             <a:spAutoFit/>
           </a:bodyPr>
           <a:lstStyle/>
@@ -18799,7 +18803,7 @@
           <a:noFill/>
         </p:spPr>
         <p:txBody>
-          <a:bodyPr wrap="square" anchor="t" lIns="0" rIns="0" tIns="0" bIns="0">
+          <a:bodyPr wrap="square" lIns="0" tIns="0" rIns="0" bIns="0" anchor="t">
             <a:spAutoFit/>
           </a:bodyPr>
           <a:lstStyle/>
@@ -18838,7 +18842,7 @@
           <a:noFill/>
         </p:spPr>
         <p:txBody>
-          <a:bodyPr wrap="square" anchor="t" lIns="0" rIns="0" tIns="0" bIns="0">
+          <a:bodyPr wrap="square" lIns="0" tIns="0" rIns="0" bIns="0" anchor="t">
             <a:spAutoFit/>
           </a:bodyPr>
           <a:lstStyle/>
@@ -18877,7 +18881,7 @@
           <a:noFill/>
         </p:spPr>
         <p:txBody>
-          <a:bodyPr wrap="square" anchor="t" lIns="0" rIns="0" tIns="0" bIns="0">
+          <a:bodyPr wrap="square" lIns="0" tIns="0" rIns="0" bIns="0" anchor="t">
             <a:spAutoFit/>
           </a:bodyPr>
           <a:lstStyle/>
@@ -18940,7 +18944,9 @@
         <p:txBody>
           <a:bodyPr rtlCol="0" anchor="ctr"/>
           <a:lstStyle/>
-          <a:p/>
+          <a:p>
+            <a:endParaRPr/>
+          </a:p>
         </p:txBody>
       </p:sp>
       <p:sp>
@@ -18960,7 +18966,7 @@
           <a:noFill/>
         </p:spPr>
         <p:txBody>
-          <a:bodyPr wrap="square" anchor="ctr" lIns="0" rIns="0" tIns="0" bIns="0">
+          <a:bodyPr wrap="square" lIns="0" tIns="0" rIns="0" bIns="0" anchor="ctr">
             <a:spAutoFit/>
           </a:bodyPr>
           <a:lstStyle/>
@@ -18999,7 +19005,7 @@
           <a:noFill/>
         </p:spPr>
         <p:txBody>
-          <a:bodyPr wrap="square" anchor="ctr" lIns="0" rIns="0" tIns="0" bIns="0">
+          <a:bodyPr wrap="square" lIns="0" tIns="0" rIns="0" bIns="0" anchor="ctr">
             <a:spAutoFit/>
           </a:bodyPr>
           <a:lstStyle/>
@@ -19038,7 +19044,7 @@
           <a:noFill/>
         </p:spPr>
         <p:txBody>
-          <a:bodyPr wrap="square" anchor="ctr" lIns="0" rIns="0" tIns="0" bIns="0">
+          <a:bodyPr wrap="square" lIns="0" tIns="0" rIns="0" bIns="0" anchor="ctr">
             <a:spAutoFit/>
           </a:bodyPr>
           <a:lstStyle/>
@@ -19077,7 +19083,7 @@
           <a:noFill/>
         </p:spPr>
         <p:txBody>
-          <a:bodyPr wrap="square" anchor="ctr" lIns="0" rIns="0" tIns="0" bIns="0">
+          <a:bodyPr wrap="square" lIns="0" tIns="0" rIns="0" bIns="0" anchor="ctr">
             <a:spAutoFit/>
           </a:bodyPr>
           <a:lstStyle/>
@@ -19140,7 +19146,9 @@
         <p:txBody>
           <a:bodyPr rtlCol="0" anchor="ctr"/>
           <a:lstStyle/>
-          <a:p/>
+          <a:p>
+            <a:endParaRPr/>
+          </a:p>
         </p:txBody>
       </p:sp>
       <p:sp>
@@ -19160,7 +19168,7 @@
           <a:noFill/>
         </p:spPr>
         <p:txBody>
-          <a:bodyPr wrap="square" anchor="ctr" lIns="0" rIns="0" tIns="0" bIns="0">
+          <a:bodyPr wrap="square" lIns="0" tIns="0" rIns="0" bIns="0" anchor="ctr">
             <a:spAutoFit/>
           </a:bodyPr>
           <a:lstStyle/>
@@ -19199,7 +19207,7 @@
           <a:noFill/>
         </p:spPr>
         <p:txBody>
-          <a:bodyPr wrap="square" anchor="ctr" lIns="0" rIns="0" tIns="0" bIns="0">
+          <a:bodyPr wrap="square" lIns="0" tIns="0" rIns="0" bIns="0" anchor="ctr">
             <a:spAutoFit/>
           </a:bodyPr>
           <a:lstStyle/>
@@ -19238,7 +19246,7 @@
           <a:noFill/>
         </p:spPr>
         <p:txBody>
-          <a:bodyPr wrap="square" anchor="ctr" lIns="0" rIns="0" tIns="0" bIns="0">
+          <a:bodyPr wrap="square" lIns="0" tIns="0" rIns="0" bIns="0" anchor="ctr">
             <a:spAutoFit/>
           </a:bodyPr>
           <a:lstStyle/>
@@ -19277,7 +19285,7 @@
           <a:noFill/>
         </p:spPr>
         <p:txBody>
-          <a:bodyPr wrap="square" anchor="ctr" lIns="0" rIns="0" tIns="0" bIns="0">
+          <a:bodyPr wrap="square" lIns="0" tIns="0" rIns="0" bIns="0" anchor="ctr">
             <a:spAutoFit/>
           </a:bodyPr>
           <a:lstStyle/>
@@ -19340,7 +19348,9 @@
         <p:txBody>
           <a:bodyPr rtlCol="0" anchor="ctr"/>
           <a:lstStyle/>
-          <a:p/>
+          <a:p>
+            <a:endParaRPr/>
+          </a:p>
         </p:txBody>
       </p:sp>
       <p:sp>
@@ -19360,7 +19370,7 @@
           <a:noFill/>
         </p:spPr>
         <p:txBody>
-          <a:bodyPr wrap="square" anchor="ctr" lIns="0" rIns="0" tIns="0" bIns="0">
+          <a:bodyPr wrap="square" lIns="0" tIns="0" rIns="0" bIns="0" anchor="ctr">
             <a:spAutoFit/>
           </a:bodyPr>
           <a:lstStyle/>
@@ -19399,7 +19409,7 @@
           <a:noFill/>
         </p:spPr>
         <p:txBody>
-          <a:bodyPr wrap="square" anchor="ctr" lIns="0" rIns="0" tIns="0" bIns="0">
+          <a:bodyPr wrap="square" lIns="0" tIns="0" rIns="0" bIns="0" anchor="ctr">
             <a:spAutoFit/>
           </a:bodyPr>
           <a:lstStyle/>
@@ -19438,7 +19448,7 @@
           <a:noFill/>
         </p:spPr>
         <p:txBody>
-          <a:bodyPr wrap="square" anchor="ctr" lIns="0" rIns="0" tIns="0" bIns="0">
+          <a:bodyPr wrap="square" lIns="0" tIns="0" rIns="0" bIns="0" anchor="ctr">
             <a:spAutoFit/>
           </a:bodyPr>
           <a:lstStyle/>
@@ -19477,7 +19487,7 @@
           <a:noFill/>
         </p:spPr>
         <p:txBody>
-          <a:bodyPr wrap="square" anchor="ctr" lIns="0" rIns="0" tIns="0" bIns="0">
+          <a:bodyPr wrap="square" lIns="0" tIns="0" rIns="0" bIns="0" anchor="ctr">
             <a:spAutoFit/>
           </a:bodyPr>
           <a:lstStyle/>
@@ -19540,7 +19550,9 @@
         <p:txBody>
           <a:bodyPr rtlCol="0" anchor="ctr"/>
           <a:lstStyle/>
-          <a:p/>
+          <a:p>
+            <a:endParaRPr/>
+          </a:p>
         </p:txBody>
       </p:sp>
       <p:sp>
@@ -19560,7 +19572,7 @@
           <a:noFill/>
         </p:spPr>
         <p:txBody>
-          <a:bodyPr wrap="square" anchor="ctr" lIns="0" rIns="0" tIns="0" bIns="0">
+          <a:bodyPr wrap="square" lIns="0" tIns="0" rIns="0" bIns="0" anchor="ctr">
             <a:spAutoFit/>
           </a:bodyPr>
           <a:lstStyle/>
@@ -19599,7 +19611,7 @@
           <a:noFill/>
         </p:spPr>
         <p:txBody>
-          <a:bodyPr wrap="square" anchor="ctr" lIns="0" rIns="0" tIns="0" bIns="0">
+          <a:bodyPr wrap="square" lIns="0" tIns="0" rIns="0" bIns="0" anchor="ctr">
             <a:spAutoFit/>
           </a:bodyPr>
           <a:lstStyle/>
@@ -19662,7 +19674,9 @@
         <p:txBody>
           <a:bodyPr rtlCol="0" anchor="ctr"/>
           <a:lstStyle/>
-          <a:p/>
+          <a:p>
+            <a:endParaRPr/>
+          </a:p>
         </p:txBody>
       </p:sp>
       <p:sp>
@@ -19682,7 +19696,7 @@
           <a:noFill/>
         </p:spPr>
         <p:txBody>
-          <a:bodyPr wrap="square" anchor="t" lIns="0" rIns="0" tIns="0" bIns="0">
+          <a:bodyPr wrap="square" lIns="0" tIns="0" rIns="0" bIns="0" anchor="t">
             <a:spAutoFit/>
           </a:bodyPr>
           <a:lstStyle/>
@@ -19721,7 +19735,7 @@
           <a:noFill/>
         </p:spPr>
         <p:txBody>
-          <a:bodyPr wrap="square" anchor="t" lIns="0" rIns="0" tIns="0" bIns="0">
+          <a:bodyPr wrap="square" lIns="0" tIns="0" rIns="0" bIns="0" anchor="t">
             <a:spAutoFit/>
           </a:bodyPr>
           <a:lstStyle/>
@@ -19760,7 +19774,7 @@
           <a:noFill/>
         </p:spPr>
         <p:txBody>
-          <a:bodyPr wrap="square" anchor="t" lIns="0" rIns="0" tIns="0" bIns="0">
+          <a:bodyPr wrap="square" lIns="0" tIns="0" rIns="0" bIns="0" anchor="t">
             <a:spAutoFit/>
           </a:bodyPr>
           <a:lstStyle/>
@@ -19791,7 +19805,7 @@
 </file>
 
 <file path=ppt/slides/slide9.xml><?xml version="1.0" encoding="utf-8"?>
-<p:sld xmlns:a="http://schemas.openxmlformats.org/drawingml/2006/main" xmlns:p="http://schemas.openxmlformats.org/presentationml/2006/main" xmlns:r="http://schemas.openxmlformats.org/officeDocument/2006/relationships">
+<p:sld xmlns:a="http://schemas.openxmlformats.org/drawingml/2006/main" xmlns:r="http://schemas.openxmlformats.org/officeDocument/2006/relationships" xmlns:p="http://schemas.openxmlformats.org/presentationml/2006/main">
   <p:cSld>
     <p:bg>
       <p:bgPr>
@@ -19807,7 +19821,14 @@
         <p:cNvGrpSpPr/>
         <p:nvPr/>
       </p:nvGrpSpPr>
-      <p:grpSpPr/>
+      <p:grpSpPr>
+        <a:xfrm>
+          <a:off x="0" y="0"/>
+          <a:ext cx="0" cy="0"/>
+          <a:chOff x="0" y="0"/>
+          <a:chExt cx="0" cy="0"/>
+        </a:xfrm>
+      </p:grpSpPr>
       <p:sp>
         <p:nvSpPr>
           <p:cNvPr id="2" name="TextBox 1"/>
@@ -19817,15 +19838,15 @@
         <p:spPr>
           <a:xfrm>
             <a:off x="566928" y="365760"/>
-            <a:ext cx="11057839" cy="274320"/>
-          </a:xfrm>
-          <a:prstGeom prst="rect">
-            <a:avLst/>
-          </a:prstGeom>
-          <a:noFill/>
-        </p:spPr>
-        <p:txBody>
-          <a:bodyPr wrap="square" anchor="t" lIns="0" rIns="0" tIns="0" bIns="0">
+            <a:ext cx="11057839" cy="209673"/>
+          </a:xfrm>
+          <a:prstGeom prst="rect">
+            <a:avLst/>
+          </a:prstGeom>
+          <a:noFill/>
+        </p:spPr>
+        <p:txBody>
+          <a:bodyPr wrap="square" lIns="0" tIns="0" rIns="0" bIns="0" anchor="t">
             <a:spAutoFit/>
           </a:bodyPr>
           <a:lstStyle/>
@@ -19836,13 +19857,13 @@
               </a:lnSpc>
             </a:pPr>
             <a:r>
-              <a:rPr sz="1200" b="1" i="0" spc="180">
+              <a:rPr sz="1200" b="1" i="0" spc="180" dirty="0">
                 <a:solidFill>
                   <a:srgbClr val="D9484E"/>
                 </a:solidFill>
                 <a:latin typeface="Calibri"/>
               </a:rPr>
-              <a:t>RESULTS  ·  1 OF 4</a:t>
+              <a:t>RESULTS</a:t>
             </a:r>
           </a:p>
         </p:txBody>
@@ -19864,7 +19885,7 @@
           <a:noFill/>
         </p:spPr>
         <p:txBody>
-          <a:bodyPr wrap="square" anchor="t" lIns="0" rIns="0" tIns="0" bIns="0">
+          <a:bodyPr wrap="square" lIns="0" tIns="0" rIns="0" bIns="0" anchor="t">
             <a:spAutoFit/>
           </a:bodyPr>
           <a:lstStyle/>
@@ -19927,7 +19948,9 @@
         <p:txBody>
           <a:bodyPr rtlCol="0" anchor="ctr"/>
           <a:lstStyle/>
-          <a:p/>
+          <a:p>
+            <a:endParaRPr/>
+          </a:p>
         </p:txBody>
       </p:sp>
       <p:sp>
@@ -19947,7 +19970,7 @@
           <a:noFill/>
         </p:spPr>
         <p:txBody>
-          <a:bodyPr wrap="square" anchor="ctr" lIns="0" rIns="0" tIns="0" bIns="0">
+          <a:bodyPr wrap="square" lIns="0" tIns="0" rIns="0" bIns="0" anchor="ctr">
             <a:spAutoFit/>
           </a:bodyPr>
           <a:lstStyle/>
@@ -19986,7 +20009,7 @@
           <a:noFill/>
         </p:spPr>
         <p:txBody>
-          <a:bodyPr wrap="square" anchor="t" lIns="0" rIns="0" tIns="0" bIns="0">
+          <a:bodyPr wrap="square" lIns="0" tIns="0" rIns="0" bIns="0" anchor="t">
             <a:spAutoFit/>
           </a:bodyPr>
           <a:lstStyle/>
@@ -20081,7 +20104,9 @@
         <p:txBody>
           <a:bodyPr rtlCol="0" anchor="ctr"/>
           <a:lstStyle/>
-          <a:p/>
+          <a:p>
+            <a:endParaRPr/>
+          </a:p>
         </p:txBody>
       </p:sp>
       <p:sp>
@@ -20101,7 +20126,7 @@
           <a:noFill/>
         </p:spPr>
         <p:txBody>
-          <a:bodyPr wrap="square" anchor="ctr" lIns="0" rIns="0" tIns="0" bIns="0">
+          <a:bodyPr wrap="square" lIns="0" tIns="0" rIns="0" bIns="0" anchor="ctr">
             <a:spAutoFit/>
           </a:bodyPr>
           <a:lstStyle/>
@@ -20140,7 +20165,7 @@
           <a:noFill/>
         </p:spPr>
         <p:txBody>
-          <a:bodyPr wrap="square" anchor="t" lIns="0" rIns="0" tIns="0" bIns="0">
+          <a:bodyPr wrap="square" lIns="0" tIns="0" rIns="0" bIns="0" anchor="t">
             <a:spAutoFit/>
           </a:bodyPr>
           <a:lstStyle/>
@@ -20219,7 +20244,9 @@
         <p:txBody>
           <a:bodyPr rtlCol="0" anchor="ctr"/>
           <a:lstStyle/>
-          <a:p/>
+          <a:p>
+            <a:endParaRPr/>
+          </a:p>
         </p:txBody>
       </p:sp>
       <p:sp>
@@ -20239,7 +20266,7 @@
           <a:noFill/>
         </p:spPr>
         <p:txBody>
-          <a:bodyPr wrap="square" anchor="t" lIns="0" rIns="0" tIns="0" bIns="0">
+          <a:bodyPr wrap="square" lIns="0" tIns="0" rIns="0" bIns="0" anchor="t">
             <a:spAutoFit/>
           </a:bodyPr>
           <a:lstStyle/>
@@ -20310,7 +20337,7 @@
           <a:noFill/>
         </p:spPr>
         <p:txBody>
-          <a:bodyPr wrap="square" anchor="t" lIns="0" rIns="0" tIns="0" bIns="0">
+          <a:bodyPr wrap="square" lIns="0" tIns="0" rIns="0" bIns="0" anchor="t">
             <a:spAutoFit/>
           </a:bodyPr>
           <a:lstStyle/>
@@ -20391,6 +20418,7 @@
           <a:lstStyle/>
           <a:p>
             <a:pPr algn="ctr"/>
+            <a:endParaRPr/>
           </a:p>
         </p:txBody>
       </p:sp>
@@ -20411,7 +20439,7 @@
           <a:noFill/>
         </p:spPr>
         <p:txBody>
-          <a:bodyPr wrap="square" anchor="t" lIns="0" rIns="0" tIns="0" bIns="0">
+          <a:bodyPr wrap="square" lIns="0" tIns="0" rIns="0" bIns="0" anchor="t">
             <a:spAutoFit/>
           </a:bodyPr>
           <a:lstStyle/>
@@ -20450,7 +20478,7 @@
           <a:noFill/>
         </p:spPr>
         <p:txBody>
-          <a:bodyPr wrap="square" anchor="t" lIns="0" rIns="0" tIns="0" bIns="0">
+          <a:bodyPr wrap="square" lIns="0" tIns="0" rIns="0" bIns="0" anchor="t">
             <a:spAutoFit/>
           </a:bodyPr>
           <a:lstStyle/>
@@ -20515,6 +20543,7 @@
           <a:lstStyle/>
           <a:p>
             <a:pPr algn="ctr"/>
+            <a:endParaRPr/>
           </a:p>
         </p:txBody>
       </p:sp>
@@ -20535,7 +20564,7 @@
           <a:noFill/>
         </p:spPr>
         <p:txBody>
-          <a:bodyPr wrap="square" anchor="t" lIns="0" rIns="0" tIns="0" bIns="0">
+          <a:bodyPr wrap="square" lIns="0" tIns="0" rIns="0" bIns="0" anchor="t">
             <a:spAutoFit/>
           </a:bodyPr>
           <a:lstStyle/>
@@ -20574,7 +20603,7 @@
           <a:noFill/>
         </p:spPr>
         <p:txBody>
-          <a:bodyPr wrap="square" anchor="t" lIns="0" rIns="0" tIns="0" bIns="0">
+          <a:bodyPr wrap="square" lIns="0" tIns="0" rIns="0" bIns="0" anchor="t">
             <a:spAutoFit/>
           </a:bodyPr>
           <a:lstStyle/>
@@ -20935,44 +20964,44 @@
         <a:sysClr val="window" lastClr="FFFFFF"/>
       </a:lt1>
       <a:dk2>
-        <a:srgbClr val="1F497D"/>
+        <a:srgbClr val="0E2841"/>
       </a:dk2>
       <a:lt2>
-        <a:srgbClr val="EEECE1"/>
+        <a:srgbClr val="E8E8E8"/>
       </a:lt2>
       <a:accent1>
-        <a:srgbClr val="4F81BD"/>
+        <a:srgbClr val="156082"/>
       </a:accent1>
       <a:accent2>
-        <a:srgbClr val="C0504D"/>
+        <a:srgbClr val="E97132"/>
       </a:accent2>
       <a:accent3>
-        <a:srgbClr val="9BBB59"/>
+        <a:srgbClr val="196B24"/>
       </a:accent3>
       <a:accent4>
-        <a:srgbClr val="8064A2"/>
+        <a:srgbClr val="0F9ED5"/>
       </a:accent4>
       <a:accent5>
-        <a:srgbClr val="4BACC6"/>
+        <a:srgbClr val="A02B93"/>
       </a:accent5>
       <a:accent6>
-        <a:srgbClr val="F79646"/>
+        <a:srgbClr val="4EA72E"/>
       </a:accent6>
       <a:hlink>
-        <a:srgbClr val="0000FF"/>
+        <a:srgbClr val="467886"/>
       </a:hlink>
       <a:folHlink>
-        <a:srgbClr val="800080"/>
+        <a:srgbClr val="96607D"/>
       </a:folHlink>
     </a:clrScheme>
     <a:fontScheme name="Office">
       <a:majorFont>
-        <a:latin typeface="Calibri"/>
+        <a:latin typeface="Aptos Display" panose="02110004020202020204"/>
         <a:ea typeface=""/>
         <a:cs typeface=""/>
-        <a:font script="Jpan" typeface="ＭＳ Ｐゴシック"/>
+        <a:font script="Jpan" typeface="游ゴシック Light"/>
         <a:font script="Hang" typeface="맑은 고딕"/>
-        <a:font script="Hans" typeface="宋体"/>
+        <a:font script="Hans" typeface="等线 Light"/>
         <a:font script="Hant" typeface="新細明體"/>
         <a:font script="Arab" typeface="Times New Roman"/>
         <a:font script="Hebr" typeface="Times New Roman"/>
@@ -21000,14 +21029,31 @@
         <a:font script="Viet" typeface="Times New Roman"/>
         <a:font script="Uigh" typeface="Microsoft Uighur"/>
         <a:font script="Geor" typeface="Sylfaen"/>
+        <a:font script="Armn" typeface="Arial"/>
+        <a:font script="Bugi" typeface="Leelawadee UI"/>
+        <a:font script="Bopo" typeface="Microsoft JhengHei"/>
+        <a:font script="Java" typeface="Javanese Text"/>
+        <a:font script="Lisu" typeface="Segoe UI"/>
+        <a:font script="Mymr" typeface="Myanmar Text"/>
+        <a:font script="Nkoo" typeface="Ebrima"/>
+        <a:font script="Olck" typeface="Nirmala UI"/>
+        <a:font script="Osma" typeface="Ebrima"/>
+        <a:font script="Phag" typeface="Phagspa"/>
+        <a:font script="Syrn" typeface="Estrangelo Edessa"/>
+        <a:font script="Syrj" typeface="Estrangelo Edessa"/>
+        <a:font script="Syre" typeface="Estrangelo Edessa"/>
+        <a:font script="Sora" typeface="Nirmala UI"/>
+        <a:font script="Tale" typeface="Microsoft Tai Le"/>
+        <a:font script="Talu" typeface="Microsoft New Tai Lue"/>
+        <a:font script="Tfng" typeface="Ebrima"/>
       </a:majorFont>
       <a:minorFont>
-        <a:latin typeface="Calibri"/>
+        <a:latin typeface="Aptos" panose="02110004020202020204"/>
         <a:ea typeface=""/>
         <a:cs typeface=""/>
-        <a:font script="Jpan" typeface="ＭＳ Ｐゴシック"/>
+        <a:font script="Jpan" typeface="游ゴシック"/>
         <a:font script="Hang" typeface="맑은 고딕"/>
-        <a:font script="Hans" typeface="宋体"/>
+        <a:font script="Hans" typeface="等线"/>
         <a:font script="Hant" typeface="新細明體"/>
         <a:font script="Arab" typeface="Arial"/>
         <a:font script="Hebr" typeface="Arial"/>
@@ -21035,6 +21081,23 @@
         <a:font script="Viet" typeface="Arial"/>
         <a:font script="Uigh" typeface="Microsoft Uighur"/>
         <a:font script="Geor" typeface="Sylfaen"/>
+        <a:font script="Armn" typeface="Arial"/>
+        <a:font script="Bugi" typeface="Leelawadee UI"/>
+        <a:font script="Bopo" typeface="Microsoft JhengHei"/>
+        <a:font script="Java" typeface="Javanese Text"/>
+        <a:font script="Lisu" typeface="Segoe UI"/>
+        <a:font script="Mymr" typeface="Myanmar Text"/>
+        <a:font script="Nkoo" typeface="Ebrima"/>
+        <a:font script="Olck" typeface="Nirmala UI"/>
+        <a:font script="Osma" typeface="Ebrima"/>
+        <a:font script="Phag" typeface="Phagspa"/>
+        <a:font script="Syrn" typeface="Estrangelo Edessa"/>
+        <a:font script="Syrj" typeface="Estrangelo Edessa"/>
+        <a:font script="Syre" typeface="Estrangelo Edessa"/>
+        <a:font script="Sora" typeface="Nirmala UI"/>
+        <a:font script="Tale" typeface="Microsoft Tai Le"/>
+        <a:font script="Talu" typeface="Microsoft New Tai Lue"/>
+        <a:font script="Tfng" typeface="Ebrima"/>
       </a:minorFont>
     </a:fontScheme>
     <a:fmtScheme name="Office">
@@ -21046,180 +21109,136 @@
           <a:gsLst>
             <a:gs pos="0">
               <a:schemeClr val="phClr">
-                <a:tint val="50000"/>
-                <a:satMod val="300000"/>
+                <a:lumMod val="110000"/>
+                <a:satMod val="105000"/>
+                <a:tint val="67000"/>
               </a:schemeClr>
             </a:gs>
-            <a:gs pos="35000">
+            <a:gs pos="50000">
               <a:schemeClr val="phClr">
-                <a:tint val="37000"/>
-                <a:satMod val="300000"/>
+                <a:lumMod val="105000"/>
+                <a:satMod val="103000"/>
+                <a:tint val="73000"/>
               </a:schemeClr>
             </a:gs>
             <a:gs pos="100000">
               <a:schemeClr val="phClr">
-                <a:tint val="15000"/>
-                <a:satMod val="350000"/>
+                <a:lumMod val="105000"/>
+                <a:satMod val="109000"/>
+                <a:tint val="81000"/>
               </a:schemeClr>
             </a:gs>
           </a:gsLst>
-          <a:lin ang="16200000" scaled="1"/>
+          <a:lin ang="5400000" scaled="0"/>
         </a:gradFill>
         <a:gradFill rotWithShape="1">
           <a:gsLst>
             <a:gs pos="0">
               <a:schemeClr val="phClr">
-                <a:tint val="100000"/>
+                <a:satMod val="103000"/>
+                <a:lumMod val="102000"/>
+                <a:tint val="94000"/>
+              </a:schemeClr>
+            </a:gs>
+            <a:gs pos="50000">
+              <a:schemeClr val="phClr">
+                <a:satMod val="110000"/>
+                <a:lumMod val="100000"/>
                 <a:shade val="100000"/>
-                <a:satMod val="130000"/>
               </a:schemeClr>
             </a:gs>
             <a:gs pos="100000">
               <a:schemeClr val="phClr">
-                <a:tint val="50000"/>
-                <a:shade val="100000"/>
-                <a:satMod val="350000"/>
+                <a:lumMod val="99000"/>
+                <a:satMod val="120000"/>
+                <a:shade val="78000"/>
               </a:schemeClr>
             </a:gs>
           </a:gsLst>
-          <a:lin ang="16200000" scaled="0"/>
+          <a:lin ang="5400000" scaled="0"/>
         </a:gradFill>
       </a:fillStyleLst>
       <a:lnStyleLst>
-        <a:ln w="9525" cap="flat" cmpd="sng" algn="ctr">
+        <a:ln w="12700" cap="flat" cmpd="sng" algn="ctr">
           <a:solidFill>
-            <a:schemeClr val="phClr">
-              <a:shade val="95000"/>
-              <a:satMod val="105000"/>
-            </a:schemeClr>
+            <a:schemeClr val="phClr"/>
           </a:solidFill>
           <a:prstDash val="solid"/>
+          <a:miter lim="800000"/>
+        </a:ln>
+        <a:ln w="19050" cap="flat" cmpd="sng" algn="ctr">
+          <a:solidFill>
+            <a:schemeClr val="phClr"/>
+          </a:solidFill>
+          <a:prstDash val="solid"/>
+          <a:miter lim="800000"/>
         </a:ln>
         <a:ln w="25400" cap="flat" cmpd="sng" algn="ctr">
           <a:solidFill>
             <a:schemeClr val="phClr"/>
           </a:solidFill>
           <a:prstDash val="solid"/>
-        </a:ln>
-        <a:ln w="38100" cap="flat" cmpd="sng" algn="ctr">
-          <a:solidFill>
-            <a:schemeClr val="phClr"/>
-          </a:solidFill>
-          <a:prstDash val="solid"/>
+          <a:miter lim="800000"/>
         </a:ln>
       </a:lnStyleLst>
       <a:effectStyleLst>
         <a:effectStyle>
+          <a:effectLst/>
+        </a:effectStyle>
+        <a:effectStyle>
+          <a:effectLst/>
+        </a:effectStyle>
+        <a:effectStyle>
           <a:effectLst>
-            <a:outerShdw blurRad="40000" dist="20000" dir="5400000" rotWithShape="0">
+            <a:outerShdw blurRad="57150" dist="19050" dir="5400000" algn="ctr" rotWithShape="0">
               <a:srgbClr val="000000">
-                <a:alpha val="38000"/>
+                <a:alpha val="63000"/>
               </a:srgbClr>
             </a:outerShdw>
           </a:effectLst>
-        </a:effectStyle>
-        <a:effectStyle>
-          <a:effectLst>
-            <a:outerShdw blurRad="40000" dist="23000" dir="5400000" rotWithShape="0">
-              <a:srgbClr val="000000">
-                <a:alpha val="35000"/>
-              </a:srgbClr>
-            </a:outerShdw>
-          </a:effectLst>
-        </a:effectStyle>
-        <a:effectStyle>
-          <a:effectLst>
-            <a:outerShdw blurRad="40000" dist="23000" dir="5400000" rotWithShape="0">
-              <a:srgbClr val="000000">
-                <a:alpha val="35000"/>
-              </a:srgbClr>
-            </a:outerShdw>
-          </a:effectLst>
-          <a:scene3d>
-            <a:camera prst="orthographicFront">
-              <a:rot lat="0" lon="0" rev="0"/>
-            </a:camera>
-            <a:lightRig rig="threePt" dir="t">
-              <a:rot lat="0" lon="0" rev="1200000"/>
-            </a:lightRig>
-          </a:scene3d>
-          <a:sp3d>
-            <a:bevelT w="63500" h="25400"/>
-          </a:sp3d>
         </a:effectStyle>
       </a:effectStyleLst>
       <a:bgFillStyleLst>
         <a:solidFill>
           <a:schemeClr val="phClr"/>
         </a:solidFill>
+        <a:solidFill>
+          <a:schemeClr val="phClr">
+            <a:tint val="95000"/>
+            <a:satMod val="170000"/>
+          </a:schemeClr>
+        </a:solidFill>
         <a:gradFill rotWithShape="1">
           <a:gsLst>
             <a:gs pos="0">
               <a:schemeClr val="phClr">
-                <a:tint val="40000"/>
-                <a:satMod val="350000"/>
+                <a:tint val="93000"/>
+                <a:satMod val="150000"/>
+                <a:shade val="98000"/>
+                <a:lumMod val="102000"/>
               </a:schemeClr>
             </a:gs>
-            <a:gs pos="40000">
+            <a:gs pos="50000">
               <a:schemeClr val="phClr">
-                <a:tint val="45000"/>
-                <a:shade val="99000"/>
-                <a:satMod val="350000"/>
+                <a:tint val="98000"/>
+                <a:satMod val="130000"/>
+                <a:shade val="90000"/>
+                <a:lumMod val="103000"/>
               </a:schemeClr>
             </a:gs>
             <a:gs pos="100000">
               <a:schemeClr val="phClr">
-                <a:shade val="20000"/>
-                <a:satMod val="255000"/>
+                <a:shade val="63000"/>
+                <a:satMod val="120000"/>
               </a:schemeClr>
             </a:gs>
           </a:gsLst>
-          <a:path path="circle">
-            <a:fillToRect l="50000" t="-80000" r="50000" b="180000"/>
-          </a:path>
-        </a:gradFill>
-        <a:gradFill rotWithShape="1">
-          <a:gsLst>
-            <a:gs pos="0">
-              <a:schemeClr val="phClr">
-                <a:tint val="80000"/>
-                <a:satMod val="300000"/>
-              </a:schemeClr>
-            </a:gs>
-            <a:gs pos="100000">
-              <a:schemeClr val="phClr">
-                <a:shade val="30000"/>
-                <a:satMod val="200000"/>
-              </a:schemeClr>
-            </a:gs>
-          </a:gsLst>
-          <a:path path="circle">
-            <a:fillToRect l="50000" t="50000" r="50000" b="50000"/>
-          </a:path>
+          <a:lin ang="5400000" scaled="0"/>
         </a:gradFill>
       </a:bgFillStyleLst>
     </a:fmtScheme>
   </a:themeElements>
   <a:objectDefaults>
-    <a:spDef>
-      <a:spPr/>
-      <a:bodyPr/>
-      <a:lstStyle/>
-      <a:style>
-        <a:lnRef idx="1">
-          <a:schemeClr val="accent1"/>
-        </a:lnRef>
-        <a:fillRef idx="3">
-          <a:schemeClr val="accent1"/>
-        </a:fillRef>
-        <a:effectRef idx="2">
-          <a:schemeClr val="accent1"/>
-        </a:effectRef>
-        <a:fontRef idx="minor">
-          <a:schemeClr val="lt1"/>
-        </a:fontRef>
-      </a:style>
-    </a:spDef>
     <a:lnDef>
       <a:spPr/>
       <a:bodyPr/>
@@ -21241,5 +21260,10 @@
     </a:lnDef>
   </a:objectDefaults>
   <a:extraClrSchemeLst/>
+  <a:extLst>
+    <a:ext uri="{05A4C25C-085E-4340-85A3-A5531E510DB2}">
+      <thm15:themeFamily xmlns:thm15="http://schemas.microsoft.com/office/thememl/2012/main" name="Office Theme" id="{2E142A2C-CD16-42D6-873A-C26D2A0506FA}" vid="{1BDDFF52-6CD6-40A5-AB3C-68EB2F1E4D0A}"/>
+    </a:ext>
+  </a:extLst>
 </a:theme>
 </file>